--- a/CR/Presentation_PFE.pptx
+++ b/CR/Presentation_PFE.pptx
@@ -1,24 +1,30 @@
 
 <file path=ppt/presentation.xml><?xml version="1.0" encoding="utf-8"?>
-<p:presentation xmlns:a="http://schemas.openxmlformats.org/drawingml/2006/main" xmlns:r="http://schemas.openxmlformats.org/officeDocument/2006/relationships" xmlns:p="http://schemas.openxmlformats.org/presentationml/2006/main" xmlns:m="http://schemas.openxmlformats.org/officeDocument/2006/math" xmlns:w="http://schemas.openxmlformats.org/wordprocessingml/2006/main" saveSubsetFonts="1">
+<p:presentation xmlns:a="http://schemas.openxmlformats.org/drawingml/2006/main" xmlns:r="http://schemas.openxmlformats.org/officeDocument/2006/relationships" xmlns:p="http://schemas.openxmlformats.org/presentationml/2006/main" saveSubsetFonts="1">
   <p:sldMasterIdLst>
     <p:sldMasterId id="2147483648" r:id="rId1"/>
   </p:sldMasterIdLst>
   <p:notesMasterIdLst>
-    <p:notesMasterId r:id="rId15"/>
+    <p:notesMasterId r:id="rId19"/>
   </p:notesMasterIdLst>
   <p:sldIdLst>
-    <p:sldId id="256" r:id="rId4"/>
-    <p:sldId id="257" r:id="rId5"/>
-    <p:sldId id="258" r:id="rId6"/>
-    <p:sldId id="259" r:id="rId7"/>
-    <p:sldId id="260" r:id="rId8"/>
-    <p:sldId id="261" r:id="rId9"/>
-    <p:sldId id="262" r:id="rId10"/>
-    <p:sldId id="263" r:id="rId11"/>
-    <p:sldId id="264" r:id="rId12"/>
-    <p:sldId id="265" r:id="rId13"/>
-    <p:sldId id="266" r:id="rId14"/>
+    <p:sldId id="256" r:id="rId2"/>
+    <p:sldId id="257" r:id="rId3"/>
+    <p:sldId id="258" r:id="rId4"/>
+    <p:sldId id="259" r:id="rId5"/>
+    <p:sldId id="260" r:id="rId6"/>
+    <p:sldId id="261" r:id="rId7"/>
+    <p:sldId id="262" r:id="rId8"/>
+    <p:sldId id="263" r:id="rId9"/>
+    <p:sldId id="264" r:id="rId10"/>
+    <p:sldId id="265" r:id="rId11"/>
+    <p:sldId id="266" r:id="rId12"/>
+    <p:sldId id="272" r:id="rId13"/>
+    <p:sldId id="267" r:id="rId14"/>
+    <p:sldId id="268" r:id="rId15"/>
+    <p:sldId id="269" r:id="rId16"/>
+    <p:sldId id="271" r:id="rId17"/>
+    <p:sldId id="270" r:id="rId18"/>
   </p:sldIdLst>
   <p:sldSz cx="12192000" cy="6858000"/>
   <p:notesSz cx="6858000" cy="9144000"/>
@@ -117,12 +123,911 @@
       </a:defRPr>
     </a:lvl9pPr>
   </p:defaultTextStyle>
+  <p:extLst>
+    <p:ext uri="{EFAFB233-063F-42B5-8137-9DF3F51BA10A}">
+      <p15:sldGuideLst xmlns:p15="http://schemas.microsoft.com/office/powerpoint/2012/main">
+        <p15:guide id="1" pos="3840">
+          <p15:clr>
+            <a:srgbClr val="A4A3A4"/>
+          </p15:clr>
+        </p15:guide>
+        <p15:guide id="2" orient="horz" pos="2160">
+          <p15:clr>
+            <a:srgbClr val="A4A3A4"/>
+          </p15:clr>
+        </p15:guide>
+      </p15:sldGuideLst>
+    </p:ext>
+  </p:extLst>
 </p:presentation>
+</file>
+
+<file path=ppt/revisionInfo.xml><?xml version="1.0" encoding="utf-8"?>
+<p1510:revInfo xmlns:a="http://schemas.openxmlformats.org/drawingml/2006/main" xmlns:r="http://schemas.openxmlformats.org/officeDocument/2006/relationships" xmlns:p1510="http://schemas.microsoft.com/office/powerpoint/2015/10/main">
+  <p1510:revLst>
+    <p1510:client id="{060840EF-D0EA-457B-9B9D-F3F93FE771A4}" v="27" dt="2026-01-29T21:55:49.142"/>
+  </p1510:revLst>
+</p1510:revInfo>
+</file>
+
+<file path=ppt/changesInfos/changesInfo1.xml><?xml version="1.0" encoding="utf-8"?>
+<pc:chgInfo xmlns:a="http://schemas.openxmlformats.org/drawingml/2006/main" xmlns:r="http://schemas.openxmlformats.org/officeDocument/2006/relationships" xmlns:ac="http://schemas.microsoft.com/office/drawing/2013/main/command" xmlns:pc="http://schemas.microsoft.com/office/powerpoint/2013/main/command">
+  <pc:docChgLst>
+    <pc:chgData name="Gael Chauvet" userId="d9b78660470a3240" providerId="LiveId" clId="{C89AC4F4-AFF2-4C9A-A119-DA3D2677413A}"/>
+    <pc:docChg chg="undo custSel addSld delSld modSld">
+      <pc:chgData name="Gael Chauvet" userId="d9b78660470a3240" providerId="LiveId" clId="{C89AC4F4-AFF2-4C9A-A119-DA3D2677413A}" dt="2026-01-29T21:55:58.255" v="422" actId="1076"/>
+      <pc:docMkLst>
+        <pc:docMk/>
+      </pc:docMkLst>
+      <pc:sldChg chg="modSp">
+        <pc:chgData name="Gael Chauvet" userId="d9b78660470a3240" providerId="LiveId" clId="{C89AC4F4-AFF2-4C9A-A119-DA3D2677413A}" dt="2026-01-29T20:33:26.883" v="11"/>
+        <pc:sldMkLst>
+          <pc:docMk/>
+          <pc:sldMk cId="0" sldId="256"/>
+        </pc:sldMkLst>
+        <pc:spChg chg="mod">
+          <ac:chgData name="Gael Chauvet" userId="d9b78660470a3240" providerId="LiveId" clId="{C89AC4F4-AFF2-4C9A-A119-DA3D2677413A}" dt="2026-01-29T20:33:26.883" v="11"/>
+          <ac:spMkLst>
+            <pc:docMk/>
+            <pc:sldMk cId="0" sldId="256"/>
+            <ac:spMk id="1971701423" creationId="{00000000-0000-0000-0000-000000000000}"/>
+          </ac:spMkLst>
+        </pc:spChg>
+        <pc:spChg chg="mod">
+          <ac:chgData name="Gael Chauvet" userId="d9b78660470a3240" providerId="LiveId" clId="{C89AC4F4-AFF2-4C9A-A119-DA3D2677413A}" dt="2026-01-29T20:33:26.883" v="11"/>
+          <ac:spMkLst>
+            <pc:docMk/>
+            <pc:sldMk cId="0" sldId="256"/>
+            <ac:spMk id="2135210665" creationId="{00000000-0000-0000-0000-000000000000}"/>
+          </ac:spMkLst>
+        </pc:spChg>
+      </pc:sldChg>
+      <pc:sldChg chg="modSp">
+        <pc:chgData name="Gael Chauvet" userId="d9b78660470a3240" providerId="LiveId" clId="{C89AC4F4-AFF2-4C9A-A119-DA3D2677413A}" dt="2026-01-29T20:33:26.883" v="11"/>
+        <pc:sldMkLst>
+          <pc:docMk/>
+          <pc:sldMk cId="0" sldId="257"/>
+        </pc:sldMkLst>
+        <pc:spChg chg="mod">
+          <ac:chgData name="Gael Chauvet" userId="d9b78660470a3240" providerId="LiveId" clId="{C89AC4F4-AFF2-4C9A-A119-DA3D2677413A}" dt="2026-01-29T20:33:26.883" v="11"/>
+          <ac:spMkLst>
+            <pc:docMk/>
+            <pc:sldMk cId="0" sldId="257"/>
+            <ac:spMk id="965643081" creationId="{00000000-0000-0000-0000-000000000000}"/>
+          </ac:spMkLst>
+        </pc:spChg>
+        <pc:spChg chg="mod">
+          <ac:chgData name="Gael Chauvet" userId="d9b78660470a3240" providerId="LiveId" clId="{C89AC4F4-AFF2-4C9A-A119-DA3D2677413A}" dt="2026-01-29T20:33:26.883" v="11"/>
+          <ac:spMkLst>
+            <pc:docMk/>
+            <pc:sldMk cId="0" sldId="257"/>
+            <ac:spMk id="1207714675" creationId="{00000000-0000-0000-0000-000000000000}"/>
+          </ac:spMkLst>
+        </pc:spChg>
+        <pc:spChg chg="mod">
+          <ac:chgData name="Gael Chauvet" userId="d9b78660470a3240" providerId="LiveId" clId="{C89AC4F4-AFF2-4C9A-A119-DA3D2677413A}" dt="2026-01-29T20:33:26.883" v="11"/>
+          <ac:spMkLst>
+            <pc:docMk/>
+            <pc:sldMk cId="0" sldId="257"/>
+            <ac:spMk id="1375591627" creationId="{00000000-0000-0000-0000-000000000000}"/>
+          </ac:spMkLst>
+        </pc:spChg>
+      </pc:sldChg>
+      <pc:sldChg chg="modSp">
+        <pc:chgData name="Gael Chauvet" userId="d9b78660470a3240" providerId="LiveId" clId="{C89AC4F4-AFF2-4C9A-A119-DA3D2677413A}" dt="2026-01-29T20:33:26.883" v="11"/>
+        <pc:sldMkLst>
+          <pc:docMk/>
+          <pc:sldMk cId="0" sldId="258"/>
+        </pc:sldMkLst>
+        <pc:spChg chg="mod">
+          <ac:chgData name="Gael Chauvet" userId="d9b78660470a3240" providerId="LiveId" clId="{C89AC4F4-AFF2-4C9A-A119-DA3D2677413A}" dt="2026-01-29T20:33:26.883" v="11"/>
+          <ac:spMkLst>
+            <pc:docMk/>
+            <pc:sldMk cId="0" sldId="258"/>
+            <ac:spMk id="1224031798" creationId="{00000000-0000-0000-0000-000000000000}"/>
+          </ac:spMkLst>
+        </pc:spChg>
+        <pc:spChg chg="mod">
+          <ac:chgData name="Gael Chauvet" userId="d9b78660470a3240" providerId="LiveId" clId="{C89AC4F4-AFF2-4C9A-A119-DA3D2677413A}" dt="2026-01-29T20:33:26.883" v="11"/>
+          <ac:spMkLst>
+            <pc:docMk/>
+            <pc:sldMk cId="0" sldId="258"/>
+            <ac:spMk id="1305413442" creationId="{00000000-0000-0000-0000-000000000000}"/>
+          </ac:spMkLst>
+        </pc:spChg>
+        <pc:spChg chg="mod">
+          <ac:chgData name="Gael Chauvet" userId="d9b78660470a3240" providerId="LiveId" clId="{C89AC4F4-AFF2-4C9A-A119-DA3D2677413A}" dt="2026-01-29T20:33:26.883" v="11"/>
+          <ac:spMkLst>
+            <pc:docMk/>
+            <pc:sldMk cId="0" sldId="258"/>
+            <ac:spMk id="1473875778" creationId="{00000000-0000-0000-0000-000000000000}"/>
+          </ac:spMkLst>
+        </pc:spChg>
+        <pc:spChg chg="mod">
+          <ac:chgData name="Gael Chauvet" userId="d9b78660470a3240" providerId="LiveId" clId="{C89AC4F4-AFF2-4C9A-A119-DA3D2677413A}" dt="2026-01-29T20:33:26.883" v="11"/>
+          <ac:spMkLst>
+            <pc:docMk/>
+            <pc:sldMk cId="0" sldId="258"/>
+            <ac:spMk id="2000260553" creationId="{00000000-0000-0000-0000-000000000000}"/>
+          </ac:spMkLst>
+        </pc:spChg>
+      </pc:sldChg>
+      <pc:sldChg chg="modSp">
+        <pc:chgData name="Gael Chauvet" userId="d9b78660470a3240" providerId="LiveId" clId="{C89AC4F4-AFF2-4C9A-A119-DA3D2677413A}" dt="2026-01-29T20:33:26.883" v="11"/>
+        <pc:sldMkLst>
+          <pc:docMk/>
+          <pc:sldMk cId="0" sldId="259"/>
+        </pc:sldMkLst>
+        <pc:spChg chg="mod">
+          <ac:chgData name="Gael Chauvet" userId="d9b78660470a3240" providerId="LiveId" clId="{C89AC4F4-AFF2-4C9A-A119-DA3D2677413A}" dt="2026-01-29T20:33:26.883" v="11"/>
+          <ac:spMkLst>
+            <pc:docMk/>
+            <pc:sldMk cId="0" sldId="259"/>
+            <ac:spMk id="656491572" creationId="{00000000-0000-0000-0000-000000000000}"/>
+          </ac:spMkLst>
+        </pc:spChg>
+        <pc:spChg chg="mod">
+          <ac:chgData name="Gael Chauvet" userId="d9b78660470a3240" providerId="LiveId" clId="{C89AC4F4-AFF2-4C9A-A119-DA3D2677413A}" dt="2026-01-29T20:33:26.883" v="11"/>
+          <ac:spMkLst>
+            <pc:docMk/>
+            <pc:sldMk cId="0" sldId="259"/>
+            <ac:spMk id="978480078" creationId="{00000000-0000-0000-0000-000000000000}"/>
+          </ac:spMkLst>
+        </pc:spChg>
+        <pc:spChg chg="mod">
+          <ac:chgData name="Gael Chauvet" userId="d9b78660470a3240" providerId="LiveId" clId="{C89AC4F4-AFF2-4C9A-A119-DA3D2677413A}" dt="2026-01-29T20:33:26.883" v="11"/>
+          <ac:spMkLst>
+            <pc:docMk/>
+            <pc:sldMk cId="0" sldId="259"/>
+            <ac:spMk id="1793647362" creationId="{00000000-0000-0000-0000-000000000000}"/>
+          </ac:spMkLst>
+        </pc:spChg>
+      </pc:sldChg>
+      <pc:sldChg chg="modSp">
+        <pc:chgData name="Gael Chauvet" userId="d9b78660470a3240" providerId="LiveId" clId="{C89AC4F4-AFF2-4C9A-A119-DA3D2677413A}" dt="2026-01-29T20:33:26.883" v="11"/>
+        <pc:sldMkLst>
+          <pc:docMk/>
+          <pc:sldMk cId="0" sldId="260"/>
+        </pc:sldMkLst>
+        <pc:spChg chg="mod">
+          <ac:chgData name="Gael Chauvet" userId="d9b78660470a3240" providerId="LiveId" clId="{C89AC4F4-AFF2-4C9A-A119-DA3D2677413A}" dt="2026-01-29T20:33:26.883" v="11"/>
+          <ac:spMkLst>
+            <pc:docMk/>
+            <pc:sldMk cId="0" sldId="260"/>
+            <ac:spMk id="227207917" creationId="{00000000-0000-0000-0000-000000000000}"/>
+          </ac:spMkLst>
+        </pc:spChg>
+        <pc:spChg chg="mod">
+          <ac:chgData name="Gael Chauvet" userId="d9b78660470a3240" providerId="LiveId" clId="{C89AC4F4-AFF2-4C9A-A119-DA3D2677413A}" dt="2026-01-29T20:33:26.883" v="11"/>
+          <ac:spMkLst>
+            <pc:docMk/>
+            <pc:sldMk cId="0" sldId="260"/>
+            <ac:spMk id="893369582" creationId="{00000000-0000-0000-0000-000000000000}"/>
+          </ac:spMkLst>
+        </pc:spChg>
+        <pc:spChg chg="mod">
+          <ac:chgData name="Gael Chauvet" userId="d9b78660470a3240" providerId="LiveId" clId="{C89AC4F4-AFF2-4C9A-A119-DA3D2677413A}" dt="2026-01-29T20:33:26.883" v="11"/>
+          <ac:spMkLst>
+            <pc:docMk/>
+            <pc:sldMk cId="0" sldId="260"/>
+            <ac:spMk id="956192299" creationId="{00000000-0000-0000-0000-000000000000}"/>
+          </ac:spMkLst>
+        </pc:spChg>
+        <pc:spChg chg="mod">
+          <ac:chgData name="Gael Chauvet" userId="d9b78660470a3240" providerId="LiveId" clId="{C89AC4F4-AFF2-4C9A-A119-DA3D2677413A}" dt="2026-01-29T20:33:26.883" v="11"/>
+          <ac:spMkLst>
+            <pc:docMk/>
+            <pc:sldMk cId="0" sldId="260"/>
+            <ac:spMk id="1436195282" creationId="{00000000-0000-0000-0000-000000000000}"/>
+          </ac:spMkLst>
+        </pc:spChg>
+      </pc:sldChg>
+      <pc:sldChg chg="modSp">
+        <pc:chgData name="Gael Chauvet" userId="d9b78660470a3240" providerId="LiveId" clId="{C89AC4F4-AFF2-4C9A-A119-DA3D2677413A}" dt="2026-01-29T20:33:26.883" v="11"/>
+        <pc:sldMkLst>
+          <pc:docMk/>
+          <pc:sldMk cId="0" sldId="261"/>
+        </pc:sldMkLst>
+        <pc:spChg chg="mod">
+          <ac:chgData name="Gael Chauvet" userId="d9b78660470a3240" providerId="LiveId" clId="{C89AC4F4-AFF2-4C9A-A119-DA3D2677413A}" dt="2026-01-29T20:33:26.883" v="11"/>
+          <ac:spMkLst>
+            <pc:docMk/>
+            <pc:sldMk cId="0" sldId="261"/>
+            <ac:spMk id="1219435151" creationId="{00000000-0000-0000-0000-000000000000}"/>
+          </ac:spMkLst>
+        </pc:spChg>
+        <pc:spChg chg="mod">
+          <ac:chgData name="Gael Chauvet" userId="d9b78660470a3240" providerId="LiveId" clId="{C89AC4F4-AFF2-4C9A-A119-DA3D2677413A}" dt="2026-01-29T20:33:26.883" v="11"/>
+          <ac:spMkLst>
+            <pc:docMk/>
+            <pc:sldMk cId="0" sldId="261"/>
+            <ac:spMk id="1285907199" creationId="{00000000-0000-0000-0000-000000000000}"/>
+          </ac:spMkLst>
+        </pc:spChg>
+        <pc:spChg chg="mod">
+          <ac:chgData name="Gael Chauvet" userId="d9b78660470a3240" providerId="LiveId" clId="{C89AC4F4-AFF2-4C9A-A119-DA3D2677413A}" dt="2026-01-29T20:33:26.883" v="11"/>
+          <ac:spMkLst>
+            <pc:docMk/>
+            <pc:sldMk cId="0" sldId="261"/>
+            <ac:spMk id="2033495573" creationId="{00000000-0000-0000-0000-000000000000}"/>
+          </ac:spMkLst>
+        </pc:spChg>
+        <pc:spChg chg="mod">
+          <ac:chgData name="Gael Chauvet" userId="d9b78660470a3240" providerId="LiveId" clId="{C89AC4F4-AFF2-4C9A-A119-DA3D2677413A}" dt="2026-01-29T20:33:26.883" v="11"/>
+          <ac:spMkLst>
+            <pc:docMk/>
+            <pc:sldMk cId="0" sldId="261"/>
+            <ac:spMk id="2065548379" creationId="{00000000-0000-0000-0000-000000000000}"/>
+          </ac:spMkLst>
+        </pc:spChg>
+      </pc:sldChg>
+      <pc:sldChg chg="modSp">
+        <pc:chgData name="Gael Chauvet" userId="d9b78660470a3240" providerId="LiveId" clId="{C89AC4F4-AFF2-4C9A-A119-DA3D2677413A}" dt="2026-01-29T20:33:26.883" v="11"/>
+        <pc:sldMkLst>
+          <pc:docMk/>
+          <pc:sldMk cId="0" sldId="262"/>
+        </pc:sldMkLst>
+        <pc:spChg chg="mod">
+          <ac:chgData name="Gael Chauvet" userId="d9b78660470a3240" providerId="LiveId" clId="{C89AC4F4-AFF2-4C9A-A119-DA3D2677413A}" dt="2026-01-29T20:33:26.883" v="11"/>
+          <ac:spMkLst>
+            <pc:docMk/>
+            <pc:sldMk cId="0" sldId="262"/>
+            <ac:spMk id="101397041" creationId="{00000000-0000-0000-0000-000000000000}"/>
+          </ac:spMkLst>
+        </pc:spChg>
+        <pc:spChg chg="mod">
+          <ac:chgData name="Gael Chauvet" userId="d9b78660470a3240" providerId="LiveId" clId="{C89AC4F4-AFF2-4C9A-A119-DA3D2677413A}" dt="2026-01-29T20:33:26.883" v="11"/>
+          <ac:spMkLst>
+            <pc:docMk/>
+            <pc:sldMk cId="0" sldId="262"/>
+            <ac:spMk id="689387526" creationId="{00000000-0000-0000-0000-000000000000}"/>
+          </ac:spMkLst>
+        </pc:spChg>
+        <pc:spChg chg="mod">
+          <ac:chgData name="Gael Chauvet" userId="d9b78660470a3240" providerId="LiveId" clId="{C89AC4F4-AFF2-4C9A-A119-DA3D2677413A}" dt="2026-01-29T20:33:26.883" v="11"/>
+          <ac:spMkLst>
+            <pc:docMk/>
+            <pc:sldMk cId="0" sldId="262"/>
+            <ac:spMk id="899933483" creationId="{00000000-0000-0000-0000-000000000000}"/>
+          </ac:spMkLst>
+        </pc:spChg>
+        <pc:spChg chg="mod">
+          <ac:chgData name="Gael Chauvet" userId="d9b78660470a3240" providerId="LiveId" clId="{C89AC4F4-AFF2-4C9A-A119-DA3D2677413A}" dt="2026-01-29T20:33:26.883" v="11"/>
+          <ac:spMkLst>
+            <pc:docMk/>
+            <pc:sldMk cId="0" sldId="262"/>
+            <ac:spMk id="1652110690" creationId="{00000000-0000-0000-0000-000000000000}"/>
+          </ac:spMkLst>
+        </pc:spChg>
+      </pc:sldChg>
+      <pc:sldChg chg="modSp">
+        <pc:chgData name="Gael Chauvet" userId="d9b78660470a3240" providerId="LiveId" clId="{C89AC4F4-AFF2-4C9A-A119-DA3D2677413A}" dt="2026-01-29T20:33:26.883" v="11"/>
+        <pc:sldMkLst>
+          <pc:docMk/>
+          <pc:sldMk cId="0" sldId="263"/>
+        </pc:sldMkLst>
+        <pc:spChg chg="mod">
+          <ac:chgData name="Gael Chauvet" userId="d9b78660470a3240" providerId="LiveId" clId="{C89AC4F4-AFF2-4C9A-A119-DA3D2677413A}" dt="2026-01-29T20:33:26.883" v="11"/>
+          <ac:spMkLst>
+            <pc:docMk/>
+            <pc:sldMk cId="0" sldId="263"/>
+            <ac:spMk id="594385368" creationId="{00000000-0000-0000-0000-000000000000}"/>
+          </ac:spMkLst>
+        </pc:spChg>
+        <pc:spChg chg="mod">
+          <ac:chgData name="Gael Chauvet" userId="d9b78660470a3240" providerId="LiveId" clId="{C89AC4F4-AFF2-4C9A-A119-DA3D2677413A}" dt="2026-01-29T20:33:26.883" v="11"/>
+          <ac:spMkLst>
+            <pc:docMk/>
+            <pc:sldMk cId="0" sldId="263"/>
+            <ac:spMk id="2109573538" creationId="{00000000-0000-0000-0000-000000000000}"/>
+          </ac:spMkLst>
+        </pc:spChg>
+        <pc:spChg chg="mod">
+          <ac:chgData name="Gael Chauvet" userId="d9b78660470a3240" providerId="LiveId" clId="{C89AC4F4-AFF2-4C9A-A119-DA3D2677413A}" dt="2026-01-29T20:33:26.883" v="11"/>
+          <ac:spMkLst>
+            <pc:docMk/>
+            <pc:sldMk cId="0" sldId="263"/>
+            <ac:spMk id="2137186509" creationId="{00000000-0000-0000-0000-000000000000}"/>
+          </ac:spMkLst>
+        </pc:spChg>
+      </pc:sldChg>
+      <pc:sldChg chg="modSp">
+        <pc:chgData name="Gael Chauvet" userId="d9b78660470a3240" providerId="LiveId" clId="{C89AC4F4-AFF2-4C9A-A119-DA3D2677413A}" dt="2026-01-29T20:33:26.883" v="11"/>
+        <pc:sldMkLst>
+          <pc:docMk/>
+          <pc:sldMk cId="0" sldId="264"/>
+        </pc:sldMkLst>
+        <pc:spChg chg="mod">
+          <ac:chgData name="Gael Chauvet" userId="d9b78660470a3240" providerId="LiveId" clId="{C89AC4F4-AFF2-4C9A-A119-DA3D2677413A}" dt="2026-01-29T20:33:26.883" v="11"/>
+          <ac:spMkLst>
+            <pc:docMk/>
+            <pc:sldMk cId="0" sldId="264"/>
+            <ac:spMk id="101568447" creationId="{00000000-0000-0000-0000-000000000000}"/>
+          </ac:spMkLst>
+        </pc:spChg>
+        <pc:spChg chg="mod">
+          <ac:chgData name="Gael Chauvet" userId="d9b78660470a3240" providerId="LiveId" clId="{C89AC4F4-AFF2-4C9A-A119-DA3D2677413A}" dt="2026-01-29T20:33:26.883" v="11"/>
+          <ac:spMkLst>
+            <pc:docMk/>
+            <pc:sldMk cId="0" sldId="264"/>
+            <ac:spMk id="701206748" creationId="{00000000-0000-0000-0000-000000000000}"/>
+          </ac:spMkLst>
+        </pc:spChg>
+        <pc:spChg chg="mod">
+          <ac:chgData name="Gael Chauvet" userId="d9b78660470a3240" providerId="LiveId" clId="{C89AC4F4-AFF2-4C9A-A119-DA3D2677413A}" dt="2026-01-29T20:33:26.883" v="11"/>
+          <ac:spMkLst>
+            <pc:docMk/>
+            <pc:sldMk cId="0" sldId="264"/>
+            <ac:spMk id="1332190713" creationId="{00000000-0000-0000-0000-000000000000}"/>
+          </ac:spMkLst>
+        </pc:spChg>
+      </pc:sldChg>
+      <pc:sldChg chg="modSp">
+        <pc:chgData name="Gael Chauvet" userId="d9b78660470a3240" providerId="LiveId" clId="{C89AC4F4-AFF2-4C9A-A119-DA3D2677413A}" dt="2026-01-29T20:33:26.883" v="11"/>
+        <pc:sldMkLst>
+          <pc:docMk/>
+          <pc:sldMk cId="0" sldId="265"/>
+        </pc:sldMkLst>
+        <pc:spChg chg="mod">
+          <ac:chgData name="Gael Chauvet" userId="d9b78660470a3240" providerId="LiveId" clId="{C89AC4F4-AFF2-4C9A-A119-DA3D2677413A}" dt="2026-01-29T20:33:26.883" v="11"/>
+          <ac:spMkLst>
+            <pc:docMk/>
+            <pc:sldMk cId="0" sldId="265"/>
+            <ac:spMk id="1183545330" creationId="{00000000-0000-0000-0000-000000000000}"/>
+          </ac:spMkLst>
+        </pc:spChg>
+        <pc:spChg chg="mod">
+          <ac:chgData name="Gael Chauvet" userId="d9b78660470a3240" providerId="LiveId" clId="{C89AC4F4-AFF2-4C9A-A119-DA3D2677413A}" dt="2026-01-29T20:33:26.883" v="11"/>
+          <ac:spMkLst>
+            <pc:docMk/>
+            <pc:sldMk cId="0" sldId="265"/>
+            <ac:spMk id="1665362919" creationId="{00000000-0000-0000-0000-000000000000}"/>
+          </ac:spMkLst>
+        </pc:spChg>
+        <pc:spChg chg="mod">
+          <ac:chgData name="Gael Chauvet" userId="d9b78660470a3240" providerId="LiveId" clId="{C89AC4F4-AFF2-4C9A-A119-DA3D2677413A}" dt="2026-01-29T20:33:26.883" v="11"/>
+          <ac:spMkLst>
+            <pc:docMk/>
+            <pc:sldMk cId="0" sldId="265"/>
+            <ac:spMk id="1777033340" creationId="{00000000-0000-0000-0000-000000000000}"/>
+          </ac:spMkLst>
+        </pc:spChg>
+      </pc:sldChg>
+      <pc:sldChg chg="modSp">
+        <pc:chgData name="Gael Chauvet" userId="d9b78660470a3240" providerId="LiveId" clId="{C89AC4F4-AFF2-4C9A-A119-DA3D2677413A}" dt="2026-01-29T20:33:26.883" v="11"/>
+        <pc:sldMkLst>
+          <pc:docMk/>
+          <pc:sldMk cId="0" sldId="266"/>
+        </pc:sldMkLst>
+        <pc:spChg chg="mod">
+          <ac:chgData name="Gael Chauvet" userId="d9b78660470a3240" providerId="LiveId" clId="{C89AC4F4-AFF2-4C9A-A119-DA3D2677413A}" dt="2026-01-29T20:33:26.883" v="11"/>
+          <ac:spMkLst>
+            <pc:docMk/>
+            <pc:sldMk cId="0" sldId="266"/>
+            <ac:spMk id="689577517" creationId="{00000000-0000-0000-0000-000000000000}"/>
+          </ac:spMkLst>
+        </pc:spChg>
+        <pc:spChg chg="mod">
+          <ac:chgData name="Gael Chauvet" userId="d9b78660470a3240" providerId="LiveId" clId="{C89AC4F4-AFF2-4C9A-A119-DA3D2677413A}" dt="2026-01-29T20:33:26.883" v="11"/>
+          <ac:spMkLst>
+            <pc:docMk/>
+            <pc:sldMk cId="0" sldId="266"/>
+            <ac:spMk id="1059539457" creationId="{00000000-0000-0000-0000-000000000000}"/>
+          </ac:spMkLst>
+        </pc:spChg>
+        <pc:spChg chg="mod">
+          <ac:chgData name="Gael Chauvet" userId="d9b78660470a3240" providerId="LiveId" clId="{C89AC4F4-AFF2-4C9A-A119-DA3D2677413A}" dt="2026-01-29T20:33:26.883" v="11"/>
+          <ac:spMkLst>
+            <pc:docMk/>
+            <pc:sldMk cId="0" sldId="266"/>
+            <ac:spMk id="1197395050" creationId="{00000000-0000-0000-0000-000000000000}"/>
+          </ac:spMkLst>
+        </pc:spChg>
+      </pc:sldChg>
+      <pc:sldChg chg="addSp delSp modSp new mod setBg">
+        <pc:chgData name="Gael Chauvet" userId="d9b78660470a3240" providerId="LiveId" clId="{C89AC4F4-AFF2-4C9A-A119-DA3D2677413A}" dt="2026-01-29T20:34:29.245" v="35" actId="478"/>
+        <pc:sldMkLst>
+          <pc:docMk/>
+          <pc:sldMk cId="659029457" sldId="267"/>
+        </pc:sldMkLst>
+        <pc:spChg chg="mod">
+          <ac:chgData name="Gael Chauvet" userId="d9b78660470a3240" providerId="LiveId" clId="{C89AC4F4-AFF2-4C9A-A119-DA3D2677413A}" dt="2026-01-29T20:34:22.430" v="32" actId="1076"/>
+          <ac:spMkLst>
+            <pc:docMk/>
+            <pc:sldMk cId="659029457" sldId="267"/>
+            <ac:spMk id="2" creationId="{0F983E3C-CA4D-BC4B-ED19-45E7D2B5532D}"/>
+          </ac:spMkLst>
+        </pc:spChg>
+        <pc:spChg chg="del mod">
+          <ac:chgData name="Gael Chauvet" userId="d9b78660470a3240" providerId="LiveId" clId="{C89AC4F4-AFF2-4C9A-A119-DA3D2677413A}" dt="2026-01-29T20:33:51.570" v="17" actId="478"/>
+          <ac:spMkLst>
+            <pc:docMk/>
+            <pc:sldMk cId="659029457" sldId="267"/>
+            <ac:spMk id="3" creationId="{69487580-C4CC-F1D9-36AB-27397CDDB0DE}"/>
+          </ac:spMkLst>
+        </pc:spChg>
+        <pc:spChg chg="del mod">
+          <ac:chgData name="Gael Chauvet" userId="d9b78660470a3240" providerId="LiveId" clId="{C89AC4F4-AFF2-4C9A-A119-DA3D2677413A}" dt="2026-01-29T20:34:29.245" v="35" actId="478"/>
+          <ac:spMkLst>
+            <pc:docMk/>
+            <pc:sldMk cId="659029457" sldId="267"/>
+            <ac:spMk id="4" creationId="{E5D8D155-4D02-9F44-56C8-8BE12513DB64}"/>
+          </ac:spMkLst>
+        </pc:spChg>
+        <pc:spChg chg="add del">
+          <ac:chgData name="Gael Chauvet" userId="d9b78660470a3240" providerId="LiveId" clId="{C89AC4F4-AFF2-4C9A-A119-DA3D2677413A}" dt="2026-01-29T20:33:41.702" v="13" actId="26606"/>
+          <ac:spMkLst>
+            <pc:docMk/>
+            <pc:sldMk cId="659029457" sldId="267"/>
+            <ac:spMk id="9" creationId="{3677BAFB-3BD3-41BB-9107-FAE224AE21C4}"/>
+          </ac:spMkLst>
+        </pc:spChg>
+        <pc:spChg chg="add">
+          <ac:chgData name="Gael Chauvet" userId="d9b78660470a3240" providerId="LiveId" clId="{C89AC4F4-AFF2-4C9A-A119-DA3D2677413A}" dt="2026-01-29T20:33:42.277" v="16" actId="26606"/>
+          <ac:spMkLst>
+            <pc:docMk/>
+            <pc:sldMk cId="659029457" sldId="267"/>
+            <ac:spMk id="10" creationId="{676A1B86-DC99-46B9-B5AA-A7E928EA9CF7}"/>
+          </ac:spMkLst>
+        </pc:spChg>
+        <pc:spChg chg="add del">
+          <ac:chgData name="Gael Chauvet" userId="d9b78660470a3240" providerId="LiveId" clId="{C89AC4F4-AFF2-4C9A-A119-DA3D2677413A}" dt="2026-01-29T20:33:41.702" v="13" actId="26606"/>
+          <ac:spMkLst>
+            <pc:docMk/>
+            <pc:sldMk cId="659029457" sldId="267"/>
+            <ac:spMk id="11" creationId="{E6823A9B-C188-42D4-847C-3AD928DB145C}"/>
+          </ac:spMkLst>
+        </pc:spChg>
+        <pc:spChg chg="add">
+          <ac:chgData name="Gael Chauvet" userId="d9b78660470a3240" providerId="LiveId" clId="{C89AC4F4-AFF2-4C9A-A119-DA3D2677413A}" dt="2026-01-29T20:33:42.277" v="16" actId="26606"/>
+          <ac:spMkLst>
+            <pc:docMk/>
+            <pc:sldMk cId="659029457" sldId="267"/>
+            <ac:spMk id="12" creationId="{E9304FFE-74E9-4316-B822-F35A685E2D09}"/>
+          </ac:spMkLst>
+        </pc:spChg>
+        <pc:spChg chg="add del">
+          <ac:chgData name="Gael Chauvet" userId="d9b78660470a3240" providerId="LiveId" clId="{C89AC4F4-AFF2-4C9A-A119-DA3D2677413A}" dt="2026-01-29T20:33:41.702" v="13" actId="26606"/>
+          <ac:spMkLst>
+            <pc:docMk/>
+            <pc:sldMk cId="659029457" sldId="267"/>
+            <ac:spMk id="13" creationId="{34B557F3-1A0C-4749-A6DB-EAC082DF390B}"/>
+          </ac:spMkLst>
+        </pc:spChg>
+        <pc:spChg chg="add del">
+          <ac:chgData name="Gael Chauvet" userId="d9b78660470a3240" providerId="LiveId" clId="{C89AC4F4-AFF2-4C9A-A119-DA3D2677413A}" dt="2026-01-29T20:33:41.702" v="13" actId="26606"/>
+          <ac:spMkLst>
+            <pc:docMk/>
+            <pc:sldMk cId="659029457" sldId="267"/>
+            <ac:spMk id="15" creationId="{55D55AA6-3751-494F-868A-DCEDC5CE82BF}"/>
+          </ac:spMkLst>
+        </pc:spChg>
+        <pc:spChg chg="add del">
+          <ac:chgData name="Gael Chauvet" userId="d9b78660470a3240" providerId="LiveId" clId="{C89AC4F4-AFF2-4C9A-A119-DA3D2677413A}" dt="2026-01-29T20:33:41.702" v="13" actId="26606"/>
+          <ac:spMkLst>
+            <pc:docMk/>
+            <pc:sldMk cId="659029457" sldId="267"/>
+            <ac:spMk id="17" creationId="{4D4C00DC-4DC6-4CD2-9E31-F17E6CEBC5A6}"/>
+          </ac:spMkLst>
+        </pc:spChg>
+        <pc:spChg chg="add del">
+          <ac:chgData name="Gael Chauvet" userId="d9b78660470a3240" providerId="LiveId" clId="{C89AC4F4-AFF2-4C9A-A119-DA3D2677413A}" dt="2026-01-29T20:33:41.702" v="13" actId="26606"/>
+          <ac:spMkLst>
+            <pc:docMk/>
+            <pc:sldMk cId="659029457" sldId="267"/>
+            <ac:spMk id="19" creationId="{D82AB1B2-7970-42CF-8BF5-567C69E9FFFB}"/>
+          </ac:spMkLst>
+        </pc:spChg>
+        <pc:spChg chg="add del">
+          <ac:chgData name="Gael Chauvet" userId="d9b78660470a3240" providerId="LiveId" clId="{C89AC4F4-AFF2-4C9A-A119-DA3D2677413A}" dt="2026-01-29T20:33:41.702" v="13" actId="26606"/>
+          <ac:spMkLst>
+            <pc:docMk/>
+            <pc:sldMk cId="659029457" sldId="267"/>
+            <ac:spMk id="25" creationId="{C10FB9CA-E7FA-462C-B537-F1224ED1ACF4}"/>
+          </ac:spMkLst>
+        </pc:spChg>
+        <pc:spChg chg="add del">
+          <ac:chgData name="Gael Chauvet" userId="d9b78660470a3240" providerId="LiveId" clId="{C89AC4F4-AFF2-4C9A-A119-DA3D2677413A}" dt="2026-01-29T20:33:42.273" v="15" actId="26606"/>
+          <ac:spMkLst>
+            <pc:docMk/>
+            <pc:sldMk cId="659029457" sldId="267"/>
+            <ac:spMk id="200" creationId="{6F5A5072-7B47-4D32-B52A-4EBBF590B8A5}"/>
+          </ac:spMkLst>
+        </pc:spChg>
+        <pc:spChg chg="add del">
+          <ac:chgData name="Gael Chauvet" userId="d9b78660470a3240" providerId="LiveId" clId="{C89AC4F4-AFF2-4C9A-A119-DA3D2677413A}" dt="2026-01-29T20:33:42.273" v="15" actId="26606"/>
+          <ac:spMkLst>
+            <pc:docMk/>
+            <pc:sldMk cId="659029457" sldId="267"/>
+            <ac:spMk id="201" creationId="{9715DAF0-AE1B-46C9-8A6B-DB2AA05AB91D}"/>
+          </ac:spMkLst>
+        </pc:spChg>
+        <pc:spChg chg="add del">
+          <ac:chgData name="Gael Chauvet" userId="d9b78660470a3240" providerId="LiveId" clId="{C89AC4F4-AFF2-4C9A-A119-DA3D2677413A}" dt="2026-01-29T20:33:42.273" v="15" actId="26606"/>
+          <ac:spMkLst>
+            <pc:docMk/>
+            <pc:sldMk cId="659029457" sldId="267"/>
+            <ac:spMk id="202" creationId="{6016219D-510E-4184-9090-6D5578A87BD1}"/>
+          </ac:spMkLst>
+        </pc:spChg>
+        <pc:spChg chg="add del">
+          <ac:chgData name="Gael Chauvet" userId="d9b78660470a3240" providerId="LiveId" clId="{C89AC4F4-AFF2-4C9A-A119-DA3D2677413A}" dt="2026-01-29T20:33:42.273" v="15" actId="26606"/>
+          <ac:spMkLst>
+            <pc:docMk/>
+            <pc:sldMk cId="659029457" sldId="267"/>
+            <ac:spMk id="203" creationId="{AFF4A713-7B75-4B21-90D7-5AB19547C728}"/>
+          </ac:spMkLst>
+        </pc:spChg>
+        <pc:spChg chg="add del">
+          <ac:chgData name="Gael Chauvet" userId="d9b78660470a3240" providerId="LiveId" clId="{C89AC4F4-AFF2-4C9A-A119-DA3D2677413A}" dt="2026-01-29T20:33:42.273" v="15" actId="26606"/>
+          <ac:spMkLst>
+            <pc:docMk/>
+            <pc:sldMk cId="659029457" sldId="267"/>
+            <ac:spMk id="204" creationId="{DC631C0B-6DA6-4E57-8231-CE32B3434A7E}"/>
+          </ac:spMkLst>
+        </pc:spChg>
+        <pc:spChg chg="add del">
+          <ac:chgData name="Gael Chauvet" userId="d9b78660470a3240" providerId="LiveId" clId="{C89AC4F4-AFF2-4C9A-A119-DA3D2677413A}" dt="2026-01-29T20:33:42.273" v="15" actId="26606"/>
+          <ac:spMkLst>
+            <pc:docMk/>
+            <pc:sldMk cId="659029457" sldId="267"/>
+            <ac:spMk id="205" creationId="{C29501E6-A978-4A61-9689-9085AF97A53A}"/>
+          </ac:spMkLst>
+        </pc:spChg>
+        <pc:picChg chg="add">
+          <ac:chgData name="Gael Chauvet" userId="d9b78660470a3240" providerId="LiveId" clId="{C89AC4F4-AFF2-4C9A-A119-DA3D2677413A}" dt="2026-01-29T20:33:42.277" v="16" actId="26606"/>
+          <ac:picMkLst>
+            <pc:docMk/>
+            <pc:sldMk cId="659029457" sldId="267"/>
+            <ac:picMk id="6" creationId="{94526DC3-07B2-69CE-C632-A7481C040CF3}"/>
+          </ac:picMkLst>
+        </pc:picChg>
+      </pc:sldChg>
+      <pc:sldChg chg="addSp delSp modSp new mod setBg">
+        <pc:chgData name="Gael Chauvet" userId="d9b78660470a3240" providerId="LiveId" clId="{C89AC4F4-AFF2-4C9A-A119-DA3D2677413A}" dt="2026-01-29T20:53:36.121" v="94" actId="478"/>
+        <pc:sldMkLst>
+          <pc:docMk/>
+          <pc:sldMk cId="798120857" sldId="268"/>
+        </pc:sldMkLst>
+        <pc:spChg chg="mod">
+          <ac:chgData name="Gael Chauvet" userId="d9b78660470a3240" providerId="LiveId" clId="{C89AC4F4-AFF2-4C9A-A119-DA3D2677413A}" dt="2026-01-29T20:53:30.321" v="91" actId="26606"/>
+          <ac:spMkLst>
+            <pc:docMk/>
+            <pc:sldMk cId="798120857" sldId="268"/>
+            <ac:spMk id="2" creationId="{BB76B682-5577-4F31-4022-B3D3477D87E8}"/>
+          </ac:spMkLst>
+        </pc:spChg>
+        <pc:spChg chg="del mod">
+          <ac:chgData name="Gael Chauvet" userId="d9b78660470a3240" providerId="LiveId" clId="{C89AC4F4-AFF2-4C9A-A119-DA3D2677413A}" dt="2026-01-29T20:53:35.157" v="93" actId="478"/>
+          <ac:spMkLst>
+            <pc:docMk/>
+            <pc:sldMk cId="798120857" sldId="268"/>
+            <ac:spMk id="3" creationId="{E56FE43A-27D0-6957-0FD7-BA4192D99B13}"/>
+          </ac:spMkLst>
+        </pc:spChg>
+        <pc:spChg chg="del mod">
+          <ac:chgData name="Gael Chauvet" userId="d9b78660470a3240" providerId="LiveId" clId="{C89AC4F4-AFF2-4C9A-A119-DA3D2677413A}" dt="2026-01-29T20:53:36.121" v="94" actId="478"/>
+          <ac:spMkLst>
+            <pc:docMk/>
+            <pc:sldMk cId="798120857" sldId="268"/>
+            <ac:spMk id="4" creationId="{5DCF0D20-216F-F2C8-7505-0F507ED8A421}"/>
+          </ac:spMkLst>
+        </pc:spChg>
+        <pc:spChg chg="add">
+          <ac:chgData name="Gael Chauvet" userId="d9b78660470a3240" providerId="LiveId" clId="{C89AC4F4-AFF2-4C9A-A119-DA3D2677413A}" dt="2026-01-29T20:53:30.321" v="91" actId="26606"/>
+          <ac:spMkLst>
+            <pc:docMk/>
+            <pc:sldMk cId="798120857" sldId="268"/>
+            <ac:spMk id="11" creationId="{DF05ACD0-FF4A-4F8F-B5C5-6A4EBD0D1B38}"/>
+          </ac:spMkLst>
+        </pc:spChg>
+        <pc:spChg chg="add">
+          <ac:chgData name="Gael Chauvet" userId="d9b78660470a3240" providerId="LiveId" clId="{C89AC4F4-AFF2-4C9A-A119-DA3D2677413A}" dt="2026-01-29T20:53:30.321" v="91" actId="26606"/>
+          <ac:spMkLst>
+            <pc:docMk/>
+            <pc:sldMk cId="798120857" sldId="268"/>
+            <ac:spMk id="13" creationId="{4C9AFA28-B5ED-4346-9AF7-68A157F16C7E}"/>
+          </ac:spMkLst>
+        </pc:spChg>
+        <pc:picChg chg="add mod ord">
+          <ac:chgData name="Gael Chauvet" userId="d9b78660470a3240" providerId="LiveId" clId="{C89AC4F4-AFF2-4C9A-A119-DA3D2677413A}" dt="2026-01-29T20:53:30.321" v="91" actId="26606"/>
+          <ac:picMkLst>
+            <pc:docMk/>
+            <pc:sldMk cId="798120857" sldId="268"/>
+            <ac:picMk id="6" creationId="{568D9D90-84E7-7450-9EF1-BEA3C83099B1}"/>
+          </ac:picMkLst>
+        </pc:picChg>
+      </pc:sldChg>
+      <pc:sldChg chg="delSp modSp new mod">
+        <pc:chgData name="Gael Chauvet" userId="d9b78660470a3240" providerId="LiveId" clId="{C89AC4F4-AFF2-4C9A-A119-DA3D2677413A}" dt="2026-01-29T21:13:09.827" v="120" actId="478"/>
+        <pc:sldMkLst>
+          <pc:docMk/>
+          <pc:sldMk cId="3398929560" sldId="269"/>
+        </pc:sldMkLst>
+        <pc:spChg chg="mod">
+          <ac:chgData name="Gael Chauvet" userId="d9b78660470a3240" providerId="LiveId" clId="{C89AC4F4-AFF2-4C9A-A119-DA3D2677413A}" dt="2026-01-29T21:13:05.484" v="117" actId="1076"/>
+          <ac:spMkLst>
+            <pc:docMk/>
+            <pc:sldMk cId="3398929560" sldId="269"/>
+            <ac:spMk id="2" creationId="{DEC33717-04DF-BA4A-5C3D-388736955D43}"/>
+          </ac:spMkLst>
+        </pc:spChg>
+        <pc:spChg chg="del">
+          <ac:chgData name="Gael Chauvet" userId="d9b78660470a3240" providerId="LiveId" clId="{C89AC4F4-AFF2-4C9A-A119-DA3D2677413A}" dt="2026-01-29T21:13:07.660" v="118" actId="478"/>
+          <ac:spMkLst>
+            <pc:docMk/>
+            <pc:sldMk cId="3398929560" sldId="269"/>
+            <ac:spMk id="3" creationId="{59CB87E4-09C4-EAC4-DDD1-3E7EA7348C8E}"/>
+          </ac:spMkLst>
+        </pc:spChg>
+        <pc:spChg chg="del mod">
+          <ac:chgData name="Gael Chauvet" userId="d9b78660470a3240" providerId="LiveId" clId="{C89AC4F4-AFF2-4C9A-A119-DA3D2677413A}" dt="2026-01-29T21:13:09.827" v="120" actId="478"/>
+          <ac:spMkLst>
+            <pc:docMk/>
+            <pc:sldMk cId="3398929560" sldId="269"/>
+            <ac:spMk id="4" creationId="{568F306D-4164-4DC3-E93D-DCA84CE36B4F}"/>
+          </ac:spMkLst>
+        </pc:spChg>
+      </pc:sldChg>
+      <pc:sldChg chg="addSp delSp modSp add mod">
+        <pc:chgData name="Gael Chauvet" userId="d9b78660470a3240" providerId="LiveId" clId="{C89AC4F4-AFF2-4C9A-A119-DA3D2677413A}" dt="2026-01-29T21:21:11.613" v="205" actId="478"/>
+        <pc:sldMkLst>
+          <pc:docMk/>
+          <pc:sldMk cId="2134145801" sldId="270"/>
+        </pc:sldMkLst>
+        <pc:spChg chg="mod">
+          <ac:chgData name="Gael Chauvet" userId="d9b78660470a3240" providerId="LiveId" clId="{C89AC4F4-AFF2-4C9A-A119-DA3D2677413A}" dt="2026-01-29T21:20:45.841" v="200" actId="313"/>
+          <ac:spMkLst>
+            <pc:docMk/>
+            <pc:sldMk cId="2134145801" sldId="270"/>
+            <ac:spMk id="2" creationId="{0DF0A3DF-2216-094D-44DB-53B6C034491C}"/>
+          </ac:spMkLst>
+        </pc:spChg>
+        <pc:graphicFrameChg chg="add del mod modGraphic">
+          <ac:chgData name="Gael Chauvet" userId="d9b78660470a3240" providerId="LiveId" clId="{C89AC4F4-AFF2-4C9A-A119-DA3D2677413A}" dt="2026-01-29T21:21:11.613" v="205" actId="478"/>
+          <ac:graphicFrameMkLst>
+            <pc:docMk/>
+            <pc:sldMk cId="2134145801" sldId="270"/>
+            <ac:graphicFrameMk id="13" creationId="{8565EF64-D69C-BE78-9A69-402A5DA92C7D}"/>
+          </ac:graphicFrameMkLst>
+        </pc:graphicFrameChg>
+        <pc:picChg chg="add mod">
+          <ac:chgData name="Gael Chauvet" userId="d9b78660470a3240" providerId="LiveId" clId="{C89AC4F4-AFF2-4C9A-A119-DA3D2677413A}" dt="2026-01-29T21:13:54.886" v="177" actId="1076"/>
+          <ac:picMkLst>
+            <pc:docMk/>
+            <pc:sldMk cId="2134145801" sldId="270"/>
+            <ac:picMk id="4" creationId="{D2ABCF07-7615-3888-E2D1-2F38F9E856E0}"/>
+          </ac:picMkLst>
+        </pc:picChg>
+        <pc:picChg chg="add mod">
+          <ac:chgData name="Gael Chauvet" userId="d9b78660470a3240" providerId="LiveId" clId="{C89AC4F4-AFF2-4C9A-A119-DA3D2677413A}" dt="2026-01-29T21:15:53.257" v="199" actId="207"/>
+          <ac:picMkLst>
+            <pc:docMk/>
+            <pc:sldMk cId="2134145801" sldId="270"/>
+            <ac:picMk id="6" creationId="{D6E081BD-BF8D-6DF6-E4F6-077B0D3CF30A}"/>
+          </ac:picMkLst>
+        </pc:picChg>
+        <pc:picChg chg="add mod">
+          <ac:chgData name="Gael Chauvet" userId="d9b78660470a3240" providerId="LiveId" clId="{C89AC4F4-AFF2-4C9A-A119-DA3D2677413A}" dt="2026-01-29T21:15:53.257" v="199" actId="207"/>
+          <ac:picMkLst>
+            <pc:docMk/>
+            <pc:sldMk cId="2134145801" sldId="270"/>
+            <ac:picMk id="8" creationId="{EC505D27-4873-7BFA-2EC0-DED4954235D4}"/>
+          </ac:picMkLst>
+        </pc:picChg>
+        <pc:picChg chg="add mod">
+          <ac:chgData name="Gael Chauvet" userId="d9b78660470a3240" providerId="LiveId" clId="{C89AC4F4-AFF2-4C9A-A119-DA3D2677413A}" dt="2026-01-29T21:15:53.257" v="199" actId="207"/>
+          <ac:picMkLst>
+            <pc:docMk/>
+            <pc:sldMk cId="2134145801" sldId="270"/>
+            <ac:picMk id="10" creationId="{CE4983D8-9EFF-DB2A-F6EF-C2F7F82372C8}"/>
+          </ac:picMkLst>
+        </pc:picChg>
+        <pc:picChg chg="add mod">
+          <ac:chgData name="Gael Chauvet" userId="d9b78660470a3240" providerId="LiveId" clId="{C89AC4F4-AFF2-4C9A-A119-DA3D2677413A}" dt="2026-01-29T21:15:53.257" v="199" actId="207"/>
+          <ac:picMkLst>
+            <pc:docMk/>
+            <pc:sldMk cId="2134145801" sldId="270"/>
+            <ac:picMk id="12" creationId="{103895B3-08DB-DDC2-B493-146D02E0EC77}"/>
+          </ac:picMkLst>
+        </pc:picChg>
+      </pc:sldChg>
+      <pc:sldChg chg="addSp delSp modSp add mod">
+        <pc:chgData name="Gael Chauvet" userId="d9b78660470a3240" providerId="LiveId" clId="{C89AC4F4-AFF2-4C9A-A119-DA3D2677413A}" dt="2026-01-29T21:25:50.654" v="289" actId="1076"/>
+        <pc:sldMkLst>
+          <pc:docMk/>
+          <pc:sldMk cId="2555647377" sldId="271"/>
+        </pc:sldMkLst>
+        <pc:spChg chg="mod">
+          <ac:chgData name="Gael Chauvet" userId="d9b78660470a3240" providerId="LiveId" clId="{C89AC4F4-AFF2-4C9A-A119-DA3D2677413A}" dt="2026-01-29T21:22:05.995" v="275" actId="1076"/>
+          <ac:spMkLst>
+            <pc:docMk/>
+            <pc:sldMk cId="2555647377" sldId="271"/>
+            <ac:spMk id="2" creationId="{F56F4B9E-FCFE-60E9-6748-D1EA9F01AAA9}"/>
+          </ac:spMkLst>
+        </pc:spChg>
+        <pc:picChg chg="add mod">
+          <ac:chgData name="Gael Chauvet" userId="d9b78660470a3240" providerId="LiveId" clId="{C89AC4F4-AFF2-4C9A-A119-DA3D2677413A}" dt="2026-01-29T21:25:48.039" v="288" actId="207"/>
+          <ac:picMkLst>
+            <pc:docMk/>
+            <pc:sldMk cId="2555647377" sldId="271"/>
+            <ac:picMk id="4" creationId="{3031E5E9-705A-94EF-7A98-D667D148FC26}"/>
+          </ac:picMkLst>
+        </pc:picChg>
+        <pc:picChg chg="add del mod">
+          <ac:chgData name="Gael Chauvet" userId="d9b78660470a3240" providerId="LiveId" clId="{C89AC4F4-AFF2-4C9A-A119-DA3D2677413A}" dt="2026-01-29T21:24:06.623" v="280" actId="478"/>
+          <ac:picMkLst>
+            <pc:docMk/>
+            <pc:sldMk cId="2555647377" sldId="271"/>
+            <ac:picMk id="1026" creationId="{0DFC211C-8D19-DD84-E05F-06E797A965F2}"/>
+          </ac:picMkLst>
+        </pc:picChg>
+        <pc:picChg chg="add mod">
+          <ac:chgData name="Gael Chauvet" userId="d9b78660470a3240" providerId="LiveId" clId="{C89AC4F4-AFF2-4C9A-A119-DA3D2677413A}" dt="2026-01-29T21:25:50.654" v="289" actId="1076"/>
+          <ac:picMkLst>
+            <pc:docMk/>
+            <pc:sldMk cId="2555647377" sldId="271"/>
+            <ac:picMk id="1028" creationId="{75AB9269-829E-F0A6-9826-7DA578E43449}"/>
+          </ac:picMkLst>
+        </pc:picChg>
+      </pc:sldChg>
+      <pc:sldChg chg="modSp new del mod">
+        <pc:chgData name="Gael Chauvet" userId="d9b78660470a3240" providerId="LiveId" clId="{C89AC4F4-AFF2-4C9A-A119-DA3D2677413A}" dt="2026-01-29T21:21:52.413" v="243" actId="47"/>
+        <pc:sldMkLst>
+          <pc:docMk/>
+          <pc:sldMk cId="3967441634" sldId="271"/>
+        </pc:sldMkLst>
+        <pc:spChg chg="mod">
+          <ac:chgData name="Gael Chauvet" userId="d9b78660470a3240" providerId="LiveId" clId="{C89AC4F4-AFF2-4C9A-A119-DA3D2677413A}" dt="2026-01-29T21:21:50.400" v="242" actId="20577"/>
+          <ac:spMkLst>
+            <pc:docMk/>
+            <pc:sldMk cId="3967441634" sldId="271"/>
+            <ac:spMk id="2" creationId="{4155534E-514F-7149-FB8E-7D9C1427D7C2}"/>
+          </ac:spMkLst>
+        </pc:spChg>
+      </pc:sldChg>
+      <pc:sldChg chg="addSp delSp modSp add del mod setBg addAnim delAnim delDesignElem">
+        <pc:chgData name="Gael Chauvet" userId="d9b78660470a3240" providerId="LiveId" clId="{C89AC4F4-AFF2-4C9A-A119-DA3D2677413A}" dt="2026-01-29T21:53:59.472" v="344" actId="47"/>
+        <pc:sldMkLst>
+          <pc:docMk/>
+          <pc:sldMk cId="675691704" sldId="272"/>
+        </pc:sldMkLst>
+        <pc:spChg chg="mod">
+          <ac:chgData name="Gael Chauvet" userId="d9b78660470a3240" providerId="LiveId" clId="{C89AC4F4-AFF2-4C9A-A119-DA3D2677413A}" dt="2026-01-29T21:53:58.677" v="343" actId="404"/>
+          <ac:spMkLst>
+            <pc:docMk/>
+            <pc:sldMk cId="675691704" sldId="272"/>
+            <ac:spMk id="2" creationId="{BDD029F3-31C9-8424-CF62-8365344CD89F}"/>
+          </ac:spMkLst>
+        </pc:spChg>
+        <pc:spChg chg="add del">
+          <ac:chgData name="Gael Chauvet" userId="d9b78660470a3240" providerId="LiveId" clId="{C89AC4F4-AFF2-4C9A-A119-DA3D2677413A}" dt="2026-01-29T21:53:55.524" v="340" actId="26606"/>
+          <ac:spMkLst>
+            <pc:docMk/>
+            <pc:sldMk cId="675691704" sldId="272"/>
+            <ac:spMk id="5" creationId="{E9304FFE-74E9-4316-B822-F35A685E2D09}"/>
+          </ac:spMkLst>
+        </pc:spChg>
+        <pc:spChg chg="add del">
+          <ac:chgData name="Gael Chauvet" userId="d9b78660470a3240" providerId="LiveId" clId="{C89AC4F4-AFF2-4C9A-A119-DA3D2677413A}" dt="2026-01-29T21:53:55.524" v="340" actId="26606"/>
+          <ac:spMkLst>
+            <pc:docMk/>
+            <pc:sldMk cId="675691704" sldId="272"/>
+            <ac:spMk id="8" creationId="{676A1B86-DC99-46B9-B5AA-A7E928EA9CF7}"/>
+          </ac:spMkLst>
+        </pc:spChg>
+        <pc:spChg chg="del">
+          <ac:chgData name="Gael Chauvet" userId="d9b78660470a3240" providerId="LiveId" clId="{C89AC4F4-AFF2-4C9A-A119-DA3D2677413A}" dt="2026-01-29T21:53:23.651" v="291"/>
+          <ac:spMkLst>
+            <pc:docMk/>
+            <pc:sldMk cId="675691704" sldId="272"/>
+            <ac:spMk id="10" creationId="{E44FB686-9495-48AC-72E9-E2F52C151CE9}"/>
+          </ac:spMkLst>
+        </pc:spChg>
+        <pc:spChg chg="del">
+          <ac:chgData name="Gael Chauvet" userId="d9b78660470a3240" providerId="LiveId" clId="{C89AC4F4-AFF2-4C9A-A119-DA3D2677413A}" dt="2026-01-29T21:53:23.651" v="291"/>
+          <ac:spMkLst>
+            <pc:docMk/>
+            <pc:sldMk cId="675691704" sldId="272"/>
+            <ac:spMk id="12" creationId="{48D61A62-3650-5F55-54C9-D39A74EA4EBF}"/>
+          </ac:spMkLst>
+        </pc:spChg>
+        <pc:picChg chg="add del">
+          <ac:chgData name="Gael Chauvet" userId="d9b78660470a3240" providerId="LiveId" clId="{C89AC4F4-AFF2-4C9A-A119-DA3D2677413A}" dt="2026-01-29T21:53:55.524" v="340" actId="26606"/>
+          <ac:picMkLst>
+            <pc:docMk/>
+            <pc:sldMk cId="675691704" sldId="272"/>
+            <ac:picMk id="4" creationId="{378F3005-76EB-4EE6-4356-FCFBB445A2D1}"/>
+          </ac:picMkLst>
+        </pc:picChg>
+        <pc:picChg chg="add del">
+          <ac:chgData name="Gael Chauvet" userId="d9b78660470a3240" providerId="LiveId" clId="{C89AC4F4-AFF2-4C9A-A119-DA3D2677413A}" dt="2026-01-29T21:53:56.620" v="341" actId="478"/>
+          <ac:picMkLst>
+            <pc:docMk/>
+            <pc:sldMk cId="675691704" sldId="272"/>
+            <ac:picMk id="6" creationId="{0A56BF01-6183-6884-385A-4B427280032A}"/>
+          </ac:picMkLst>
+        </pc:picChg>
+      </pc:sldChg>
+      <pc:sldChg chg="addSp delSp modSp add mod setBg">
+        <pc:chgData name="Gael Chauvet" userId="d9b78660470a3240" providerId="LiveId" clId="{C89AC4F4-AFF2-4C9A-A119-DA3D2677413A}" dt="2026-01-29T21:55:58.255" v="422" actId="1076"/>
+        <pc:sldMkLst>
+          <pc:docMk/>
+          <pc:sldMk cId="2553194390" sldId="272"/>
+        </pc:sldMkLst>
+        <pc:spChg chg="mod">
+          <ac:chgData name="Gael Chauvet" userId="d9b78660470a3240" providerId="LiveId" clId="{C89AC4F4-AFF2-4C9A-A119-DA3D2677413A}" dt="2026-01-29T21:55:06.300" v="407" actId="2711"/>
+          <ac:spMkLst>
+            <pc:docMk/>
+            <pc:sldMk cId="2553194390" sldId="272"/>
+            <ac:spMk id="2" creationId="{E9157419-0202-DF90-0245-4B76F085E768}"/>
+          </ac:spMkLst>
+        </pc:spChg>
+        <pc:spChg chg="add mod">
+          <ac:chgData name="Gael Chauvet" userId="d9b78660470a3240" providerId="LiveId" clId="{C89AC4F4-AFF2-4C9A-A119-DA3D2677413A}" dt="2026-01-29T21:54:55.880" v="405" actId="26606"/>
+          <ac:spMkLst>
+            <pc:docMk/>
+            <pc:sldMk cId="2553194390" sldId="272"/>
+            <ac:spMk id="3" creationId="{A27D13DE-6158-5C72-D41B-6C2CB92445C0}"/>
+          </ac:spMkLst>
+        </pc:spChg>
+        <pc:spChg chg="add">
+          <ac:chgData name="Gael Chauvet" userId="d9b78660470a3240" providerId="LiveId" clId="{C89AC4F4-AFF2-4C9A-A119-DA3D2677413A}" dt="2026-01-29T21:54:55.880" v="405" actId="26606"/>
+          <ac:spMkLst>
+            <pc:docMk/>
+            <pc:sldMk cId="2553194390" sldId="272"/>
+            <ac:spMk id="8" creationId="{BAD76F3E-3A97-486B-B402-44400A8B9173}"/>
+          </ac:spMkLst>
+        </pc:spChg>
+        <pc:spChg chg="add">
+          <ac:chgData name="Gael Chauvet" userId="d9b78660470a3240" providerId="LiveId" clId="{C89AC4F4-AFF2-4C9A-A119-DA3D2677413A}" dt="2026-01-29T21:54:55.880" v="405" actId="26606"/>
+          <ac:spMkLst>
+            <pc:docMk/>
+            <pc:sldMk cId="2553194390" sldId="272"/>
+            <ac:spMk id="10" creationId="{391F6B52-91F4-4AEB-B6DB-29FEBCF28C8B}"/>
+          </ac:spMkLst>
+        </pc:spChg>
+        <pc:spChg chg="add">
+          <ac:chgData name="Gael Chauvet" userId="d9b78660470a3240" providerId="LiveId" clId="{C89AC4F4-AFF2-4C9A-A119-DA3D2677413A}" dt="2026-01-29T21:54:55.880" v="405" actId="26606"/>
+          <ac:spMkLst>
+            <pc:docMk/>
+            <pc:sldMk cId="2553194390" sldId="272"/>
+            <ac:spMk id="12" creationId="{2CD6F061-7C53-44F4-9794-953DB70A451B}"/>
+          </ac:spMkLst>
+        </pc:spChg>
+        <pc:picChg chg="add del mod">
+          <ac:chgData name="Gael Chauvet" userId="d9b78660470a3240" providerId="LiveId" clId="{C89AC4F4-AFF2-4C9A-A119-DA3D2677413A}" dt="2026-01-29T21:55:18.874" v="410" actId="478"/>
+          <ac:picMkLst>
+            <pc:docMk/>
+            <pc:sldMk cId="2553194390" sldId="272"/>
+            <ac:picMk id="5" creationId="{F590F76F-6A47-7048-CE28-4EBDCCC4FBE3}"/>
+          </ac:picMkLst>
+        </pc:picChg>
+        <pc:picChg chg="add mod">
+          <ac:chgData name="Gael Chauvet" userId="d9b78660470a3240" providerId="LiveId" clId="{C89AC4F4-AFF2-4C9A-A119-DA3D2677413A}" dt="2026-01-29T21:55:58.255" v="422" actId="1076"/>
+          <ac:picMkLst>
+            <pc:docMk/>
+            <pc:sldMk cId="2553194390" sldId="272"/>
+            <ac:picMk id="7" creationId="{0792534D-95E8-2852-66E0-4F66248FFACF}"/>
+          </ac:picMkLst>
+        </pc:picChg>
+        <pc:picChg chg="add mod">
+          <ac:chgData name="Gael Chauvet" userId="d9b78660470a3240" providerId="LiveId" clId="{C89AC4F4-AFF2-4C9A-A119-DA3D2677413A}" dt="2026-01-29T21:55:52.800" v="420" actId="1076"/>
+          <ac:picMkLst>
+            <pc:docMk/>
+            <pc:sldMk cId="2553194390" sldId="272"/>
+            <ac:picMk id="11" creationId="{DE60CC94-E546-EBAB-CF35-C4CF9F4D1BFC}"/>
+          </ac:picMkLst>
+        </pc:picChg>
+      </pc:sldChg>
+    </pc:docChg>
+  </pc:docChgLst>
+</pc:chgInfo>
 </file>
 
 <file path=ppt/notesMasters/notesMaster1.xml><?xml version="1.0" encoding="utf-8"?>
 <p:notesMaster xmlns:a="http://schemas.openxmlformats.org/drawingml/2006/main" xmlns:r="http://schemas.openxmlformats.org/officeDocument/2006/relationships" xmlns:p="http://schemas.openxmlformats.org/presentationml/2006/main">
-  <p:cSld name="">
+  <p:cSld>
     <p:bg>
       <p:bgRef idx="1001">
         <a:schemeClr val="bg1"/>
@@ -208,7 +1113,7 @@
             </a:pPr>
             <a:fld id="{3632E96E-41F7-40C5-8419-297958CC00FA}" type="datetimeFigureOut">
               <a:rPr lang="fr-FR"/>
-              <a:t>10/30/2013</a:t>
+              <a:t>29/01/2026</a:t>
             </a:fld>
             <a:endParaRPr lang="fr-FR"/>
           </a:p>
@@ -218,7 +1123,7 @@
         <p:nvSpPr>
           <p:cNvPr id="875543250" name="Espace réservé pour l'image de la diapositive 3"/>
           <p:cNvSpPr>
-            <a:spLocks noChangeAspect="1" noGrp="1" noRot="1"/>
+            <a:spLocks noGrp="1" noRot="1" noChangeAspect="1"/>
           </p:cNvSpPr>
           <p:nvPr>
             <p:ph type="sldImg" idx="2"/>
@@ -320,7 +1225,6 @@
               <a:rPr lang="fr-FR"/>
               <a:t>Cinquième niveau</a:t>
             </a:r>
-            <a:endParaRPr lang="fr-FR"/>
           </a:p>
         </p:txBody>
       </p:sp>
@@ -390,7 +1294,7 @@
             </a:pPr>
             <a:fld id="{2E6999B8-B6B4-4561-A3CD-BBCDAB9FC9D9}" type="slidenum">
               <a:rPr lang="fr-FR"/>
-              <a:t>‹#›</a:t>
+              <a:t>‹N°›</a:t>
             </a:fld>
             <a:endParaRPr lang="fr-FR"/>
           </a:p>
@@ -399,7 +1303,7 @@
     </p:spTree>
   </p:cSld>
   <p:clrMap bg1="lt1" tx1="dk1" bg2="lt2" tx2="dk2" accent1="accent1" accent2="accent2" accent3="accent3" accent4="accent4" accent5="accent5" accent6="accent6" hlink="hlink" folHlink="folHlink"/>
-  <p:hf dt="0" ftr="0" hdr="0" sldNum="1"/>
+  <p:hf hdr="0" ftr="0" dt="0"/>
   <p:notesStyle>
     <a:lvl1pPr marL="0" algn="l" defTabSz="914400" rtl="0">
       <a:defRPr sz="1200">
@@ -496,8 +1400,8 @@
 </file>
 
 <file path=ppt/notesSlides/notesSlide1.xml><?xml version="1.0" encoding="utf-8"?>
-<p:notes xmlns:a="http://schemas.openxmlformats.org/drawingml/2006/main" xmlns:r="http://schemas.openxmlformats.org/officeDocument/2006/relationships" xmlns:p="http://schemas.openxmlformats.org/presentationml/2006/main" xmlns:m="http://schemas.openxmlformats.org/officeDocument/2006/math" xmlns:w="http://schemas.openxmlformats.org/wordprocessingml/2006/main">
-  <p:cSld name="">
+<p:notes xmlns:a="http://schemas.openxmlformats.org/drawingml/2006/main" xmlns:r="http://schemas.openxmlformats.org/officeDocument/2006/relationships" xmlns:p="http://schemas.openxmlformats.org/presentationml/2006/main">
+  <p:cSld>
     <p:spTree>
       <p:nvGrpSpPr>
         <p:cNvPr id="1" name=""/>
@@ -516,7 +1420,7 @@
         <p:nvSpPr>
           <p:cNvPr id="385896177" name="Espace réservé pour l'image de la diapositive 1"/>
           <p:cNvSpPr>
-            <a:spLocks noChangeAspect="1" noGrp="1" noRot="1"/>
+            <a:spLocks noGrp="1" noRot="1" noChangeAspect="1"/>
           </p:cNvSpPr>
           <p:nvPr>
             <p:ph type="sldImg"/>
@@ -589,8 +1493,8 @@
 </file>
 
 <file path=ppt/notesSlides/notesSlide10.xml><?xml version="1.0" encoding="utf-8"?>
-<p:notes xmlns:a="http://schemas.openxmlformats.org/drawingml/2006/main" xmlns:r="http://schemas.openxmlformats.org/officeDocument/2006/relationships" xmlns:p="http://schemas.openxmlformats.org/presentationml/2006/main" xmlns:m="http://schemas.openxmlformats.org/officeDocument/2006/math" xmlns:w="http://schemas.openxmlformats.org/wordprocessingml/2006/main">
-  <p:cSld name="">
+<p:notes xmlns:a="http://schemas.openxmlformats.org/drawingml/2006/main" xmlns:r="http://schemas.openxmlformats.org/officeDocument/2006/relationships" xmlns:p="http://schemas.openxmlformats.org/presentationml/2006/main">
+  <p:cSld>
     <p:spTree>
       <p:nvGrpSpPr>
         <p:cNvPr id="1" name=""/>
@@ -609,7 +1513,7 @@
         <p:nvSpPr>
           <p:cNvPr id="2" name="Slide Image Placeholder 1"/>
           <p:cNvSpPr>
-            <a:spLocks noChangeAspect="1" noGrp="1" noRot="1"/>
+            <a:spLocks noGrp="1" noRot="1" noChangeAspect="1"/>
           </p:cNvSpPr>
           <p:nvPr>
             <p:ph type="sldImg"/>
@@ -659,7 +1563,7 @@
             </a:pPr>
             <a:fld id="{66022927-5078-EE08-45A7-AD96B8C99A3E}" type="slidenum">
               <a:rPr/>
-              <a:t/>
+              <a:t>10</a:t>
             </a:fld>
             <a:endParaRPr/>
           </a:p>
@@ -674,8 +1578,8 @@
 </file>
 
 <file path=ppt/notesSlides/notesSlide11.xml><?xml version="1.0" encoding="utf-8"?>
-<p:notes xmlns:a="http://schemas.openxmlformats.org/drawingml/2006/main" xmlns:r="http://schemas.openxmlformats.org/officeDocument/2006/relationships" xmlns:p="http://schemas.openxmlformats.org/presentationml/2006/main" xmlns:m="http://schemas.openxmlformats.org/officeDocument/2006/math" xmlns:w="http://schemas.openxmlformats.org/wordprocessingml/2006/main">
-  <p:cSld name="">
+<p:notes xmlns:a="http://schemas.openxmlformats.org/drawingml/2006/main" xmlns:r="http://schemas.openxmlformats.org/officeDocument/2006/relationships" xmlns:p="http://schemas.openxmlformats.org/presentationml/2006/main">
+  <p:cSld>
     <p:spTree>
       <p:nvGrpSpPr>
         <p:cNvPr id="1" name=""/>
@@ -694,7 +1598,7 @@
         <p:nvSpPr>
           <p:cNvPr id="2" name="Slide Image Placeholder 1"/>
           <p:cNvSpPr>
-            <a:spLocks noChangeAspect="1" noGrp="1" noRot="1"/>
+            <a:spLocks noGrp="1" noRot="1" noChangeAspect="1"/>
           </p:cNvSpPr>
           <p:nvPr>
             <p:ph type="sldImg"/>
@@ -744,7 +1648,7 @@
             </a:pPr>
             <a:fld id="{5DD3EAFE-70D4-24C6-4322-7BBA93C6B330}" type="slidenum">
               <a:rPr/>
-              <a:t/>
+              <a:t>11</a:t>
             </a:fld>
             <a:endParaRPr/>
           </a:p>
@@ -759,8 +1663,8 @@
 </file>
 
 <file path=ppt/notesSlides/notesSlide2.xml><?xml version="1.0" encoding="utf-8"?>
-<p:notes xmlns:a="http://schemas.openxmlformats.org/drawingml/2006/main" xmlns:r="http://schemas.openxmlformats.org/officeDocument/2006/relationships" xmlns:p="http://schemas.openxmlformats.org/presentationml/2006/main" xmlns:m="http://schemas.openxmlformats.org/officeDocument/2006/math" xmlns:w="http://schemas.openxmlformats.org/wordprocessingml/2006/main">
-  <p:cSld name="">
+<p:notes xmlns:a="http://schemas.openxmlformats.org/drawingml/2006/main" xmlns:r="http://schemas.openxmlformats.org/officeDocument/2006/relationships" xmlns:p="http://schemas.openxmlformats.org/presentationml/2006/main">
+  <p:cSld>
     <p:spTree>
       <p:nvGrpSpPr>
         <p:cNvPr id="1" name=""/>
@@ -779,7 +1683,7 @@
         <p:nvSpPr>
           <p:cNvPr id="2093437415" name="Slide Image Placeholder 1"/>
           <p:cNvSpPr>
-            <a:spLocks noChangeAspect="1" noGrp="1" noRot="1"/>
+            <a:spLocks noGrp="1" noRot="1" noChangeAspect="1"/>
           </p:cNvSpPr>
           <p:nvPr>
             <p:ph type="sldImg"/>
@@ -829,7 +1733,7 @@
             </a:pPr>
             <a:fld id="{7B98CF4C-DF85-306F-6063-25A36D7F9FAB}" type="slidenum">
               <a:rPr/>
-              <a:t/>
+              <a:t>2</a:t>
             </a:fld>
             <a:endParaRPr/>
           </a:p>
@@ -844,8 +1748,8 @@
 </file>
 
 <file path=ppt/notesSlides/notesSlide3.xml><?xml version="1.0" encoding="utf-8"?>
-<p:notes xmlns:a="http://schemas.openxmlformats.org/drawingml/2006/main" xmlns:r="http://schemas.openxmlformats.org/officeDocument/2006/relationships" xmlns:p="http://schemas.openxmlformats.org/presentationml/2006/main" xmlns:m="http://schemas.openxmlformats.org/officeDocument/2006/math" xmlns:w="http://schemas.openxmlformats.org/wordprocessingml/2006/main">
-  <p:cSld name="">
+<p:notes xmlns:a="http://schemas.openxmlformats.org/drawingml/2006/main" xmlns:r="http://schemas.openxmlformats.org/officeDocument/2006/relationships" xmlns:p="http://schemas.openxmlformats.org/presentationml/2006/main">
+  <p:cSld>
     <p:spTree>
       <p:nvGrpSpPr>
         <p:cNvPr id="1" name=""/>
@@ -864,7 +1768,7 @@
         <p:nvSpPr>
           <p:cNvPr id="1106592995" name="Slide Image Placeholder 1"/>
           <p:cNvSpPr>
-            <a:spLocks noChangeAspect="1" noGrp="1" noRot="1"/>
+            <a:spLocks noGrp="1" noRot="1" noChangeAspect="1"/>
           </p:cNvSpPr>
           <p:nvPr>
             <p:ph type="sldImg"/>
@@ -914,7 +1818,7 @@
             </a:pPr>
             <a:fld id="{348169AB-9172-3A06-5F8E-D6B62CDA6B70}" type="slidenum">
               <a:rPr/>
-              <a:t/>
+              <a:t>3</a:t>
             </a:fld>
             <a:endParaRPr/>
           </a:p>
@@ -929,8 +1833,8 @@
 </file>
 
 <file path=ppt/notesSlides/notesSlide4.xml><?xml version="1.0" encoding="utf-8"?>
-<p:notes xmlns:a="http://schemas.openxmlformats.org/drawingml/2006/main" xmlns:r="http://schemas.openxmlformats.org/officeDocument/2006/relationships" xmlns:p="http://schemas.openxmlformats.org/presentationml/2006/main" xmlns:m="http://schemas.openxmlformats.org/officeDocument/2006/math" xmlns:w="http://schemas.openxmlformats.org/wordprocessingml/2006/main">
-  <p:cSld name="">
+<p:notes xmlns:a="http://schemas.openxmlformats.org/drawingml/2006/main" xmlns:r="http://schemas.openxmlformats.org/officeDocument/2006/relationships" xmlns:p="http://schemas.openxmlformats.org/presentationml/2006/main">
+  <p:cSld>
     <p:spTree>
       <p:nvGrpSpPr>
         <p:cNvPr id="1" name=""/>
@@ -949,7 +1853,7 @@
         <p:nvSpPr>
           <p:cNvPr id="1758305178" name="Slide Image Placeholder 1"/>
           <p:cNvSpPr>
-            <a:spLocks noChangeAspect="1" noGrp="1" noRot="1"/>
+            <a:spLocks noGrp="1" noRot="1" noChangeAspect="1"/>
           </p:cNvSpPr>
           <p:nvPr>
             <p:ph type="sldImg"/>
@@ -999,7 +1903,7 @@
             </a:pPr>
             <a:fld id="{64E40A21-BCCE-98A4-701D-39C45B924357}" type="slidenum">
               <a:rPr/>
-              <a:t/>
+              <a:t>4</a:t>
             </a:fld>
             <a:endParaRPr/>
           </a:p>
@@ -1014,8 +1918,8 @@
 </file>
 
 <file path=ppt/notesSlides/notesSlide5.xml><?xml version="1.0" encoding="utf-8"?>
-<p:notes xmlns:a="http://schemas.openxmlformats.org/drawingml/2006/main" xmlns:r="http://schemas.openxmlformats.org/officeDocument/2006/relationships" xmlns:p="http://schemas.openxmlformats.org/presentationml/2006/main" xmlns:m="http://schemas.openxmlformats.org/officeDocument/2006/math" xmlns:w="http://schemas.openxmlformats.org/wordprocessingml/2006/main">
-  <p:cSld name="">
+<p:notes xmlns:a="http://schemas.openxmlformats.org/drawingml/2006/main" xmlns:r="http://schemas.openxmlformats.org/officeDocument/2006/relationships" xmlns:p="http://schemas.openxmlformats.org/presentationml/2006/main">
+  <p:cSld>
     <p:spTree>
       <p:nvGrpSpPr>
         <p:cNvPr id="1" name=""/>
@@ -1034,7 +1938,7 @@
         <p:nvSpPr>
           <p:cNvPr id="187116676" name="Slide Image Placeholder 1"/>
           <p:cNvSpPr>
-            <a:spLocks noChangeAspect="1" noGrp="1" noRot="1"/>
+            <a:spLocks noGrp="1" noRot="1" noChangeAspect="1"/>
           </p:cNvSpPr>
           <p:nvPr>
             <p:ph type="sldImg"/>
@@ -1084,7 +1988,7 @@
             </a:pPr>
             <a:fld id="{4CDBE6F6-7276-366D-C2A1-41D736A08596}" type="slidenum">
               <a:rPr/>
-              <a:t/>
+              <a:t>5</a:t>
             </a:fld>
             <a:endParaRPr/>
           </a:p>
@@ -1099,8 +2003,8 @@
 </file>
 
 <file path=ppt/notesSlides/notesSlide6.xml><?xml version="1.0" encoding="utf-8"?>
-<p:notes xmlns:a="http://schemas.openxmlformats.org/drawingml/2006/main" xmlns:r="http://schemas.openxmlformats.org/officeDocument/2006/relationships" xmlns:p="http://schemas.openxmlformats.org/presentationml/2006/main" xmlns:m="http://schemas.openxmlformats.org/officeDocument/2006/math" xmlns:w="http://schemas.openxmlformats.org/wordprocessingml/2006/main">
-  <p:cSld name="">
+<p:notes xmlns:a="http://schemas.openxmlformats.org/drawingml/2006/main" xmlns:r="http://schemas.openxmlformats.org/officeDocument/2006/relationships" xmlns:p="http://schemas.openxmlformats.org/presentationml/2006/main">
+  <p:cSld>
     <p:spTree>
       <p:nvGrpSpPr>
         <p:cNvPr id="1" name=""/>
@@ -1119,7 +2023,7 @@
         <p:nvSpPr>
           <p:cNvPr id="211657766" name="Slide Image Placeholder 1"/>
           <p:cNvSpPr>
-            <a:spLocks noChangeAspect="1" noGrp="1" noRot="1"/>
+            <a:spLocks noGrp="1" noRot="1" noChangeAspect="1"/>
           </p:cNvSpPr>
           <p:nvPr>
             <p:ph type="sldImg"/>
@@ -1169,7 +2073,7 @@
             </a:pPr>
             <a:fld id="{4D83766B-D267-A387-A62B-F0081F3DBC40}" type="slidenum">
               <a:rPr/>
-              <a:t/>
+              <a:t>6</a:t>
             </a:fld>
             <a:endParaRPr/>
           </a:p>
@@ -1184,8 +2088,8 @@
 </file>
 
 <file path=ppt/notesSlides/notesSlide7.xml><?xml version="1.0" encoding="utf-8"?>
-<p:notes xmlns:a="http://schemas.openxmlformats.org/drawingml/2006/main" xmlns:r="http://schemas.openxmlformats.org/officeDocument/2006/relationships" xmlns:p="http://schemas.openxmlformats.org/presentationml/2006/main" xmlns:m="http://schemas.openxmlformats.org/officeDocument/2006/math" xmlns:w="http://schemas.openxmlformats.org/wordprocessingml/2006/main">
-  <p:cSld name="">
+<p:notes xmlns:a="http://schemas.openxmlformats.org/drawingml/2006/main" xmlns:r="http://schemas.openxmlformats.org/officeDocument/2006/relationships" xmlns:p="http://schemas.openxmlformats.org/presentationml/2006/main">
+  <p:cSld>
     <p:spTree>
       <p:nvGrpSpPr>
         <p:cNvPr id="1" name=""/>
@@ -1204,7 +2108,7 @@
         <p:nvSpPr>
           <p:cNvPr id="242396792" name="Slide Image Placeholder 1"/>
           <p:cNvSpPr>
-            <a:spLocks noChangeAspect="1" noGrp="1" noRot="1"/>
+            <a:spLocks noGrp="1" noRot="1" noChangeAspect="1"/>
           </p:cNvSpPr>
           <p:nvPr>
             <p:ph type="sldImg"/>
@@ -1254,7 +2158,7 @@
             </a:pPr>
             <a:fld id="{9A4266D5-73A1-54C4-04CE-D4B3E2B50860}" type="slidenum">
               <a:rPr/>
-              <a:t/>
+              <a:t>7</a:t>
             </a:fld>
             <a:endParaRPr/>
           </a:p>
@@ -1269,8 +2173,8 @@
 </file>
 
 <file path=ppt/notesSlides/notesSlide8.xml><?xml version="1.0" encoding="utf-8"?>
-<p:notes xmlns:a="http://schemas.openxmlformats.org/drawingml/2006/main" xmlns:r="http://schemas.openxmlformats.org/officeDocument/2006/relationships" xmlns:p="http://schemas.openxmlformats.org/presentationml/2006/main" xmlns:m="http://schemas.openxmlformats.org/officeDocument/2006/math" xmlns:w="http://schemas.openxmlformats.org/wordprocessingml/2006/main">
-  <p:cSld name="">
+<p:notes xmlns:a="http://schemas.openxmlformats.org/drawingml/2006/main" xmlns:r="http://schemas.openxmlformats.org/officeDocument/2006/relationships" xmlns:p="http://schemas.openxmlformats.org/presentationml/2006/main">
+  <p:cSld>
     <p:spTree>
       <p:nvGrpSpPr>
         <p:cNvPr id="1" name=""/>
@@ -1289,7 +2193,7 @@
         <p:nvSpPr>
           <p:cNvPr id="2" name="Slide Image Placeholder 1"/>
           <p:cNvSpPr>
-            <a:spLocks noChangeAspect="1" noGrp="1" noRot="1"/>
+            <a:spLocks noGrp="1" noRot="1" noChangeAspect="1"/>
           </p:cNvSpPr>
           <p:nvPr>
             <p:ph type="sldImg"/>
@@ -1339,7 +2243,7 @@
             </a:pPr>
             <a:fld id="{C7364DD0-CA69-29AB-DE81-FDF42785DA1D}" type="slidenum">
               <a:rPr/>
-              <a:t/>
+              <a:t>8</a:t>
             </a:fld>
             <a:endParaRPr/>
           </a:p>
@@ -1354,8 +2258,8 @@
 </file>
 
 <file path=ppt/notesSlides/notesSlide9.xml><?xml version="1.0" encoding="utf-8"?>
-<p:notes xmlns:a="http://schemas.openxmlformats.org/drawingml/2006/main" xmlns:r="http://schemas.openxmlformats.org/officeDocument/2006/relationships" xmlns:p="http://schemas.openxmlformats.org/presentationml/2006/main" xmlns:m="http://schemas.openxmlformats.org/officeDocument/2006/math" xmlns:w="http://schemas.openxmlformats.org/wordprocessingml/2006/main">
-  <p:cSld name="">
+<p:notes xmlns:a="http://schemas.openxmlformats.org/drawingml/2006/main" xmlns:r="http://schemas.openxmlformats.org/officeDocument/2006/relationships" xmlns:p="http://schemas.openxmlformats.org/presentationml/2006/main">
+  <p:cSld>
     <p:spTree>
       <p:nvGrpSpPr>
         <p:cNvPr id="1" name=""/>
@@ -1374,7 +2278,7 @@
         <p:nvSpPr>
           <p:cNvPr id="2" name="Slide Image Placeholder 1"/>
           <p:cNvSpPr>
-            <a:spLocks noChangeAspect="1" noGrp="1" noRot="1"/>
+            <a:spLocks noGrp="1" noRot="1" noChangeAspect="1"/>
           </p:cNvSpPr>
           <p:nvPr>
             <p:ph type="sldImg"/>
@@ -1424,7 +2328,7 @@
             </a:pPr>
             <a:fld id="{33A99C6E-1B03-FE2B-1F63-CEFDE5734355}" type="slidenum">
               <a:rPr/>
-              <a:t/>
+              <a:t>9</a:t>
             </a:fld>
             <a:endParaRPr/>
           </a:p>
@@ -1439,7 +2343,7 @@
 </file>
 
 <file path=ppt/slideLayouts/slideLayout1.xml><?xml version="1.0" encoding="utf-8"?>
-<p:sldLayout xmlns:a="http://schemas.openxmlformats.org/drawingml/2006/main" xmlns:r="http://schemas.openxmlformats.org/officeDocument/2006/relationships" xmlns:p="http://schemas.openxmlformats.org/presentationml/2006/main" xmlns:m="http://schemas.openxmlformats.org/officeDocument/2006/math" xmlns:w="http://schemas.openxmlformats.org/wordprocessingml/2006/main" matchingName="" preserve="1" showMasterPhAnim="0" showMasterSp="1" type="title" userDrawn="1">
+<p:sldLayout xmlns:a="http://schemas.openxmlformats.org/drawingml/2006/main" xmlns:r="http://schemas.openxmlformats.org/officeDocument/2006/relationships" xmlns:p="http://schemas.openxmlformats.org/presentationml/2006/main" showMasterPhAnim="0" type="title" preserve="1" userDrawn="1">
   <p:cSld name="Diapositive de titre">
     <p:spTree>
       <p:nvGrpSpPr>
@@ -1486,7 +2390,6 @@
               <a:rPr lang="fr-FR"/>
               <a:t>Modifiez le style du titre</a:t>
             </a:r>
-            <a:endParaRPr lang="fr-FR"/>
           </a:p>
         </p:txBody>
       </p:sp>
@@ -1554,7 +2457,6 @@
               <a:rPr lang="fr-FR"/>
               <a:t>Modifiez le style des sous-titres du masque</a:t>
             </a:r>
-            <a:endParaRPr lang="fr-FR"/>
           </a:p>
         </p:txBody>
       </p:sp>
@@ -1577,10 +2479,8 @@
               <a:defRPr/>
             </a:pPr>
             <a:r>
-              <a:rPr/>
               <a:t>04/02/2026</a:t>
             </a:r>
-            <a:endParaRPr/>
           </a:p>
         </p:txBody>
       </p:sp>
@@ -1626,7 +2526,7 @@
             </a:pPr>
             <a:fld id="{08395586-F03A-48D1-94DF-16B239DF4FB5}" type="slidenum">
               <a:rPr lang="fr-FR"/>
-              <a:t>‹#›</a:t>
+              <a:t>‹N°›</a:t>
             </a:fld>
             <a:endParaRPr lang="fr-FR"/>
           </a:p>
@@ -1641,7 +2541,7 @@
 </file>
 
 <file path=ppt/slideLayouts/slideLayout10.xml><?xml version="1.0" encoding="utf-8"?>
-<p:sldLayout xmlns:a="http://schemas.openxmlformats.org/drawingml/2006/main" xmlns:r="http://schemas.openxmlformats.org/officeDocument/2006/relationships" xmlns:p="http://schemas.openxmlformats.org/presentationml/2006/main" xmlns:m="http://schemas.openxmlformats.org/officeDocument/2006/math" xmlns:w="http://schemas.openxmlformats.org/wordprocessingml/2006/main" matchingName="" preserve="1" showMasterPhAnim="0" showMasterSp="1" type="vertTx" userDrawn="1">
+<p:sldLayout xmlns:a="http://schemas.openxmlformats.org/drawingml/2006/main" xmlns:r="http://schemas.openxmlformats.org/officeDocument/2006/relationships" xmlns:p="http://schemas.openxmlformats.org/presentationml/2006/main" showMasterPhAnim="0" type="vertTx" preserve="1" userDrawn="1">
   <p:cSld name="Titre et texte vertical">
     <p:spTree>
       <p:nvGrpSpPr>
@@ -1679,7 +2579,6 @@
               <a:rPr lang="fr-FR"/>
               <a:t>Modifiez le style du titre</a:t>
             </a:r>
-            <a:endParaRPr lang="fr-FR"/>
           </a:p>
         </p:txBody>
       </p:sp>
@@ -1745,7 +2644,6 @@
               <a:rPr lang="fr-FR"/>
               <a:t>Cinquième niveau</a:t>
             </a:r>
-            <a:endParaRPr lang="fr-FR"/>
           </a:p>
         </p:txBody>
       </p:sp>
@@ -1768,10 +2666,8 @@
               <a:defRPr/>
             </a:pPr>
             <a:r>
-              <a:rPr/>
               <a:t>04/02/2026</a:t>
             </a:r>
-            <a:endParaRPr/>
           </a:p>
         </p:txBody>
       </p:sp>
@@ -1817,7 +2713,7 @@
             </a:pPr>
             <a:fld id="{08395586-F03A-48D1-94DF-16B239DF4FB5}" type="slidenum">
               <a:rPr lang="fr-FR"/>
-              <a:t>‹#›</a:t>
+              <a:t>‹N°›</a:t>
             </a:fld>
             <a:endParaRPr lang="fr-FR"/>
           </a:p>
@@ -1832,7 +2728,7 @@
 </file>
 
 <file path=ppt/slideLayouts/slideLayout11.xml><?xml version="1.0" encoding="utf-8"?>
-<p:sldLayout xmlns:a="http://schemas.openxmlformats.org/drawingml/2006/main" xmlns:r="http://schemas.openxmlformats.org/officeDocument/2006/relationships" xmlns:p="http://schemas.openxmlformats.org/presentationml/2006/main" xmlns:m="http://schemas.openxmlformats.org/officeDocument/2006/math" xmlns:w="http://schemas.openxmlformats.org/wordprocessingml/2006/main" matchingName="" preserve="1" showMasterPhAnim="0" showMasterSp="1" type="vertTitleAndTx" userDrawn="1">
+<p:sldLayout xmlns:a="http://schemas.openxmlformats.org/drawingml/2006/main" xmlns:r="http://schemas.openxmlformats.org/officeDocument/2006/relationships" xmlns:p="http://schemas.openxmlformats.org/presentationml/2006/main" showMasterPhAnim="0" type="vertTitleAndTx" preserve="1" userDrawn="1">
   <p:cSld name="Titre vertical et texte">
     <p:spTree>
       <p:nvGrpSpPr>
@@ -1875,7 +2771,6 @@
               <a:rPr lang="fr-FR"/>
               <a:t>Modifiez le style du titre</a:t>
             </a:r>
-            <a:endParaRPr lang="fr-FR"/>
           </a:p>
         </p:txBody>
       </p:sp>
@@ -1946,7 +2841,6 @@
               <a:rPr lang="fr-FR"/>
               <a:t>Cinquième niveau</a:t>
             </a:r>
-            <a:endParaRPr lang="fr-FR"/>
           </a:p>
         </p:txBody>
       </p:sp>
@@ -1969,10 +2863,8 @@
               <a:defRPr/>
             </a:pPr>
             <a:r>
-              <a:rPr/>
               <a:t>04/02/2026</a:t>
             </a:r>
-            <a:endParaRPr/>
           </a:p>
         </p:txBody>
       </p:sp>
@@ -2018,7 +2910,7 @@
             </a:pPr>
             <a:fld id="{08395586-F03A-48D1-94DF-16B239DF4FB5}" type="slidenum">
               <a:rPr lang="fr-FR"/>
-              <a:t>‹#›</a:t>
+              <a:t>‹N°›</a:t>
             </a:fld>
             <a:endParaRPr lang="fr-FR"/>
           </a:p>
@@ -2033,7 +2925,7 @@
 </file>
 
 <file path=ppt/slideLayouts/slideLayout2.xml><?xml version="1.0" encoding="utf-8"?>
-<p:sldLayout xmlns:a="http://schemas.openxmlformats.org/drawingml/2006/main" xmlns:r="http://schemas.openxmlformats.org/officeDocument/2006/relationships" xmlns:p="http://schemas.openxmlformats.org/presentationml/2006/main" xmlns:m="http://schemas.openxmlformats.org/officeDocument/2006/math" xmlns:w="http://schemas.openxmlformats.org/wordprocessingml/2006/main" matchingName="" preserve="1" showMasterPhAnim="0" showMasterSp="1" type="obj" userDrawn="1">
+<p:sldLayout xmlns:a="http://schemas.openxmlformats.org/drawingml/2006/main" xmlns:r="http://schemas.openxmlformats.org/officeDocument/2006/relationships" xmlns:p="http://schemas.openxmlformats.org/presentationml/2006/main" showMasterPhAnim="0" type="obj" preserve="1" userDrawn="1">
   <p:cSld name="Titre et contenu">
     <p:spTree>
       <p:nvGrpSpPr>
@@ -2071,7 +2963,6 @@
               <a:rPr lang="fr-FR"/>
               <a:t>Modifiez le style du titre</a:t>
             </a:r>
-            <a:endParaRPr lang="fr-FR"/>
           </a:p>
         </p:txBody>
       </p:sp>
@@ -2137,7 +3028,6 @@
               <a:rPr lang="fr-FR"/>
               <a:t>Cinquième niveau</a:t>
             </a:r>
-            <a:endParaRPr lang="fr-FR"/>
           </a:p>
         </p:txBody>
       </p:sp>
@@ -2160,10 +3050,8 @@
               <a:defRPr/>
             </a:pPr>
             <a:r>
-              <a:rPr/>
               <a:t>04/02/2026</a:t>
             </a:r>
-            <a:endParaRPr/>
           </a:p>
         </p:txBody>
       </p:sp>
@@ -2209,7 +3097,7 @@
             </a:pPr>
             <a:fld id="{08395586-F03A-48D1-94DF-16B239DF4FB5}" type="slidenum">
               <a:rPr lang="fr-FR"/>
-              <a:t>‹#›</a:t>
+              <a:t>‹N°›</a:t>
             </a:fld>
             <a:endParaRPr lang="fr-FR"/>
           </a:p>
@@ -2224,7 +3112,7 @@
 </file>
 
 <file path=ppt/slideLayouts/slideLayout3.xml><?xml version="1.0" encoding="utf-8"?>
-<p:sldLayout xmlns:a="http://schemas.openxmlformats.org/drawingml/2006/main" xmlns:r="http://schemas.openxmlformats.org/officeDocument/2006/relationships" xmlns:p="http://schemas.openxmlformats.org/presentationml/2006/main" xmlns:m="http://schemas.openxmlformats.org/officeDocument/2006/math" xmlns:w="http://schemas.openxmlformats.org/wordprocessingml/2006/main" matchingName="" preserve="1" showMasterPhAnim="0" showMasterSp="1" type="secHead" userDrawn="1">
+<p:sldLayout xmlns:a="http://schemas.openxmlformats.org/drawingml/2006/main" xmlns:r="http://schemas.openxmlformats.org/officeDocument/2006/relationships" xmlns:p="http://schemas.openxmlformats.org/presentationml/2006/main" showMasterPhAnim="0" type="secHead" preserve="1" userDrawn="1">
   <p:cSld name="Titre de section">
     <p:spTree>
       <p:nvGrpSpPr>
@@ -2271,7 +3159,6 @@
               <a:rPr lang="fr-FR"/>
               <a:t>Modifiez le style du titre</a:t>
             </a:r>
-            <a:endParaRPr lang="fr-FR"/>
           </a:p>
         </p:txBody>
       </p:sp>
@@ -2416,10 +3303,8 @@
               <a:defRPr/>
             </a:pPr>
             <a:r>
-              <a:rPr/>
               <a:t>04/02/2026</a:t>
             </a:r>
-            <a:endParaRPr/>
           </a:p>
         </p:txBody>
       </p:sp>
@@ -2465,7 +3350,7 @@
             </a:pPr>
             <a:fld id="{08395586-F03A-48D1-94DF-16B239DF4FB5}" type="slidenum">
               <a:rPr lang="fr-FR"/>
-              <a:t>‹#›</a:t>
+              <a:t>‹N°›</a:t>
             </a:fld>
             <a:endParaRPr lang="fr-FR"/>
           </a:p>
@@ -2480,7 +3365,7 @@
 </file>
 
 <file path=ppt/slideLayouts/slideLayout4.xml><?xml version="1.0" encoding="utf-8"?>
-<p:sldLayout xmlns:a="http://schemas.openxmlformats.org/drawingml/2006/main" xmlns:r="http://schemas.openxmlformats.org/officeDocument/2006/relationships" xmlns:p="http://schemas.openxmlformats.org/presentationml/2006/main" xmlns:m="http://schemas.openxmlformats.org/officeDocument/2006/math" xmlns:w="http://schemas.openxmlformats.org/wordprocessingml/2006/main" matchingName="" preserve="1" showMasterPhAnim="0" showMasterSp="1" type="twoObj" userDrawn="1">
+<p:sldLayout xmlns:a="http://schemas.openxmlformats.org/drawingml/2006/main" xmlns:r="http://schemas.openxmlformats.org/officeDocument/2006/relationships" xmlns:p="http://schemas.openxmlformats.org/presentationml/2006/main" showMasterPhAnim="0" type="twoObj" preserve="1" userDrawn="1">
   <p:cSld name="Deux contenus">
     <p:spTree>
       <p:nvGrpSpPr>
@@ -2518,7 +3403,6 @@
               <a:rPr lang="fr-FR"/>
               <a:t>Modifiez le style du titre</a:t>
             </a:r>
-            <a:endParaRPr lang="fr-FR"/>
           </a:p>
         </p:txBody>
       </p:sp>
@@ -2589,7 +3473,6 @@
               <a:rPr lang="fr-FR"/>
               <a:t>Cinquième niveau</a:t>
             </a:r>
-            <a:endParaRPr lang="fr-FR"/>
           </a:p>
         </p:txBody>
       </p:sp>
@@ -2660,7 +3543,6 @@
               <a:rPr lang="fr-FR"/>
               <a:t>Cinquième niveau</a:t>
             </a:r>
-            <a:endParaRPr lang="fr-FR"/>
           </a:p>
         </p:txBody>
       </p:sp>
@@ -2683,10 +3565,8 @@
               <a:defRPr/>
             </a:pPr>
             <a:r>
-              <a:rPr/>
               <a:t>04/02/2026</a:t>
             </a:r>
-            <a:endParaRPr/>
           </a:p>
         </p:txBody>
       </p:sp>
@@ -2732,7 +3612,7 @@
             </a:pPr>
             <a:fld id="{08395586-F03A-48D1-94DF-16B239DF4FB5}" type="slidenum">
               <a:rPr lang="fr-FR"/>
-              <a:t>‹#›</a:t>
+              <a:t>‹N°›</a:t>
             </a:fld>
             <a:endParaRPr lang="fr-FR"/>
           </a:p>
@@ -2747,7 +3627,7 @@
 </file>
 
 <file path=ppt/slideLayouts/slideLayout5.xml><?xml version="1.0" encoding="utf-8"?>
-<p:sldLayout xmlns:a="http://schemas.openxmlformats.org/drawingml/2006/main" xmlns:r="http://schemas.openxmlformats.org/officeDocument/2006/relationships" xmlns:p="http://schemas.openxmlformats.org/presentationml/2006/main" xmlns:m="http://schemas.openxmlformats.org/officeDocument/2006/math" xmlns:w="http://schemas.openxmlformats.org/wordprocessingml/2006/main" matchingName="" preserve="1" showMasterPhAnim="0" showMasterSp="1" type="twoTxTwoObj" userDrawn="1">
+<p:sldLayout xmlns:a="http://schemas.openxmlformats.org/drawingml/2006/main" xmlns:r="http://schemas.openxmlformats.org/officeDocument/2006/relationships" xmlns:p="http://schemas.openxmlformats.org/presentationml/2006/main" showMasterPhAnim="0" type="twoTxTwoObj" preserve="1" userDrawn="1">
   <p:cSld name="Comparaison">
     <p:spTree>
       <p:nvGrpSpPr>
@@ -2790,7 +3670,6 @@
               <a:rPr lang="fr-FR"/>
               <a:t>Modifiez le style du titre</a:t>
             </a:r>
-            <a:endParaRPr lang="fr-FR"/>
           </a:p>
         </p:txBody>
       </p:sp>
@@ -2929,7 +3808,6 @@
               <a:rPr lang="fr-FR"/>
               <a:t>Cinquième niveau</a:t>
             </a:r>
-            <a:endParaRPr lang="fr-FR"/>
           </a:p>
         </p:txBody>
       </p:sp>
@@ -3068,7 +3946,6 @@
               <a:rPr lang="fr-FR"/>
               <a:t>Cinquième niveau</a:t>
             </a:r>
-            <a:endParaRPr lang="fr-FR"/>
           </a:p>
         </p:txBody>
       </p:sp>
@@ -3091,10 +3968,8 @@
               <a:defRPr/>
             </a:pPr>
             <a:r>
-              <a:rPr/>
               <a:t>04/02/2026</a:t>
             </a:r>
-            <a:endParaRPr/>
           </a:p>
         </p:txBody>
       </p:sp>
@@ -3140,7 +4015,7 @@
             </a:pPr>
             <a:fld id="{08395586-F03A-48D1-94DF-16B239DF4FB5}" type="slidenum">
               <a:rPr lang="fr-FR"/>
-              <a:t>‹#›</a:t>
+              <a:t>‹N°›</a:t>
             </a:fld>
             <a:endParaRPr lang="fr-FR"/>
           </a:p>
@@ -3155,7 +4030,7 @@
 </file>
 
 <file path=ppt/slideLayouts/slideLayout6.xml><?xml version="1.0" encoding="utf-8"?>
-<p:sldLayout xmlns:a="http://schemas.openxmlformats.org/drawingml/2006/main" xmlns:r="http://schemas.openxmlformats.org/officeDocument/2006/relationships" xmlns:p="http://schemas.openxmlformats.org/presentationml/2006/main" xmlns:m="http://schemas.openxmlformats.org/officeDocument/2006/math" xmlns:w="http://schemas.openxmlformats.org/wordprocessingml/2006/main" matchingName="" preserve="1" showMasterPhAnim="0" showMasterSp="1" type="titleOnly" userDrawn="1">
+<p:sldLayout xmlns:a="http://schemas.openxmlformats.org/drawingml/2006/main" xmlns:r="http://schemas.openxmlformats.org/officeDocument/2006/relationships" xmlns:p="http://schemas.openxmlformats.org/presentationml/2006/main" showMasterPhAnim="0" type="titleOnly" preserve="1" userDrawn="1">
   <p:cSld name="Titre seul">
     <p:spTree>
       <p:nvGrpSpPr>
@@ -3193,7 +4068,6 @@
               <a:rPr lang="fr-FR"/>
               <a:t>Modifiez le style du titre</a:t>
             </a:r>
-            <a:endParaRPr lang="fr-FR"/>
           </a:p>
         </p:txBody>
       </p:sp>
@@ -3216,10 +4090,8 @@
               <a:defRPr/>
             </a:pPr>
             <a:r>
-              <a:rPr/>
               <a:t>04/02/2026</a:t>
             </a:r>
-            <a:endParaRPr/>
           </a:p>
         </p:txBody>
       </p:sp>
@@ -3265,7 +4137,7 @@
             </a:pPr>
             <a:fld id="{08395586-F03A-48D1-94DF-16B239DF4FB5}" type="slidenum">
               <a:rPr lang="fr-FR"/>
-              <a:t>‹#›</a:t>
+              <a:t>‹N°›</a:t>
             </a:fld>
             <a:endParaRPr lang="fr-FR"/>
           </a:p>
@@ -3280,7 +4152,7 @@
 </file>
 
 <file path=ppt/slideLayouts/slideLayout7.xml><?xml version="1.0" encoding="utf-8"?>
-<p:sldLayout xmlns:a="http://schemas.openxmlformats.org/drawingml/2006/main" xmlns:r="http://schemas.openxmlformats.org/officeDocument/2006/relationships" xmlns:p="http://schemas.openxmlformats.org/presentationml/2006/main" xmlns:m="http://schemas.openxmlformats.org/officeDocument/2006/math" xmlns:w="http://schemas.openxmlformats.org/wordprocessingml/2006/main" matchingName="" preserve="1" showMasterPhAnim="0" showMasterSp="1" type="blank" userDrawn="1">
+<p:sldLayout xmlns:a="http://schemas.openxmlformats.org/drawingml/2006/main" xmlns:r="http://schemas.openxmlformats.org/officeDocument/2006/relationships" xmlns:p="http://schemas.openxmlformats.org/presentationml/2006/main" showMasterPhAnim="0" type="blank" preserve="1" userDrawn="1">
   <p:cSld name="Vide">
     <p:spTree>
       <p:nvGrpSpPr>
@@ -3315,10 +4187,8 @@
               <a:defRPr/>
             </a:pPr>
             <a:r>
-              <a:rPr/>
               <a:t>04/02/2026</a:t>
             </a:r>
-            <a:endParaRPr/>
           </a:p>
         </p:txBody>
       </p:sp>
@@ -3364,7 +4234,7 @@
             </a:pPr>
             <a:fld id="{08395586-F03A-48D1-94DF-16B239DF4FB5}" type="slidenum">
               <a:rPr lang="fr-FR"/>
-              <a:t>‹#›</a:t>
+              <a:t>‹N°›</a:t>
             </a:fld>
             <a:endParaRPr lang="fr-FR"/>
           </a:p>
@@ -3379,7 +4249,7 @@
 </file>
 
 <file path=ppt/slideLayouts/slideLayout8.xml><?xml version="1.0" encoding="utf-8"?>
-<p:sldLayout xmlns:a="http://schemas.openxmlformats.org/drawingml/2006/main" xmlns:r="http://schemas.openxmlformats.org/officeDocument/2006/relationships" xmlns:p="http://schemas.openxmlformats.org/presentationml/2006/main" xmlns:m="http://schemas.openxmlformats.org/officeDocument/2006/math" xmlns:w="http://schemas.openxmlformats.org/wordprocessingml/2006/main" matchingName="" preserve="1" showMasterPhAnim="0" showMasterSp="1" type="objTx" userDrawn="1">
+<p:sldLayout xmlns:a="http://schemas.openxmlformats.org/drawingml/2006/main" xmlns:r="http://schemas.openxmlformats.org/officeDocument/2006/relationships" xmlns:p="http://schemas.openxmlformats.org/presentationml/2006/main" showMasterPhAnim="0" type="objTx" preserve="1" userDrawn="1">
   <p:cSld name="Contenu avec légende">
     <p:spTree>
       <p:nvGrpSpPr>
@@ -3426,7 +4296,6 @@
               <a:rPr lang="fr-FR"/>
               <a:t>Modifiez le style du titre</a:t>
             </a:r>
-            <a:endParaRPr lang="fr-FR"/>
           </a:p>
         </p:txBody>
       </p:sp>
@@ -3525,7 +4394,6 @@
               <a:rPr lang="fr-FR"/>
               <a:t>Cinquième niveau</a:t>
             </a:r>
-            <a:endParaRPr lang="fr-FR"/>
           </a:p>
         </p:txBody>
       </p:sp>
@@ -3616,10 +4484,8 @@
               <a:defRPr/>
             </a:pPr>
             <a:r>
-              <a:rPr/>
               <a:t>04/02/2026</a:t>
             </a:r>
-            <a:endParaRPr/>
           </a:p>
         </p:txBody>
       </p:sp>
@@ -3665,7 +4531,7 @@
             </a:pPr>
             <a:fld id="{08395586-F03A-48D1-94DF-16B239DF4FB5}" type="slidenum">
               <a:rPr lang="fr-FR"/>
-              <a:t>‹#›</a:t>
+              <a:t>‹N°›</a:t>
             </a:fld>
             <a:endParaRPr lang="fr-FR"/>
           </a:p>
@@ -3680,7 +4546,7 @@
 </file>
 
 <file path=ppt/slideLayouts/slideLayout9.xml><?xml version="1.0" encoding="utf-8"?>
-<p:sldLayout xmlns:a="http://schemas.openxmlformats.org/drawingml/2006/main" xmlns:r="http://schemas.openxmlformats.org/officeDocument/2006/relationships" xmlns:p="http://schemas.openxmlformats.org/presentationml/2006/main" xmlns:m="http://schemas.openxmlformats.org/officeDocument/2006/math" xmlns:w="http://schemas.openxmlformats.org/wordprocessingml/2006/main" matchingName="" preserve="1" showMasterPhAnim="0" showMasterSp="1" type="picTx" userDrawn="1">
+<p:sldLayout xmlns:a="http://schemas.openxmlformats.org/drawingml/2006/main" xmlns:r="http://schemas.openxmlformats.org/officeDocument/2006/relationships" xmlns:p="http://schemas.openxmlformats.org/presentationml/2006/main" showMasterPhAnim="0" type="picTx" preserve="1" userDrawn="1">
   <p:cSld name="Image avec légende">
     <p:spTree>
       <p:nvGrpSpPr>
@@ -3727,7 +4593,6 @@
               <a:rPr lang="fr-FR"/>
               <a:t>Modifiez le style du titre</a:t>
             </a:r>
-            <a:endParaRPr lang="fr-FR"/>
           </a:p>
         </p:txBody>
       </p:sp>
@@ -3735,7 +4600,7 @@
         <p:nvSpPr>
           <p:cNvPr id="1931571289" name="Espace réservé pour une image 2"/>
           <p:cNvSpPr>
-            <a:spLocks noChangeAspect="1" noGrp="1"/>
+            <a:spLocks noGrp="1" noChangeAspect="1"/>
           </p:cNvSpPr>
           <p:nvPr>
             <p:ph type="pic" idx="1"/>
@@ -3795,7 +4660,6 @@
               <a:rPr lang="fr-FR"/>
               <a:t>Cliquez sur l'icône pour ajouter une image</a:t>
             </a:r>
-            <a:endParaRPr lang="fr-FR"/>
           </a:p>
         </p:txBody>
       </p:sp>
@@ -3886,10 +4750,8 @@
               <a:defRPr/>
             </a:pPr>
             <a:r>
-              <a:rPr/>
               <a:t>04/02/2026</a:t>
             </a:r>
-            <a:endParaRPr/>
           </a:p>
         </p:txBody>
       </p:sp>
@@ -3935,7 +4797,7 @@
             </a:pPr>
             <a:fld id="{08395586-F03A-48D1-94DF-16B239DF4FB5}" type="slidenum">
               <a:rPr lang="fr-FR"/>
-              <a:t>‹#›</a:t>
+              <a:t>‹N°›</a:t>
             </a:fld>
             <a:endParaRPr lang="fr-FR"/>
           </a:p>
@@ -3950,8 +4812,8 @@
 </file>
 
 <file path=ppt/slideMasters/slideMaster1.xml><?xml version="1.0" encoding="utf-8"?>
-<p:sldMaster xmlns:a="http://schemas.openxmlformats.org/drawingml/2006/main" xmlns:r="http://schemas.openxmlformats.org/officeDocument/2006/relationships" xmlns:p="http://schemas.openxmlformats.org/presentationml/2006/main" xmlns:m="http://schemas.openxmlformats.org/officeDocument/2006/math" xmlns:w="http://schemas.openxmlformats.org/wordprocessingml/2006/main" preserve="0">
-  <p:cSld name="">
+<p:sldMaster xmlns:a="http://schemas.openxmlformats.org/drawingml/2006/main" xmlns:r="http://schemas.openxmlformats.org/officeDocument/2006/relationships" xmlns:p="http://schemas.openxmlformats.org/presentationml/2006/main">
+  <p:cSld>
     <p:bg>
       <p:bgRef idx="1001">
         <a:schemeClr val="bg1"/>
@@ -4003,7 +4865,6 @@
               <a:rPr lang="fr-FR"/>
               <a:t>Modifiez le style du titre</a:t>
             </a:r>
-            <a:endParaRPr lang="fr-FR"/>
           </a:p>
         </p:txBody>
       </p:sp>
@@ -4079,7 +4940,6 @@
               <a:rPr lang="fr-FR"/>
               <a:t>Cinquième niveau</a:t>
             </a:r>
-            <a:endParaRPr lang="fr-FR"/>
           </a:p>
         </p:txBody>
       </p:sp>
@@ -4120,10 +4980,8 @@
               <a:defRPr/>
             </a:pPr>
             <a:r>
-              <a:rPr/>
               <a:t>04/02/2026</a:t>
             </a:r>
-            <a:endParaRPr/>
           </a:p>
         </p:txBody>
       </p:sp>
@@ -4205,7 +5063,7 @@
             </a:pPr>
             <a:fld id="{08395586-F03A-48D1-94DF-16B239DF4FB5}" type="slidenum">
               <a:rPr lang="fr-FR"/>
-              <a:t>‹#›</a:t>
+              <a:t>‹N°›</a:t>
             </a:fld>
             <a:endParaRPr lang="fr-FR"/>
           </a:p>
@@ -4227,7 +5085,7 @@
     <p:sldLayoutId id="2147483658" r:id="rId10"/>
     <p:sldLayoutId id="2147483659" r:id="rId11"/>
   </p:sldLayoutIdLst>
-  <p:hf dt="1" ftr="0" hdr="0" sldNum="1"/>
+  <p:hf hdr="0" ftr="0"/>
   <p:txStyles>
     <p:titleStyle>
       <a:lvl1pPr algn="l" defTabSz="914400" rtl="0">
@@ -4512,8 +5370,8 @@
 </file>
 
 <file path=ppt/slides/slide1.xml><?xml version="1.0" encoding="utf-8"?>
-<p:sld xmlns:a="http://schemas.openxmlformats.org/drawingml/2006/main" xmlns:r="http://schemas.openxmlformats.org/officeDocument/2006/relationships" xmlns:p="http://schemas.openxmlformats.org/presentationml/2006/main" xmlns:m="http://schemas.openxmlformats.org/officeDocument/2006/math" xmlns:w="http://schemas.openxmlformats.org/wordprocessingml/2006/main" xmlns:mc="http://schemas.openxmlformats.org/markup-compatibility/2006" showMasterPhAnim="0" showMasterSp="1" show="1">
-  <p:cSld name="">
+<p:sld xmlns:a="http://schemas.openxmlformats.org/drawingml/2006/main" xmlns:r="http://schemas.openxmlformats.org/officeDocument/2006/relationships" xmlns:p="http://schemas.openxmlformats.org/presentationml/2006/main" showMasterPhAnim="0">
+  <p:cSld>
     <p:spTree>
       <p:nvGrpSpPr>
         <p:cNvPr id="1" name=""/>
@@ -4555,7 +5413,6 @@
               <a:rPr lang="en-GB"/>
               <a:t>Final Project Presentation</a:t>
             </a:r>
-            <a:endParaRPr lang="en-GB"/>
           </a:p>
         </p:txBody>
       </p:sp>
@@ -4586,7 +5443,6 @@
               <a:rPr lang="en-GB"/>
               <a:t>Laser Tag System by Gaël Chauvet</a:t>
             </a:r>
-            <a:endParaRPr lang="en-GB"/>
           </a:p>
         </p:txBody>
       </p:sp>
@@ -4610,7 +5466,7 @@
             </a:pPr>
             <a:fld id="{98D0B6D8-D5A5-08F7-E169-A4E5249FEDE5}" type="slidenum">
               <a:rPr lang="fr-FR"/>
-              <a:t/>
+              <a:t>1</a:t>
             </a:fld>
             <a:endParaRPr/>
           </a:p>
@@ -4635,16 +5491,14 @@
               <a:defRPr/>
             </a:pPr>
             <a:r>
-              <a:rPr/>
               <a:t>04/02/2026</a:t>
             </a:r>
-            <a:endParaRPr/>
           </a:p>
         </p:txBody>
       </p:sp>
       <p:pic>
         <p:nvPicPr>
-          <p:cNvPr id="59867102" name=""/>
+          <p:cNvPr id="59867102" name="Image 59867101"/>
           <p:cNvPicPr>
             <a:picLocks noChangeAspect="1"/>
           </p:cNvPicPr>
@@ -4655,7 +5509,7 @@
           <a:stretch/>
         </p:blipFill>
         <p:spPr bwMode="auto">
-          <a:xfrm flipH="0" flipV="0">
+          <a:xfrm>
             <a:off x="3581399" y="3343955"/>
             <a:ext cx="5029199" cy="2734944"/>
           </a:xfrm>
@@ -4669,20 +5523,12 @@
   <p:clrMapOvr>
     <a:masterClrMapping/>
   </p:clrMapOvr>
-  <mc:AlternateContent xmlns:mc="http://schemas.openxmlformats.org/markup-compatibility/2006">
-    <mc:Choice xmlns:p159="http://schemas.microsoft.com/office/powerpoint/2015/09/main" xmlns:p14="http://schemas.microsoft.com/office/powerpoint/2010/main" Requires="p159">
-      <p:transition p14:dur="2000" advClick="1"/>
-    </mc:Choice>
-    <mc:Fallback>
-      <p:transition advClick="1"/>
-    </mc:Fallback>
-  </mc:AlternateContent>
 </p:sld>
 </file>
 
 <file path=ppt/slides/slide10.xml><?xml version="1.0" encoding="utf-8"?>
-<p:sld xmlns:a="http://schemas.openxmlformats.org/drawingml/2006/main" xmlns:r="http://schemas.openxmlformats.org/officeDocument/2006/relationships" xmlns:p="http://schemas.openxmlformats.org/presentationml/2006/main" xmlns:m="http://schemas.openxmlformats.org/officeDocument/2006/math" xmlns:w="http://schemas.openxmlformats.org/wordprocessingml/2006/main" xmlns:mc="http://schemas.openxmlformats.org/markup-compatibility/2006" showMasterPhAnim="0" showMasterSp="1" show="1">
-  <p:cSld name="">
+<p:sld xmlns:a="http://schemas.openxmlformats.org/drawingml/2006/main" xmlns:r="http://schemas.openxmlformats.org/officeDocument/2006/relationships" xmlns:p="http://schemas.openxmlformats.org/presentationml/2006/main" showMasterPhAnim="0">
+  <p:cSld>
     <p:spTree>
       <p:nvGrpSpPr>
         <p:cNvPr id="1" name=""/>
@@ -4749,10 +5595,8 @@
               <a:defRPr/>
             </a:pPr>
             <a:r>
-              <a:rPr/>
               <a:t>04/02/2026</a:t>
             </a:r>
-            <a:endParaRPr/>
           </a:p>
         </p:txBody>
       </p:sp>
@@ -4776,7 +5620,7 @@
             </a:pPr>
             <a:fld id="{43049145-3055-3470-E904-AF1360FED3B1}" type="slidenum">
               <a:rPr lang="fr-FR"/>
-              <a:t/>
+              <a:t>10</a:t>
             </a:fld>
             <a:endParaRPr lang="fr-FR"/>
           </a:p>
@@ -4787,20 +5631,12 @@
   <p:clrMapOvr>
     <a:masterClrMapping/>
   </p:clrMapOvr>
-  <mc:AlternateContent xmlns:mc="http://schemas.openxmlformats.org/markup-compatibility/2006">
-    <mc:Choice xmlns:p159="http://schemas.microsoft.com/office/powerpoint/2015/09/main" xmlns:p14="http://schemas.microsoft.com/office/powerpoint/2010/main" Requires="p159">
-      <p:transition p14:dur="2000" advClick="1"/>
-    </mc:Choice>
-    <mc:Fallback>
-      <p:transition advClick="1"/>
-    </mc:Fallback>
-  </mc:AlternateContent>
 </p:sld>
 </file>
 
 <file path=ppt/slides/slide11.xml><?xml version="1.0" encoding="utf-8"?>
-<p:sld xmlns:a="http://schemas.openxmlformats.org/drawingml/2006/main" xmlns:r="http://schemas.openxmlformats.org/officeDocument/2006/relationships" xmlns:p="http://schemas.openxmlformats.org/presentationml/2006/main" xmlns:m="http://schemas.openxmlformats.org/officeDocument/2006/math" xmlns:w="http://schemas.openxmlformats.org/wordprocessingml/2006/main" xmlns:mc="http://schemas.openxmlformats.org/markup-compatibility/2006" showMasterPhAnim="0" showMasterSp="1" show="1">
-  <p:cSld name="">
+<p:sld xmlns:a="http://schemas.openxmlformats.org/drawingml/2006/main" xmlns:r="http://schemas.openxmlformats.org/officeDocument/2006/relationships" xmlns:p="http://schemas.openxmlformats.org/presentationml/2006/main" showMasterPhAnim="0">
+  <p:cSld>
     <p:spTree>
       <p:nvGrpSpPr>
         <p:cNvPr id="1" name=""/>
@@ -4867,10 +5703,8 @@
               <a:defRPr/>
             </a:pPr>
             <a:r>
-              <a:rPr/>
               <a:t>04/02/2026</a:t>
             </a:r>
-            <a:endParaRPr/>
           </a:p>
         </p:txBody>
       </p:sp>
@@ -4894,7 +5728,7 @@
             </a:pPr>
             <a:fld id="{542E42B6-B5E3-E305-D03A-552A20660560}" type="slidenum">
               <a:rPr lang="fr-FR"/>
-              <a:t/>
+              <a:t>11</a:t>
             </a:fld>
             <a:endParaRPr lang="fr-FR"/>
           </a:p>
@@ -4905,20 +5739,2714 @@
   <p:clrMapOvr>
     <a:masterClrMapping/>
   </p:clrMapOvr>
-  <mc:AlternateContent xmlns:mc="http://schemas.openxmlformats.org/markup-compatibility/2006">
-    <mc:Choice xmlns:p159="http://schemas.microsoft.com/office/powerpoint/2015/09/main" xmlns:p14="http://schemas.microsoft.com/office/powerpoint/2010/main" Requires="p159">
-      <p:transition p14:dur="2000" advClick="1"/>
-    </mc:Choice>
-    <mc:Fallback>
-      <p:transition advClick="1"/>
-    </mc:Fallback>
-  </mc:AlternateContent>
+</p:sld>
+</file>
+
+<file path=ppt/slides/slide12.xml><?xml version="1.0" encoding="utf-8"?>
+<p:sld xmlns:a="http://schemas.openxmlformats.org/drawingml/2006/main" xmlns:r="http://schemas.openxmlformats.org/officeDocument/2006/relationships" xmlns:p="http://schemas.openxmlformats.org/presentationml/2006/main">
+  <p:cSld>
+    <p:bg>
+      <p:bgPr>
+        <a:solidFill>
+          <a:schemeClr val="bg1"/>
+        </a:solidFill>
+        <a:effectLst/>
+      </p:bgPr>
+    </p:bg>
+    <p:spTree>
+      <p:nvGrpSpPr>
+        <p:cNvPr id="1" name="">
+          <a:extLst>
+            <a:ext uri="{FF2B5EF4-FFF2-40B4-BE49-F238E27FC236}">
+              <a16:creationId xmlns:a16="http://schemas.microsoft.com/office/drawing/2014/main" id="{876C5D74-A9E5-E4E7-8262-39D62A356BB9}"/>
+            </a:ext>
+          </a:extLst>
+        </p:cNvPr>
+        <p:cNvGrpSpPr/>
+        <p:nvPr/>
+      </p:nvGrpSpPr>
+      <p:grpSpPr>
+        <a:xfrm>
+          <a:off x="0" y="0"/>
+          <a:ext cx="0" cy="0"/>
+          <a:chOff x="0" y="0"/>
+          <a:chExt cx="0" cy="0"/>
+        </a:xfrm>
+      </p:grpSpPr>
+      <p:sp useBgFill="1">
+        <p:nvSpPr>
+          <p:cNvPr id="8" name="Rectangle 7">
+            <a:extLst>
+              <a:ext uri="{FF2B5EF4-FFF2-40B4-BE49-F238E27FC236}">
+                <a16:creationId xmlns:a16="http://schemas.microsoft.com/office/drawing/2014/main" id="{BAD76F3E-3A97-486B-B402-44400A8B9173}"/>
+              </a:ext>
+              <a:ext uri="{C183D7F6-B498-43B3-948B-1728B52AA6E4}">
+                <adec:decorative xmlns:adec="http://schemas.microsoft.com/office/drawing/2017/decorative" val="1"/>
+              </a:ext>
+            </a:extLst>
+          </p:cNvPr>
+          <p:cNvSpPr>
+            <a:spLocks noGrp="1" noRot="1" noChangeAspect="1" noMove="1" noResize="1" noEditPoints="1" noAdjustHandles="1" noChangeArrowheads="1" noChangeShapeType="1" noTextEdit="1"/>
+          </p:cNvSpPr>
+          <p:nvPr>
+            <p:extLst>
+              <p:ext uri="{386F3935-93C4-4BCD-93E2-E3B085C9AB24}">
+                <p16:designElem xmlns:p16="http://schemas.microsoft.com/office/powerpoint/2015/main" val="1"/>
+              </p:ext>
+            </p:extLst>
+          </p:nvPr>
+        </p:nvSpPr>
+        <p:spPr>
+          <a:xfrm>
+            <a:off x="0" y="0"/>
+            <a:ext cx="12192000" cy="6858000"/>
+          </a:xfrm>
+          <a:prstGeom prst="rect">
+            <a:avLst/>
+          </a:prstGeom>
+          <a:ln>
+            <a:noFill/>
+          </a:ln>
+        </p:spPr>
+        <p:style>
+          <a:lnRef idx="2">
+            <a:schemeClr val="accent1">
+              <a:shade val="50000"/>
+            </a:schemeClr>
+          </a:lnRef>
+          <a:fillRef idx="1">
+            <a:schemeClr val="accent1"/>
+          </a:fillRef>
+          <a:effectRef idx="0">
+            <a:schemeClr val="accent1"/>
+          </a:effectRef>
+          <a:fontRef idx="minor">
+            <a:schemeClr val="lt1"/>
+          </a:fontRef>
+        </p:style>
+        <p:txBody>
+          <a:bodyPr rtlCol="0" anchor="ctr"/>
+          <a:lstStyle/>
+          <a:p>
+            <a:pPr algn="ctr"/>
+            <a:endParaRPr lang="en-US"/>
+          </a:p>
+        </p:txBody>
+      </p:sp>
+      <p:sp>
+        <p:nvSpPr>
+          <p:cNvPr id="2" name="Titre 1">
+            <a:extLst>
+              <a:ext uri="{FF2B5EF4-FFF2-40B4-BE49-F238E27FC236}">
+                <a16:creationId xmlns:a16="http://schemas.microsoft.com/office/drawing/2014/main" id="{E9157419-0202-DF90-0245-4B76F085E768}"/>
+              </a:ext>
+            </a:extLst>
+          </p:cNvPr>
+          <p:cNvSpPr>
+            <a:spLocks noGrp="1"/>
+          </p:cNvSpPr>
+          <p:nvPr>
+            <p:ph type="title"/>
+          </p:nvPr>
+        </p:nvSpPr>
+        <p:spPr>
+          <a:xfrm>
+            <a:off x="838199" y="1093788"/>
+            <a:ext cx="10506455" cy="2967208"/>
+          </a:xfrm>
+        </p:spPr>
+        <p:txBody>
+          <a:bodyPr vert="horz" lIns="91440" tIns="45720" rIns="91440" bIns="45720" rtlCol="0" anchor="b">
+            <a:normAutofit/>
+          </a:bodyPr>
+          <a:lstStyle/>
+          <a:p>
+            <a:pPr>
+              <a:spcBef>
+                <a:spcPct val="0"/>
+              </a:spcBef>
+            </a:pPr>
+            <a:r>
+              <a:rPr lang="en-US" sz="8000" kern="1200" dirty="0">
+                <a:solidFill>
+                  <a:schemeClr val="tx1"/>
+                </a:solidFill>
+              </a:rPr>
+              <a:t>Bonjour</a:t>
+            </a:r>
+          </a:p>
+        </p:txBody>
+      </p:sp>
+      <p:sp>
+        <p:nvSpPr>
+          <p:cNvPr id="3" name="Titre 1">
+            <a:extLst>
+              <a:ext uri="{FF2B5EF4-FFF2-40B4-BE49-F238E27FC236}">
+                <a16:creationId xmlns:a16="http://schemas.microsoft.com/office/drawing/2014/main" id="{A27D13DE-6158-5C72-D41B-6C2CB92445C0}"/>
+              </a:ext>
+            </a:extLst>
+          </p:cNvPr>
+          <p:cNvSpPr txBox="1">
+            <a:spLocks/>
+          </p:cNvSpPr>
+          <p:nvPr/>
+        </p:nvSpPr>
+        <p:spPr bwMode="auto">
+          <a:xfrm>
+            <a:off x="7400924" y="4619624"/>
+            <a:ext cx="3946779" cy="1038225"/>
+          </a:xfrm>
+          <a:prstGeom prst="rect">
+            <a:avLst/>
+          </a:prstGeom>
+        </p:spPr>
+        <p:txBody>
+          <a:bodyPr vert="horz" lIns="91440" tIns="45720" rIns="91440" bIns="45720" rtlCol="0">
+            <a:normAutofit/>
+          </a:bodyPr>
+          <a:lstStyle>
+            <a:lvl1pPr algn="l" defTabSz="914400" rtl="0">
+              <a:lnSpc>
+                <a:spcPct val="90000"/>
+              </a:lnSpc>
+              <a:spcBef>
+                <a:spcPts val="0"/>
+              </a:spcBef>
+              <a:buNone/>
+              <a:defRPr sz="4400">
+                <a:solidFill>
+                  <a:schemeClr val="tx1"/>
+                </a:solidFill>
+                <a:latin typeface="+mj-lt"/>
+                <a:ea typeface="+mj-ea"/>
+                <a:cs typeface="+mj-cs"/>
+              </a:defRPr>
+            </a:lvl1pPr>
+          </a:lstStyle>
+          <a:p>
+            <a:pPr algn="r">
+              <a:spcBef>
+                <a:spcPts val="1000"/>
+              </a:spcBef>
+            </a:pPr>
+            <a:r>
+              <a:rPr lang="en-US" sz="2400" kern="1200" dirty="0">
+                <a:solidFill>
+                  <a:schemeClr val="tx1"/>
+                </a:solidFill>
+                <a:latin typeface="+mn-lt"/>
+                <a:ea typeface="+mn-ea"/>
+                <a:cs typeface="+mn-cs"/>
+              </a:rPr>
+              <a:t>et </a:t>
+            </a:r>
+            <a:r>
+              <a:rPr lang="en-US" sz="2400" kern="1200" dirty="0" err="1">
+                <a:solidFill>
+                  <a:schemeClr val="tx1"/>
+                </a:solidFill>
+                <a:latin typeface="+mn-lt"/>
+                <a:ea typeface="+mn-ea"/>
+                <a:cs typeface="+mn-cs"/>
+              </a:rPr>
+              <a:t>bienvenue</a:t>
+            </a:r>
+            <a:r>
+              <a:rPr lang="en-US" sz="2400" kern="1200" dirty="0">
+                <a:solidFill>
+                  <a:schemeClr val="tx1"/>
+                </a:solidFill>
+                <a:latin typeface="+mn-lt"/>
+                <a:ea typeface="+mn-ea"/>
+                <a:cs typeface="+mn-cs"/>
+              </a:rPr>
+              <a:t> …</a:t>
+            </a:r>
+          </a:p>
+        </p:txBody>
+      </p:sp>
+      <p:sp>
+        <p:nvSpPr>
+          <p:cNvPr id="10" name="Rectangle 9">
+            <a:extLst>
+              <a:ext uri="{FF2B5EF4-FFF2-40B4-BE49-F238E27FC236}">
+                <a16:creationId xmlns:a16="http://schemas.microsoft.com/office/drawing/2014/main" id="{391F6B52-91F4-4AEB-B6DB-29FEBCF28C8B}"/>
+              </a:ext>
+              <a:ext uri="{C183D7F6-B498-43B3-948B-1728B52AA6E4}">
+                <adec:decorative xmlns:adec="http://schemas.microsoft.com/office/drawing/2017/decorative" val="1"/>
+              </a:ext>
+            </a:extLst>
+          </p:cNvPr>
+          <p:cNvSpPr>
+            <a:spLocks noGrp="1" noRot="1" noChangeAspect="1" noMove="1" noResize="1" noEditPoints="1" noAdjustHandles="1" noChangeArrowheads="1" noChangeShapeType="1" noTextEdit="1"/>
+          </p:cNvSpPr>
+          <p:nvPr>
+            <p:extLst>
+              <p:ext uri="{386F3935-93C4-4BCD-93E2-E3B085C9AB24}">
+                <p16:designElem xmlns:p16="http://schemas.microsoft.com/office/powerpoint/2015/main" val="1"/>
+              </p:ext>
+            </p:extLst>
+          </p:nvPr>
+        </p:nvSpPr>
+        <p:spPr>
+          <a:xfrm>
+            <a:off x="841248" y="4331166"/>
+            <a:ext cx="10506456" cy="18288"/>
+          </a:xfrm>
+          <a:prstGeom prst="rect">
+            <a:avLst/>
+          </a:prstGeom>
+          <a:solidFill>
+            <a:srgbClr val="D5D5D5"/>
+          </a:solidFill>
+          <a:ln w="3175">
+            <a:noFill/>
+          </a:ln>
+          <a:effectLst/>
+        </p:spPr>
+        <p:style>
+          <a:lnRef idx="2">
+            <a:schemeClr val="accent1">
+              <a:shade val="50000"/>
+            </a:schemeClr>
+          </a:lnRef>
+          <a:fillRef idx="1">
+            <a:schemeClr val="accent1"/>
+          </a:fillRef>
+          <a:effectRef idx="0">
+            <a:schemeClr val="accent1"/>
+          </a:effectRef>
+          <a:fontRef idx="minor">
+            <a:schemeClr val="lt1"/>
+          </a:fontRef>
+        </p:style>
+        <p:txBody>
+          <a:bodyPr rtlCol="0" anchor="ctr"/>
+          <a:lstStyle/>
+          <a:p>
+            <a:pPr algn="ctr"/>
+            <a:endParaRPr lang="en-US">
+              <a:solidFill>
+                <a:prstClr val="white"/>
+              </a:solidFill>
+              <a:latin typeface="Calibri" panose="020F0502020204030204"/>
+            </a:endParaRPr>
+          </a:p>
+        </p:txBody>
+      </p:sp>
+      <p:sp>
+        <p:nvSpPr>
+          <p:cNvPr id="12" name="Rectangle 11">
+            <a:extLst>
+              <a:ext uri="{FF2B5EF4-FFF2-40B4-BE49-F238E27FC236}">
+                <a16:creationId xmlns:a16="http://schemas.microsoft.com/office/drawing/2014/main" id="{2CD6F061-7C53-44F4-9794-953DB70A451B}"/>
+              </a:ext>
+              <a:ext uri="{C183D7F6-B498-43B3-948B-1728B52AA6E4}">
+                <adec:decorative xmlns:adec="http://schemas.microsoft.com/office/drawing/2017/decorative" val="1"/>
+              </a:ext>
+            </a:extLst>
+          </p:cNvPr>
+          <p:cNvSpPr>
+            <a:spLocks noGrp="1" noRot="1" noChangeAspect="1" noMove="1" noResize="1" noEditPoints="1" noAdjustHandles="1" noChangeArrowheads="1" noChangeShapeType="1" noTextEdit="1"/>
+          </p:cNvSpPr>
+          <p:nvPr>
+            <p:extLst>
+              <p:ext uri="{386F3935-93C4-4BCD-93E2-E3B085C9AB24}">
+                <p16:designElem xmlns:p16="http://schemas.microsoft.com/office/powerpoint/2015/main" val="1"/>
+              </p:ext>
+            </p:extLst>
+          </p:nvPr>
+        </p:nvSpPr>
+        <p:spPr>
+          <a:xfrm rot="5400000">
+            <a:off x="9346882" y="2348839"/>
+            <a:ext cx="54864" cy="3946779"/>
+          </a:xfrm>
+          <a:prstGeom prst="rect">
+            <a:avLst/>
+          </a:prstGeom>
+          <a:solidFill>
+            <a:schemeClr val="accent2"/>
+          </a:solidFill>
+          <a:ln>
+            <a:noFill/>
+          </a:ln>
+        </p:spPr>
+        <p:style>
+          <a:lnRef idx="2">
+            <a:schemeClr val="accent1">
+              <a:shade val="50000"/>
+            </a:schemeClr>
+          </a:lnRef>
+          <a:fillRef idx="1">
+            <a:schemeClr val="accent1"/>
+          </a:fillRef>
+          <a:effectRef idx="0">
+            <a:schemeClr val="accent1"/>
+          </a:effectRef>
+          <a:fontRef idx="minor">
+            <a:schemeClr val="lt1"/>
+          </a:fontRef>
+        </p:style>
+        <p:txBody>
+          <a:bodyPr rtlCol="0" anchor="ctr"/>
+          <a:lstStyle/>
+          <a:p>
+            <a:pPr marL="0" marR="0" lvl="0" indent="0" algn="ctr" defTabSz="914400" rtl="0" eaLnBrk="1" fontAlgn="auto" latinLnBrk="0" hangingPunct="1">
+              <a:lnSpc>
+                <a:spcPct val="100000"/>
+              </a:lnSpc>
+              <a:spcBef>
+                <a:spcPts val="0"/>
+              </a:spcBef>
+              <a:spcAft>
+                <a:spcPts val="0"/>
+              </a:spcAft>
+              <a:buClrTx/>
+              <a:buSzTx/>
+              <a:buFontTx/>
+              <a:buNone/>
+              <a:tabLst/>
+              <a:defRPr/>
+            </a:pPr>
+            <a:endParaRPr kumimoji="0" lang="en-US" sz="1800" b="0" i="0" u="none" strike="noStrike" kern="1200" cap="none" spc="0" normalizeH="0" baseline="0" noProof="0">
+              <a:ln>
+                <a:noFill/>
+              </a:ln>
+              <a:solidFill>
+                <a:prstClr val="white"/>
+              </a:solidFill>
+              <a:effectLst/>
+              <a:uLnTx/>
+              <a:uFillTx/>
+              <a:latin typeface="Calibri" panose="020F0502020204030204"/>
+              <a:ea typeface="+mn-ea"/>
+              <a:cs typeface="+mn-cs"/>
+            </a:endParaRPr>
+          </a:p>
+        </p:txBody>
+      </p:sp>
+      <p:pic>
+        <p:nvPicPr>
+          <p:cNvPr id="7" name="Graphique 6" descr="Tasse de latte avec un remplissage uni">
+            <a:extLst>
+              <a:ext uri="{FF2B5EF4-FFF2-40B4-BE49-F238E27FC236}">
+                <a16:creationId xmlns:a16="http://schemas.microsoft.com/office/drawing/2014/main" id="{0792534D-95E8-2852-66E0-4F66248FFACF}"/>
+              </a:ext>
+            </a:extLst>
+          </p:cNvPr>
+          <p:cNvPicPr>
+            <a:picLocks noChangeAspect="1"/>
+          </p:cNvPicPr>
+          <p:nvPr/>
+        </p:nvPicPr>
+        <p:blipFill>
+          <a:blip r:embed="rId2">
+            <a:extLst>
+              <a:ext uri="{96DAC541-7B7A-43D3-8B79-37D633B846F1}">
+                <asvg:svgBlip xmlns:asvg="http://schemas.microsoft.com/office/drawing/2016/SVG/main" r:embed="rId3"/>
+              </a:ext>
+            </a:extLst>
+          </a:blip>
+          <a:stretch>
+            <a:fillRect/>
+          </a:stretch>
+        </p:blipFill>
+        <p:spPr>
+          <a:xfrm>
+            <a:off x="5143290" y="4924635"/>
+            <a:ext cx="1466427" cy="1466427"/>
+          </a:xfrm>
+          <a:prstGeom prst="rect">
+            <a:avLst/>
+          </a:prstGeom>
+        </p:spPr>
+      </p:pic>
+      <p:pic>
+        <p:nvPicPr>
+          <p:cNvPr id="11" name="Image 10" descr="Une image contenant Police, Graphique, logo, symbole&#10;&#10;Le contenu généré par l’IA peut être incorrect.">
+            <a:extLst>
+              <a:ext uri="{FF2B5EF4-FFF2-40B4-BE49-F238E27FC236}">
+                <a16:creationId xmlns:a16="http://schemas.microsoft.com/office/drawing/2014/main" id="{DE60CC94-E546-EBAB-CF35-C4CF9F4D1BFC}"/>
+              </a:ext>
+            </a:extLst>
+          </p:cNvPr>
+          <p:cNvPicPr>
+            <a:picLocks noChangeAspect="1"/>
+          </p:cNvPicPr>
+          <p:nvPr/>
+        </p:nvPicPr>
+        <p:blipFill>
+          <a:blip r:embed="rId4">
+            <a:extLst>
+              <a:ext uri="{28A0092B-C50C-407E-A947-70E740481C1C}">
+                <a14:useLocalDpi xmlns:a14="http://schemas.microsoft.com/office/drawing/2010/main" val="0"/>
+              </a:ext>
+            </a:extLst>
+          </a:blip>
+          <a:stretch>
+            <a:fillRect/>
+          </a:stretch>
+        </p:blipFill>
+        <p:spPr>
+          <a:xfrm>
+            <a:off x="8136975" y="512080"/>
+            <a:ext cx="3499581" cy="1090212"/>
+          </a:xfrm>
+          <a:prstGeom prst="rect">
+            <a:avLst/>
+          </a:prstGeom>
+        </p:spPr>
+      </p:pic>
+    </p:spTree>
+    <p:extLst>
+      <p:ext uri="{BB962C8B-B14F-4D97-AF65-F5344CB8AC3E}">
+        <p14:creationId xmlns:p14="http://schemas.microsoft.com/office/powerpoint/2010/main" val="2553194390"/>
+      </p:ext>
+    </p:extLst>
+  </p:cSld>
+  <p:clrMapOvr>
+    <a:masterClrMapping/>
+  </p:clrMapOvr>
+</p:sld>
+</file>
+
+<file path=ppt/slides/slide13.xml><?xml version="1.0" encoding="utf-8"?>
+<p:sld xmlns:a="http://schemas.openxmlformats.org/drawingml/2006/main" xmlns:r="http://schemas.openxmlformats.org/officeDocument/2006/relationships" xmlns:p="http://schemas.openxmlformats.org/presentationml/2006/main">
+  <p:cSld>
+    <p:bg>
+      <p:bgPr>
+        <a:solidFill>
+          <a:schemeClr val="bg1"/>
+        </a:solidFill>
+        <a:effectLst/>
+      </p:bgPr>
+    </p:bg>
+    <p:spTree>
+      <p:nvGrpSpPr>
+        <p:cNvPr id="1" name=""/>
+        <p:cNvGrpSpPr/>
+        <p:nvPr/>
+      </p:nvGrpSpPr>
+      <p:grpSpPr>
+        <a:xfrm>
+          <a:off x="0" y="0"/>
+          <a:ext cx="0" cy="0"/>
+          <a:chOff x="0" y="0"/>
+          <a:chExt cx="0" cy="0"/>
+        </a:xfrm>
+      </p:grpSpPr>
+      <p:sp useBgFill="1">
+        <p:nvSpPr>
+          <p:cNvPr id="10" name="Rectangle 9">
+            <a:extLst>
+              <a:ext uri="{FF2B5EF4-FFF2-40B4-BE49-F238E27FC236}">
+                <a16:creationId xmlns:a16="http://schemas.microsoft.com/office/drawing/2014/main" id="{676A1B86-DC99-46B9-B5AA-A7E928EA9CF7}"/>
+              </a:ext>
+              <a:ext uri="{C183D7F6-B498-43B3-948B-1728B52AA6E4}">
+                <adec:decorative xmlns:adec="http://schemas.microsoft.com/office/drawing/2017/decorative" val="1"/>
+              </a:ext>
+            </a:extLst>
+          </p:cNvPr>
+          <p:cNvSpPr>
+            <a:spLocks noGrp="1" noRot="1" noChangeAspect="1" noMove="1" noResize="1" noEditPoints="1" noAdjustHandles="1" noChangeArrowheads="1" noChangeShapeType="1" noTextEdit="1"/>
+          </p:cNvSpPr>
+          <p:nvPr>
+            <p:extLst>
+              <p:ext uri="{386F3935-93C4-4BCD-93E2-E3B085C9AB24}">
+                <p16:designElem xmlns:p16="http://schemas.microsoft.com/office/powerpoint/2015/main" val="1"/>
+              </p:ext>
+            </p:extLst>
+          </p:nvPr>
+        </p:nvSpPr>
+        <p:spPr>
+          <a:xfrm>
+            <a:off x="0" y="0"/>
+            <a:ext cx="12192000" cy="6858000"/>
+          </a:xfrm>
+          <a:prstGeom prst="rect">
+            <a:avLst/>
+          </a:prstGeom>
+          <a:ln w="12700" cap="flat" cmpd="sng" algn="ctr">
+            <a:noFill/>
+            <a:prstDash val="solid"/>
+            <a:miter lim="800000"/>
+          </a:ln>
+          <a:effectLst/>
+          <a:extLst>
+            <a:ext uri="{91240B29-F687-4F45-9708-019B960494DF}">
+              <a14:hiddenLine xmlns:a14="http://schemas.microsoft.com/office/drawing/2010/main" w="12700" cap="flat" cmpd="sng" algn="ctr">
+                <a:solidFill>
+                  <a:schemeClr val="accent1">
+                    <a:shade val="50000"/>
+                  </a:schemeClr>
+                </a:solidFill>
+                <a:prstDash val="solid"/>
+                <a:miter lim="800000"/>
+              </a14:hiddenLine>
+            </a:ext>
+          </a:extLst>
+        </p:spPr>
+        <p:style>
+          <a:lnRef idx="2">
+            <a:schemeClr val="accent1">
+              <a:shade val="50000"/>
+            </a:schemeClr>
+          </a:lnRef>
+          <a:fillRef idx="1">
+            <a:schemeClr val="accent1"/>
+          </a:fillRef>
+          <a:effectRef idx="0">
+            <a:schemeClr val="accent1"/>
+          </a:effectRef>
+          <a:fontRef idx="minor">
+            <a:schemeClr val="lt1"/>
+          </a:fontRef>
+        </p:style>
+        <p:txBody>
+          <a:bodyPr rtlCol="0" anchor="ctr"/>
+          <a:lstStyle/>
+          <a:p>
+            <a:pPr algn="ctr"/>
+            <a:endParaRPr lang="en-US"/>
+          </a:p>
+        </p:txBody>
+      </p:sp>
+      <p:sp>
+        <p:nvSpPr>
+          <p:cNvPr id="12" name="Rectangle 11">
+            <a:extLst>
+              <a:ext uri="{FF2B5EF4-FFF2-40B4-BE49-F238E27FC236}">
+                <a16:creationId xmlns:a16="http://schemas.microsoft.com/office/drawing/2014/main" id="{E9304FFE-74E9-4316-B822-F35A685E2D09}"/>
+              </a:ext>
+              <a:ext uri="{C183D7F6-B498-43B3-948B-1728B52AA6E4}">
+                <adec:decorative xmlns:adec="http://schemas.microsoft.com/office/drawing/2017/decorative" val="1"/>
+              </a:ext>
+            </a:extLst>
+          </p:cNvPr>
+          <p:cNvSpPr>
+            <a:spLocks noGrp="1" noRot="1" noChangeAspect="1" noMove="1" noResize="1" noEditPoints="1" noAdjustHandles="1" noChangeArrowheads="1" noChangeShapeType="1" noTextEdit="1"/>
+          </p:cNvSpPr>
+          <p:nvPr>
+            <p:extLst>
+              <p:ext uri="{386F3935-93C4-4BCD-93E2-E3B085C9AB24}">
+                <p16:designElem xmlns:p16="http://schemas.microsoft.com/office/powerpoint/2015/main" val="1"/>
+              </p:ext>
+            </p:extLst>
+          </p:nvPr>
+        </p:nvSpPr>
+        <p:spPr>
+          <a:xfrm>
+            <a:off x="0" y="0"/>
+            <a:ext cx="12192000" cy="6858000"/>
+          </a:xfrm>
+          <a:prstGeom prst="rect">
+            <a:avLst/>
+          </a:prstGeom>
+          <a:solidFill>
+            <a:srgbClr val="82766A">
+              <a:alpha val="15000"/>
+            </a:srgbClr>
+          </a:solidFill>
+          <a:ln w="12700" cap="flat" cmpd="sng" algn="ctr">
+            <a:noFill/>
+            <a:prstDash val="solid"/>
+            <a:miter lim="800000"/>
+          </a:ln>
+          <a:effectLst/>
+        </p:spPr>
+        <p:style>
+          <a:lnRef idx="2">
+            <a:schemeClr val="accent1">
+              <a:shade val="50000"/>
+            </a:schemeClr>
+          </a:lnRef>
+          <a:fillRef idx="1">
+            <a:schemeClr val="accent1"/>
+          </a:fillRef>
+          <a:effectRef idx="0">
+            <a:schemeClr val="accent1"/>
+          </a:effectRef>
+          <a:fontRef idx="minor">
+            <a:schemeClr val="lt1"/>
+          </a:fontRef>
+        </p:style>
+        <p:txBody>
+          <a:bodyPr rtlCol="0" anchor="ctr"/>
+          <a:lstStyle/>
+          <a:p>
+            <a:pPr algn="ctr"/>
+            <a:endParaRPr lang="en-US"/>
+          </a:p>
+        </p:txBody>
+      </p:sp>
+      <p:sp>
+        <p:nvSpPr>
+          <p:cNvPr id="2" name="Titre 1">
+            <a:extLst>
+              <a:ext uri="{FF2B5EF4-FFF2-40B4-BE49-F238E27FC236}">
+                <a16:creationId xmlns:a16="http://schemas.microsoft.com/office/drawing/2014/main" id="{0F983E3C-CA4D-BC4B-ED19-45E7D2B5532D}"/>
+              </a:ext>
+            </a:extLst>
+          </p:cNvPr>
+          <p:cNvSpPr>
+            <a:spLocks noGrp="1"/>
+          </p:cNvSpPr>
+          <p:nvPr>
+            <p:ph type="title"/>
+          </p:nvPr>
+        </p:nvSpPr>
+        <p:spPr>
+          <a:xfrm>
+            <a:off x="3820161" y="1786190"/>
+            <a:ext cx="7452636" cy="2101704"/>
+          </a:xfrm>
+        </p:spPr>
+        <p:txBody>
+          <a:bodyPr vert="horz" lIns="91440" tIns="45720" rIns="91440" bIns="45720" rtlCol="0" anchor="b">
+            <a:normAutofit/>
+          </a:bodyPr>
+          <a:lstStyle/>
+          <a:p>
+            <a:pPr algn="ctr">
+              <a:spcBef>
+                <a:spcPct val="0"/>
+              </a:spcBef>
+            </a:pPr>
+            <a:r>
+              <a:rPr lang="en-US" sz="5400" kern="1200" dirty="0">
+                <a:solidFill>
+                  <a:schemeClr val="tx1">
+                    <a:lumMod val="85000"/>
+                    <a:lumOff val="15000"/>
+                  </a:schemeClr>
+                </a:solidFill>
+                <a:latin typeface="Algerian" panose="04020705040A02060702" pitchFamily="82" charset="0"/>
+              </a:rPr>
+              <a:t>La </a:t>
+            </a:r>
+            <a:r>
+              <a:rPr lang="en-US" sz="5400" kern="1200" dirty="0" err="1">
+                <a:solidFill>
+                  <a:schemeClr val="tx1">
+                    <a:lumMod val="85000"/>
+                    <a:lumOff val="15000"/>
+                  </a:schemeClr>
+                </a:solidFill>
+                <a:latin typeface="Algerian" panose="04020705040A02060702" pitchFamily="82" charset="0"/>
+              </a:rPr>
+              <a:t>démonstration</a:t>
+            </a:r>
+            <a:endParaRPr lang="en-US" sz="5400" kern="1200" dirty="0">
+              <a:solidFill>
+                <a:schemeClr val="tx1">
+                  <a:lumMod val="85000"/>
+                  <a:lumOff val="15000"/>
+                </a:schemeClr>
+              </a:solidFill>
+              <a:latin typeface="Algerian" panose="04020705040A02060702" pitchFamily="82" charset="0"/>
+            </a:endParaRPr>
+          </a:p>
+        </p:txBody>
+      </p:sp>
+      <p:pic>
+        <p:nvPicPr>
+          <p:cNvPr id="6" name="Picture 5" descr="Gros plan de l'objectif de l'appareil photo">
+            <a:extLst>
+              <a:ext uri="{FF2B5EF4-FFF2-40B4-BE49-F238E27FC236}">
+                <a16:creationId xmlns:a16="http://schemas.microsoft.com/office/drawing/2014/main" id="{94526DC3-07B2-69CE-C632-A7481C040CF3}"/>
+              </a:ext>
+            </a:extLst>
+          </p:cNvPr>
+          <p:cNvPicPr>
+            <a:picLocks noChangeAspect="1"/>
+          </p:cNvPicPr>
+          <p:nvPr/>
+        </p:nvPicPr>
+        <p:blipFill>
+          <a:blip r:embed="rId2"/>
+          <a:srcRect l="25347" r="39909" b="-1"/>
+          <a:stretch>
+            <a:fillRect/>
+          </a:stretch>
+        </p:blipFill>
+        <p:spPr>
+          <a:xfrm>
+            <a:off x="-7266" y="10"/>
+            <a:ext cx="3569616" cy="6857990"/>
+          </a:xfrm>
+          <a:custGeom>
+            <a:avLst/>
+            <a:gdLst/>
+            <a:ahLst/>
+            <a:cxnLst/>
+            <a:rect l="l" t="t" r="r" b="b"/>
+            <a:pathLst>
+              <a:path w="3569616" h="6858000">
+                <a:moveTo>
+                  <a:pt x="0" y="0"/>
+                </a:moveTo>
+                <a:lnTo>
+                  <a:pt x="3119345" y="0"/>
+                </a:lnTo>
+                <a:lnTo>
+                  <a:pt x="3123529" y="17226"/>
+                </a:lnTo>
+                <a:cubicBezTo>
+                  <a:pt x="3124924" y="23927"/>
+                  <a:pt x="3126075" y="29690"/>
+                  <a:pt x="3127926" y="35733"/>
+                </a:cubicBezTo>
+                <a:cubicBezTo>
+                  <a:pt x="3135983" y="55162"/>
+                  <a:pt x="3152761" y="75163"/>
+                  <a:pt x="3158476" y="86830"/>
+                </a:cubicBezTo>
+                <a:lnTo>
+                  <a:pt x="3162217" y="105744"/>
+                </a:lnTo>
+                <a:lnTo>
+                  <a:pt x="3166997" y="104727"/>
+                </a:lnTo>
+                <a:lnTo>
+                  <a:pt x="3167793" y="111793"/>
+                </a:lnTo>
+                <a:lnTo>
+                  <a:pt x="3168896" y="127609"/>
+                </a:lnTo>
+                <a:cubicBezTo>
+                  <a:pt x="3170241" y="137435"/>
+                  <a:pt x="3170795" y="164972"/>
+                  <a:pt x="3173185" y="174906"/>
+                </a:cubicBezTo>
+                <a:cubicBezTo>
+                  <a:pt x="3178510" y="177461"/>
+                  <a:pt x="3181593" y="181749"/>
+                  <a:pt x="3183238" y="187215"/>
+                </a:cubicBezTo>
+                <a:lnTo>
+                  <a:pt x="3184145" y="199435"/>
+                </a:lnTo>
+                <a:lnTo>
+                  <a:pt x="3200957" y="269529"/>
+                </a:lnTo>
+                <a:lnTo>
+                  <a:pt x="3202491" y="279219"/>
+                </a:lnTo>
+                <a:lnTo>
+                  <a:pt x="3206975" y="284221"/>
+                </a:lnTo>
+                <a:cubicBezTo>
+                  <a:pt x="3208056" y="288198"/>
+                  <a:pt x="3208241" y="299815"/>
+                  <a:pt x="3208979" y="303078"/>
+                </a:cubicBezTo>
+                <a:cubicBezTo>
+                  <a:pt x="3209786" y="303316"/>
+                  <a:pt x="3210593" y="303555"/>
+                  <a:pt x="3211400" y="303794"/>
+                </a:cubicBezTo>
+                <a:cubicBezTo>
+                  <a:pt x="3215834" y="314048"/>
+                  <a:pt x="3230882" y="352723"/>
+                  <a:pt x="3235583" y="364595"/>
+                </a:cubicBezTo>
+                <a:cubicBezTo>
+                  <a:pt x="3232098" y="367263"/>
+                  <a:pt x="3238178" y="372307"/>
+                  <a:pt x="3239601" y="375020"/>
+                </a:cubicBezTo>
+                <a:cubicBezTo>
+                  <a:pt x="3237179" y="375617"/>
+                  <a:pt x="3236854" y="382439"/>
+                  <a:pt x="3239157" y="384290"/>
+                </a:cubicBezTo>
+                <a:cubicBezTo>
+                  <a:pt x="3254070" y="431093"/>
+                  <a:pt x="3227895" y="408920"/>
+                  <a:pt x="3245230" y="435044"/>
+                </a:cubicBezTo>
+                <a:cubicBezTo>
+                  <a:pt x="3246565" y="439781"/>
+                  <a:pt x="3245820" y="443743"/>
+                  <a:pt x="3244204" y="447282"/>
+                </a:cubicBezTo>
+                <a:lnTo>
+                  <a:pt x="3240762" y="452630"/>
+                </a:lnTo>
+                <a:lnTo>
+                  <a:pt x="3249093" y="471880"/>
+                </a:lnTo>
+                <a:cubicBezTo>
+                  <a:pt x="3252174" y="481431"/>
+                  <a:pt x="3254453" y="491548"/>
+                  <a:pt x="3255857" y="501992"/>
+                </a:cubicBezTo>
+                <a:cubicBezTo>
+                  <a:pt x="3250999" y="504682"/>
+                  <a:pt x="3258622" y="512442"/>
+                  <a:pt x="3260271" y="516223"/>
+                </a:cubicBezTo>
+                <a:cubicBezTo>
+                  <a:pt x="3257006" y="516482"/>
+                  <a:pt x="3255973" y="525173"/>
+                  <a:pt x="3258865" y="528038"/>
+                </a:cubicBezTo>
+                <a:cubicBezTo>
+                  <a:pt x="3274535" y="591283"/>
+                  <a:pt x="3241762" y="557303"/>
+                  <a:pt x="3262462" y="594499"/>
+                </a:cubicBezTo>
+                <a:cubicBezTo>
+                  <a:pt x="3263816" y="600863"/>
+                  <a:pt x="3262479" y="605795"/>
+                  <a:pt x="3260024" y="610000"/>
+                </a:cubicBezTo>
+                <a:lnTo>
+                  <a:pt x="3253721" y="617692"/>
+                </a:lnTo>
+                <a:lnTo>
+                  <a:pt x="3256482" y="623204"/>
+                </a:lnTo>
+                <a:cubicBezTo>
+                  <a:pt x="3258005" y="644600"/>
+                  <a:pt x="3251476" y="651376"/>
+                  <a:pt x="3259225" y="663365"/>
+                </a:cubicBezTo>
+                <a:cubicBezTo>
+                  <a:pt x="3245876" y="682744"/>
+                  <a:pt x="3258539" y="675670"/>
+                  <a:pt x="3261631" y="689522"/>
+                </a:cubicBezTo>
+                <a:cubicBezTo>
+                  <a:pt x="3265207" y="700373"/>
+                  <a:pt x="3269507" y="679723"/>
+                  <a:pt x="3271002" y="690492"/>
+                </a:cubicBezTo>
+                <a:cubicBezTo>
+                  <a:pt x="3267989" y="702455"/>
+                  <a:pt x="3279578" y="701125"/>
+                  <a:pt x="3275760" y="713609"/>
+                </a:cubicBezTo>
+                <a:cubicBezTo>
+                  <a:pt x="3266819" y="711239"/>
+                  <a:pt x="3278954" y="737528"/>
+                  <a:pt x="3271356" y="738880"/>
+                </a:cubicBezTo>
+                <a:cubicBezTo>
+                  <a:pt x="3282938" y="748490"/>
+                  <a:pt x="3269788" y="754591"/>
+                  <a:pt x="3274016" y="768139"/>
+                </a:cubicBezTo>
+                <a:cubicBezTo>
+                  <a:pt x="3278559" y="774347"/>
+                  <a:pt x="3279560" y="778980"/>
+                  <a:pt x="3275507" y="785654"/>
+                </a:cubicBezTo>
+                <a:cubicBezTo>
+                  <a:pt x="3297514" y="814181"/>
+                  <a:pt x="3277534" y="803670"/>
+                  <a:pt x="3287024" y="831111"/>
+                </a:cubicBezTo>
+                <a:cubicBezTo>
+                  <a:pt x="3296672" y="854655"/>
+                  <a:pt x="3303659" y="881610"/>
+                  <a:pt x="3324562" y="903604"/>
+                </a:cubicBezTo>
+                <a:cubicBezTo>
+                  <a:pt x="3330338" y="907511"/>
+                  <a:pt x="3333079" y="917872"/>
+                  <a:pt x="3330682" y="926744"/>
+                </a:cubicBezTo>
+                <a:cubicBezTo>
+                  <a:pt x="3330269" y="928269"/>
+                  <a:pt x="3329716" y="929694"/>
+                  <a:pt x="3329041" y="930971"/>
+                </a:cubicBezTo>
+                <a:cubicBezTo>
+                  <a:pt x="3333270" y="950914"/>
+                  <a:pt x="3351150" y="1023696"/>
+                  <a:pt x="3356062" y="1046405"/>
+                </a:cubicBezTo>
+                <a:cubicBezTo>
+                  <a:pt x="3349099" y="1048737"/>
+                  <a:pt x="3362597" y="1059482"/>
+                  <a:pt x="3358521" y="1067217"/>
+                </a:cubicBezTo>
+                <a:cubicBezTo>
+                  <a:pt x="3354869" y="1072807"/>
+                  <a:pt x="3358113" y="1077371"/>
+                  <a:pt x="3358773" y="1082909"/>
+                </a:cubicBezTo>
+                <a:cubicBezTo>
+                  <a:pt x="3356098" y="1090444"/>
+                  <a:pt x="3363241" y="1113953"/>
+                  <a:pt x="3367682" y="1119909"/>
+                </a:cubicBezTo>
+                <a:cubicBezTo>
+                  <a:pt x="3382703" y="1133847"/>
+                  <a:pt x="3374343" y="1168367"/>
+                  <a:pt x="3385911" y="1180009"/>
+                </a:cubicBezTo>
+                <a:cubicBezTo>
+                  <a:pt x="3387774" y="1184389"/>
+                  <a:pt x="3388688" y="1188737"/>
+                  <a:pt x="3389010" y="1193041"/>
+                </a:cubicBezTo>
+                <a:lnTo>
+                  <a:pt x="3388572" y="1205179"/>
+                </a:lnTo>
+                <a:lnTo>
+                  <a:pt x="3385768" y="1208811"/>
+                </a:lnTo>
+                <a:lnTo>
+                  <a:pt x="3386975" y="1216129"/>
+                </a:lnTo>
+                <a:lnTo>
+                  <a:pt x="3386647" y="1218271"/>
+                </a:lnTo>
+                <a:cubicBezTo>
+                  <a:pt x="3386007" y="1222365"/>
+                  <a:pt x="3385480" y="1226399"/>
+                  <a:pt x="3385420" y="1230360"/>
+                </a:cubicBezTo>
+                <a:cubicBezTo>
+                  <a:pt x="3400233" y="1224163"/>
+                  <a:pt x="3387342" y="1263034"/>
+                  <a:pt x="3398902" y="1251303"/>
+                </a:cubicBezTo>
+                <a:cubicBezTo>
+                  <a:pt x="3401143" y="1271991"/>
+                  <a:pt x="3411558" y="1255397"/>
+                  <a:pt x="3402244" y="1281071"/>
+                </a:cubicBezTo>
+                <a:cubicBezTo>
+                  <a:pt x="3416627" y="1312459"/>
+                  <a:pt x="3415183" y="1363554"/>
+                  <a:pt x="3435533" y="1387530"/>
+                </a:cubicBezTo>
+                <a:cubicBezTo>
+                  <a:pt x="3428168" y="1384876"/>
+                  <a:pt x="3423452" y="1398828"/>
+                  <a:pt x="3427595" y="1407995"/>
+                </a:cubicBezTo>
+                <a:cubicBezTo>
+                  <a:pt x="3398778" y="1398886"/>
+                  <a:pt x="3455260" y="1443485"/>
+                  <a:pt x="3436580" y="1453051"/>
+                </a:cubicBezTo>
+                <a:cubicBezTo>
+                  <a:pt x="3454427" y="1452263"/>
+                  <a:pt x="3487273" y="1492392"/>
+                  <a:pt x="3473886" y="1513215"/>
+                </a:cubicBezTo>
+                <a:cubicBezTo>
+                  <a:pt x="3479337" y="1543203"/>
+                  <a:pt x="3495403" y="1563620"/>
+                  <a:pt x="3491486" y="1595707"/>
+                </a:cubicBezTo>
+                <a:cubicBezTo>
+                  <a:pt x="3493932" y="1596530"/>
+                  <a:pt x="3496028" y="1598008"/>
+                  <a:pt x="3497869" y="1599939"/>
+                </a:cubicBezTo>
+                <a:lnTo>
+                  <a:pt x="3502453" y="1606503"/>
+                </a:lnTo>
+                <a:lnTo>
+                  <a:pt x="3502232" y="1607846"/>
+                </a:lnTo>
+                <a:cubicBezTo>
+                  <a:pt x="3502503" y="1613048"/>
+                  <a:pt x="3503673" y="1615641"/>
+                  <a:pt x="3505239" y="1617081"/>
+                </a:cubicBezTo>
+                <a:cubicBezTo>
+                  <a:pt x="3505979" y="1617395"/>
+                  <a:pt x="3506719" y="1617710"/>
+                  <a:pt x="3507459" y="1618024"/>
+                </a:cubicBezTo>
+                <a:lnTo>
+                  <a:pt x="3510011" y="1624022"/>
+                </a:lnTo>
+                <a:lnTo>
+                  <a:pt x="3516358" y="1634929"/>
+                </a:lnTo>
+                <a:lnTo>
+                  <a:pt x="3516308" y="1637821"/>
+                </a:lnTo>
+                <a:lnTo>
+                  <a:pt x="3523955" y="1655598"/>
+                </a:lnTo>
+                <a:lnTo>
+                  <a:pt x="3523473" y="1656247"/>
+                </a:lnTo>
+                <a:cubicBezTo>
+                  <a:pt x="3522567" y="1658107"/>
+                  <a:pt x="3522227" y="1660249"/>
+                  <a:pt x="3523061" y="1663024"/>
+                </a:cubicBezTo>
+                <a:cubicBezTo>
+                  <a:pt x="3513175" y="1664689"/>
+                  <a:pt x="3520280" y="1667013"/>
+                  <a:pt x="3523616" y="1675054"/>
+                </a:cubicBezTo>
+                <a:cubicBezTo>
+                  <a:pt x="3509006" y="1679436"/>
+                  <a:pt x="3523682" y="1698702"/>
+                  <a:pt x="3517630" y="1707801"/>
+                </a:cubicBezTo>
+                <a:cubicBezTo>
+                  <a:pt x="3520410" y="1713612"/>
+                  <a:pt x="3523083" y="1719836"/>
+                  <a:pt x="3525537" y="1726380"/>
+                </a:cubicBezTo>
+                <a:lnTo>
+                  <a:pt x="3529903" y="1779986"/>
+                </a:lnTo>
+                <a:lnTo>
+                  <a:pt x="3521468" y="1836998"/>
+                </a:lnTo>
+                <a:cubicBezTo>
+                  <a:pt x="3522502" y="1857808"/>
+                  <a:pt x="3519191" y="1876110"/>
+                  <a:pt x="3523412" y="1893497"/>
+                </a:cubicBezTo>
+                <a:cubicBezTo>
+                  <a:pt x="3520411" y="1900876"/>
+                  <a:pt x="3519436" y="1907708"/>
+                  <a:pt x="3525004" y="1913894"/>
+                </a:cubicBezTo>
+                <a:cubicBezTo>
+                  <a:pt x="3524490" y="1933413"/>
+                  <a:pt x="3517414" y="1938604"/>
+                  <a:pt x="3523928" y="1950514"/>
+                </a:cubicBezTo>
+                <a:cubicBezTo>
+                  <a:pt x="3512685" y="1962215"/>
+                  <a:pt x="3517275" y="1962555"/>
+                  <a:pt x="3521008" y="1967449"/>
+                </a:cubicBezTo>
+                <a:lnTo>
+                  <a:pt x="3521297" y="1968163"/>
+                </a:lnTo>
+                <a:lnTo>
+                  <a:pt x="3519686" y="1969768"/>
+                </a:lnTo>
+                <a:lnTo>
+                  <a:pt x="3519089" y="1972904"/>
+                </a:lnTo>
+                <a:lnTo>
+                  <a:pt x="3520122" y="1981289"/>
+                </a:lnTo>
+                <a:lnTo>
+                  <a:pt x="3520948" y="1984413"/>
+                </a:lnTo>
+                <a:cubicBezTo>
+                  <a:pt x="3521356" y="1986575"/>
+                  <a:pt x="3521416" y="1988026"/>
+                  <a:pt x="3521226" y="1989046"/>
+                </a:cubicBezTo>
+                <a:lnTo>
+                  <a:pt x="3521092" y="1989171"/>
+                </a:lnTo>
+                <a:lnTo>
+                  <a:pt x="3521624" y="1993492"/>
+                </a:lnTo>
+                <a:cubicBezTo>
+                  <a:pt x="3522844" y="2000762"/>
+                  <a:pt x="3524332" y="2007819"/>
+                  <a:pt x="3525996" y="2014518"/>
+                </a:cubicBezTo>
+                <a:cubicBezTo>
+                  <a:pt x="3518529" y="2020777"/>
+                  <a:pt x="3529333" y="2045218"/>
+                  <a:pt x="3514412" y="2043465"/>
+                </a:cubicBezTo>
+                <a:cubicBezTo>
+                  <a:pt x="3516219" y="2052531"/>
+                  <a:pt x="3522688" y="2057653"/>
+                  <a:pt x="3512822" y="2055222"/>
+                </a:cubicBezTo>
+                <a:cubicBezTo>
+                  <a:pt x="3513140" y="2058224"/>
+                  <a:pt x="3512432" y="2060136"/>
+                  <a:pt x="3511227" y="2061550"/>
+                </a:cubicBezTo>
+                <a:lnTo>
+                  <a:pt x="3510645" y="2061975"/>
+                </a:lnTo>
+                <a:lnTo>
+                  <a:pt x="3514907" y="2082129"/>
+                </a:lnTo>
+                <a:lnTo>
+                  <a:pt x="3514347" y="2084880"/>
+                </a:lnTo>
+                <a:lnTo>
+                  <a:pt x="3518565" y="2097919"/>
+                </a:lnTo>
+                <a:lnTo>
+                  <a:pt x="3519976" y="2104707"/>
+                </a:lnTo>
+                <a:lnTo>
+                  <a:pt x="3521958" y="2106519"/>
+                </a:lnTo>
+                <a:cubicBezTo>
+                  <a:pt x="3523219" y="2108534"/>
+                  <a:pt x="3523895" y="2111498"/>
+                  <a:pt x="3523237" y="2116590"/>
+                </a:cubicBezTo>
+                <a:lnTo>
+                  <a:pt x="3522786" y="2117790"/>
+                </a:lnTo>
+                <a:lnTo>
+                  <a:pt x="3526064" y="2125947"/>
+                </a:lnTo>
+                <a:cubicBezTo>
+                  <a:pt x="3527505" y="2128548"/>
+                  <a:pt x="3529274" y="2130818"/>
+                  <a:pt x="3531495" y="2132603"/>
+                </a:cubicBezTo>
+                <a:cubicBezTo>
+                  <a:pt x="3522034" y="2161762"/>
+                  <a:pt x="3533978" y="2187874"/>
+                  <a:pt x="3533955" y="2218836"/>
+                </a:cubicBezTo>
+                <a:cubicBezTo>
+                  <a:pt x="3517312" y="2233337"/>
+                  <a:pt x="3542024" y="2285180"/>
+                  <a:pt x="3559442" y="2291697"/>
+                </a:cubicBezTo>
+                <a:cubicBezTo>
+                  <a:pt x="3544608" y="2292866"/>
+                  <a:pt x="3567228" y="2330146"/>
+                  <a:pt x="3568373" y="2340076"/>
+                </a:cubicBezTo>
+                <a:cubicBezTo>
+                  <a:pt x="3568755" y="2343387"/>
+                  <a:pt x="3566751" y="2343658"/>
+                  <a:pt x="3560178" y="2338540"/>
+                </a:cubicBezTo>
+                <a:cubicBezTo>
+                  <a:pt x="3562571" y="2349015"/>
+                  <a:pt x="3555536" y="2360463"/>
+                  <a:pt x="3548875" y="2354921"/>
+                </a:cubicBezTo>
+                <a:cubicBezTo>
+                  <a:pt x="3564342" y="2386191"/>
+                  <a:pt x="3553912" y="2434573"/>
+                  <a:pt x="3562290" y="2470516"/>
+                </a:cubicBezTo>
+                <a:cubicBezTo>
+                  <a:pt x="3548732" y="2491328"/>
+                  <a:pt x="3561750" y="2479665"/>
+                  <a:pt x="3560263" y="2500409"/>
+                </a:cubicBezTo>
+                <a:cubicBezTo>
+                  <a:pt x="3573531" y="2493872"/>
+                  <a:pt x="3554177" y="2525877"/>
+                  <a:pt x="3569616" y="2525972"/>
+                </a:cubicBezTo>
+                <a:cubicBezTo>
+                  <a:pt x="3568857" y="2529744"/>
+                  <a:pt x="3567635" y="2533395"/>
+                  <a:pt x="3566291" y="2537057"/>
+                </a:cubicBezTo>
+                <a:lnTo>
+                  <a:pt x="3565595" y="2538979"/>
+                </a:lnTo>
+                <a:lnTo>
+                  <a:pt x="3565471" y="2546483"/>
+                </a:lnTo>
+                <a:lnTo>
+                  <a:pt x="3562111" y="2548822"/>
+                </a:lnTo>
+                <a:lnTo>
+                  <a:pt x="3559542" y="2560277"/>
+                </a:lnTo>
+                <a:cubicBezTo>
+                  <a:pt x="3559093" y="2564534"/>
+                  <a:pt x="3559212" y="2569074"/>
+                  <a:pt x="3560240" y="2574030"/>
+                </a:cubicBezTo>
+                <a:cubicBezTo>
+                  <a:pt x="3567097" y="2585933"/>
+                  <a:pt x="3560828" y="2605604"/>
+                  <a:pt x="3562359" y="2622912"/>
+                </a:cubicBezTo>
+                <a:lnTo>
+                  <a:pt x="3564740" y="2630748"/>
+                </a:lnTo>
+                <a:lnTo>
+                  <a:pt x="3563214" y="2656947"/>
+                </a:lnTo>
+                <a:cubicBezTo>
+                  <a:pt x="3563065" y="2664385"/>
+                  <a:pt x="3563222" y="2672085"/>
+                  <a:pt x="3563949" y="2680153"/>
+                </a:cubicBezTo>
+                <a:lnTo>
+                  <a:pt x="3566383" y="2695058"/>
+                </a:lnTo>
+                <a:lnTo>
+                  <a:pt x="3565385" y="2699075"/>
+                </a:lnTo>
+                <a:cubicBezTo>
+                  <a:pt x="3565951" y="2705917"/>
+                  <a:pt x="3570892" y="2714690"/>
+                  <a:pt x="3565525" y="2714239"/>
+                </a:cubicBezTo>
+                <a:lnTo>
+                  <a:pt x="3567847" y="2721812"/>
+                </a:lnTo>
+                <a:lnTo>
+                  <a:pt x="3564077" y="2729693"/>
+                </a:lnTo>
+                <a:cubicBezTo>
+                  <a:pt x="3563144" y="2730592"/>
+                  <a:pt x="3562134" y="2731288"/>
+                  <a:pt x="3561085" y="2731758"/>
+                </a:cubicBezTo>
+                <a:lnTo>
+                  <a:pt x="3563149" y="2742418"/>
+                </a:lnTo>
+                <a:lnTo>
+                  <a:pt x="3560661" y="2751437"/>
+                </a:lnTo>
+                <a:lnTo>
+                  <a:pt x="3563126" y="2758989"/>
+                </a:lnTo>
+                <a:lnTo>
+                  <a:pt x="3562876" y="2762207"/>
+                </a:lnTo>
+                <a:lnTo>
+                  <a:pt x="3561866" y="2770236"/>
+                </a:lnTo>
+                <a:cubicBezTo>
+                  <a:pt x="3561066" y="2774372"/>
+                  <a:pt x="3560080" y="2779005"/>
+                  <a:pt x="3559378" y="2784138"/>
+                </a:cubicBezTo>
+                <a:lnTo>
+                  <a:pt x="3559178" y="2788436"/>
+                </a:lnTo>
+                <a:lnTo>
+                  <a:pt x="3554648" y="2798068"/>
+                </a:lnTo>
+                <a:cubicBezTo>
+                  <a:pt x="3551209" y="2805087"/>
+                  <a:pt x="3548936" y="2810580"/>
+                  <a:pt x="3551400" y="2816345"/>
+                </a:cubicBezTo>
+                <a:cubicBezTo>
+                  <a:pt x="3547036" y="2826742"/>
+                  <a:pt x="3533490" y="2834711"/>
+                  <a:pt x="3538128" y="2849028"/>
+                </a:cubicBezTo>
+                <a:cubicBezTo>
+                  <a:pt x="3531517" y="2845031"/>
+                  <a:pt x="3538369" y="2865256"/>
+                  <a:pt x="3532013" y="2868126"/>
+                </a:cubicBezTo>
+                <a:cubicBezTo>
+                  <a:pt x="3526842" y="2869601"/>
+                  <a:pt x="3527715" y="2876080"/>
+                  <a:pt x="3526094" y="2881167"/>
+                </a:cubicBezTo>
+                <a:cubicBezTo>
+                  <a:pt x="3520961" y="2885059"/>
+                  <a:pt x="3517628" y="2910333"/>
+                  <a:pt x="3518939" y="2918966"/>
+                </a:cubicBezTo>
+                <a:cubicBezTo>
+                  <a:pt x="3525789" y="2943088"/>
+                  <a:pt x="3505468" y="2964225"/>
+                  <a:pt x="3510391" y="2983548"/>
+                </a:cubicBezTo>
+                <a:cubicBezTo>
+                  <a:pt x="3510204" y="2988707"/>
+                  <a:pt x="3509257" y="2993036"/>
+                  <a:pt x="3507840" y="2996827"/>
+                </a:cubicBezTo>
+                <a:lnTo>
+                  <a:pt x="3502741" y="3006379"/>
+                </a:lnTo>
+                <a:lnTo>
+                  <a:pt x="3499028" y="3006971"/>
+                </a:lnTo>
+                <a:lnTo>
+                  <a:pt x="3497157" y="3013976"/>
+                </a:lnTo>
+                <a:lnTo>
+                  <a:pt x="3496053" y="3015450"/>
+                </a:lnTo>
+                <a:cubicBezTo>
+                  <a:pt x="3493931" y="3018255"/>
+                  <a:pt x="3491925" y="3021106"/>
+                  <a:pt x="3490329" y="3024292"/>
+                </a:cubicBezTo>
+                <a:cubicBezTo>
+                  <a:pt x="3504872" y="3031782"/>
+                  <a:pt x="3479143" y="3052632"/>
+                  <a:pt x="3493186" y="3052840"/>
+                </a:cubicBezTo>
+                <a:cubicBezTo>
+                  <a:pt x="3486942" y="3071654"/>
+                  <a:pt x="3501947" y="3066916"/>
+                  <a:pt x="3484298" y="3080007"/>
+                </a:cubicBezTo>
+                <a:cubicBezTo>
+                  <a:pt x="3483814" y="3117860"/>
+                  <a:pt x="3462683" y="3158406"/>
+                  <a:pt x="3469977" y="3195253"/>
+                </a:cubicBezTo>
+                <a:cubicBezTo>
+                  <a:pt x="3464984" y="3186842"/>
+                  <a:pt x="3455676" y="3194249"/>
+                  <a:pt x="3455490" y="3205255"/>
+                </a:cubicBezTo>
+                <a:cubicBezTo>
+                  <a:pt x="3435461" y="3173385"/>
+                  <a:pt x="3464274" y="3257718"/>
+                  <a:pt x="3445250" y="3249703"/>
+                </a:cubicBezTo>
+                <a:cubicBezTo>
+                  <a:pt x="3460163" y="3264187"/>
+                  <a:pt x="3471377" y="3324835"/>
+                  <a:pt x="3452291" y="3330508"/>
+                </a:cubicBezTo>
+                <a:cubicBezTo>
+                  <a:pt x="3445043" y="3359645"/>
+                  <a:pt x="3450218" y="3389952"/>
+                  <a:pt x="3434486" y="3412864"/>
+                </a:cubicBezTo>
+                <a:cubicBezTo>
+                  <a:pt x="3436166" y="3415609"/>
+                  <a:pt x="3437306" y="3418595"/>
+                  <a:pt x="3438058" y="3421734"/>
+                </a:cubicBezTo>
+                <a:lnTo>
+                  <a:pt x="3439245" y="3430986"/>
+                </a:lnTo>
+                <a:lnTo>
+                  <a:pt x="3438541" y="3431897"/>
+                </a:lnTo>
+                <a:cubicBezTo>
+                  <a:pt x="3436732" y="3436375"/>
+                  <a:pt x="3436677" y="3439488"/>
+                  <a:pt x="3437396" y="3441992"/>
+                </a:cubicBezTo>
+                <a:lnTo>
+                  <a:pt x="3438843" y="3444647"/>
+                </a:lnTo>
+                <a:lnTo>
+                  <a:pt x="3438591" y="3451712"/>
+                </a:lnTo>
+                <a:lnTo>
+                  <a:pt x="3439527" y="3466008"/>
+                </a:lnTo>
+                <a:lnTo>
+                  <a:pt x="3438357" y="3468331"/>
+                </a:lnTo>
+                <a:lnTo>
+                  <a:pt x="3437674" y="3489343"/>
+                </a:lnTo>
+                <a:cubicBezTo>
+                  <a:pt x="3437459" y="3489383"/>
+                  <a:pt x="3437241" y="3489424"/>
+                  <a:pt x="3437026" y="3489465"/>
+                </a:cubicBezTo>
+                <a:cubicBezTo>
+                  <a:pt x="3435558" y="3490219"/>
+                  <a:pt x="3434444" y="3491679"/>
+                  <a:pt x="3434044" y="3494659"/>
+                </a:cubicBezTo>
+                <a:cubicBezTo>
+                  <a:pt x="3425302" y="3487640"/>
+                  <a:pt x="3430211" y="3495561"/>
+                  <a:pt x="3429800" y="3504965"/>
+                </a:cubicBezTo>
+                <a:cubicBezTo>
+                  <a:pt x="3416132" y="3496161"/>
+                  <a:pt x="3420620" y="3524348"/>
+                  <a:pt x="3412115" y="3526661"/>
+                </a:cubicBezTo>
+                <a:cubicBezTo>
+                  <a:pt x="3412121" y="3533765"/>
+                  <a:pt x="3411879" y="3541120"/>
+                  <a:pt x="3411331" y="3548549"/>
+                </a:cubicBezTo>
+                <a:lnTo>
+                  <a:pt x="3410824" y="3552872"/>
+                </a:lnTo>
+                <a:cubicBezTo>
+                  <a:pt x="3410773" y="3552889"/>
+                  <a:pt x="3410721" y="3552908"/>
+                  <a:pt x="3410671" y="3552926"/>
+                </a:cubicBezTo>
+                <a:cubicBezTo>
+                  <a:pt x="3410254" y="3553793"/>
+                  <a:pt x="3409971" y="3555188"/>
+                  <a:pt x="3409849" y="3557419"/>
+                </a:cubicBezTo>
+                <a:lnTo>
+                  <a:pt x="3409902" y="3560756"/>
+                </a:lnTo>
+                <a:lnTo>
+                  <a:pt x="3408918" y="3569144"/>
+                </a:lnTo>
+                <a:lnTo>
+                  <a:pt x="3407623" y="3571810"/>
+                </a:lnTo>
+                <a:lnTo>
+                  <a:pt x="3405729" y="3572549"/>
+                </a:lnTo>
+                <a:lnTo>
+                  <a:pt x="3405835" y="3573359"/>
+                </a:lnTo>
+                <a:cubicBezTo>
+                  <a:pt x="3408214" y="3579757"/>
+                  <a:pt x="3412465" y="3582275"/>
+                  <a:pt x="3399129" y="3587902"/>
+                </a:cubicBezTo>
+                <a:cubicBezTo>
+                  <a:pt x="3402495" y="3602236"/>
+                  <a:pt x="3394605" y="3603730"/>
+                  <a:pt x="3389566" y="3621859"/>
+                </a:cubicBezTo>
+                <a:cubicBezTo>
+                  <a:pt x="3393374" y="3630350"/>
+                  <a:pt x="3390863" y="3636316"/>
+                  <a:pt x="3386307" y="3641820"/>
+                </a:cubicBezTo>
+                <a:cubicBezTo>
+                  <a:pt x="3386232" y="3660214"/>
+                  <a:pt x="3378837" y="3675854"/>
+                  <a:pt x="3374956" y="3695940"/>
+                </a:cubicBezTo>
+                <a:cubicBezTo>
+                  <a:pt x="3378387" y="3718839"/>
+                  <a:pt x="3365817" y="3728358"/>
+                  <a:pt x="3361718" y="3749831"/>
+                </a:cubicBezTo>
+                <a:cubicBezTo>
+                  <a:pt x="3370064" y="3770267"/>
+                  <a:pt x="3350403" y="3763879"/>
+                  <a:pt x="3344768" y="3774338"/>
+                </a:cubicBezTo>
+                <a:lnTo>
+                  <a:pt x="3343985" y="3777418"/>
+                </a:lnTo>
+                <a:lnTo>
+                  <a:pt x="3344520" y="3785849"/>
+                </a:lnTo>
+                <a:lnTo>
+                  <a:pt x="3345162" y="3789023"/>
+                </a:lnTo>
+                <a:cubicBezTo>
+                  <a:pt x="3345441" y="3791209"/>
+                  <a:pt x="3345415" y="3792659"/>
+                  <a:pt x="3345164" y="3793659"/>
+                </a:cubicBezTo>
+                <a:lnTo>
+                  <a:pt x="3345024" y="3793774"/>
+                </a:lnTo>
+                <a:lnTo>
+                  <a:pt x="3345300" y="3798119"/>
+                </a:lnTo>
+                <a:cubicBezTo>
+                  <a:pt x="3346087" y="3805456"/>
+                  <a:pt x="3347157" y="3812596"/>
+                  <a:pt x="3348424" y="3819398"/>
+                </a:cubicBezTo>
+                <a:cubicBezTo>
+                  <a:pt x="3340590" y="3825065"/>
+                  <a:pt x="3349940" y="3850234"/>
+                  <a:pt x="3335133" y="3847354"/>
+                </a:cubicBezTo>
+                <a:cubicBezTo>
+                  <a:pt x="3336403" y="3856524"/>
+                  <a:pt x="3342565" y="3862118"/>
+                  <a:pt x="3332848" y="3858945"/>
+                </a:cubicBezTo>
+                <a:cubicBezTo>
+                  <a:pt x="3332988" y="3861961"/>
+                  <a:pt x="3332168" y="3863811"/>
+                  <a:pt x="3330878" y="3865128"/>
+                </a:cubicBezTo>
+                <a:lnTo>
+                  <a:pt x="3330273" y="3865510"/>
+                </a:lnTo>
+                <a:lnTo>
+                  <a:pt x="3333337" y="3885908"/>
+                </a:lnTo>
+                <a:lnTo>
+                  <a:pt x="3332616" y="3888608"/>
+                </a:lnTo>
+                <a:lnTo>
+                  <a:pt x="3336057" y="3901916"/>
+                </a:lnTo>
+                <a:lnTo>
+                  <a:pt x="3337066" y="3908785"/>
+                </a:lnTo>
+                <a:lnTo>
+                  <a:pt x="3338940" y="3910739"/>
+                </a:lnTo>
+                <a:cubicBezTo>
+                  <a:pt x="3340082" y="3912843"/>
+                  <a:pt x="3340580" y="3915849"/>
+                  <a:pt x="3339621" y="3920873"/>
+                </a:cubicBezTo>
+                <a:lnTo>
+                  <a:pt x="3339102" y="3922032"/>
+                </a:lnTo>
+                <a:lnTo>
+                  <a:pt x="3341891" y="3930408"/>
+                </a:lnTo>
+                <a:cubicBezTo>
+                  <a:pt x="3343178" y="3933107"/>
+                  <a:pt x="3344812" y="3935503"/>
+                  <a:pt x="3346927" y="3937451"/>
+                </a:cubicBezTo>
+                <a:cubicBezTo>
+                  <a:pt x="3335745" y="3965779"/>
+                  <a:pt x="3346136" y="3992699"/>
+                  <a:pt x="3344279" y="4023542"/>
+                </a:cubicBezTo>
+                <a:cubicBezTo>
+                  <a:pt x="3347024" y="4058096"/>
+                  <a:pt x="3350783" y="4081986"/>
+                  <a:pt x="3351926" y="4104769"/>
+                </a:cubicBezTo>
+                <a:cubicBezTo>
+                  <a:pt x="3353695" y="4115384"/>
+                  <a:pt x="3359144" y="4193344"/>
+                  <a:pt x="3352816" y="4187317"/>
+                </a:cubicBezTo>
+                <a:cubicBezTo>
+                  <a:pt x="3366419" y="4219638"/>
+                  <a:pt x="3351446" y="4239971"/>
+                  <a:pt x="3357691" y="4276413"/>
+                </a:cubicBezTo>
+                <a:cubicBezTo>
+                  <a:pt x="3342910" y="4296116"/>
+                  <a:pt x="3356610" y="4285488"/>
+                  <a:pt x="3353895" y="4306037"/>
+                </a:cubicBezTo>
+                <a:cubicBezTo>
+                  <a:pt x="3367541" y="4300534"/>
+                  <a:pt x="3346306" y="4330948"/>
+                  <a:pt x="3361728" y="4332215"/>
+                </a:cubicBezTo>
+                <a:cubicBezTo>
+                  <a:pt x="3360746" y="4335915"/>
+                  <a:pt x="3359307" y="4339458"/>
+                  <a:pt x="3357748" y="4343006"/>
+                </a:cubicBezTo>
+                <a:lnTo>
+                  <a:pt x="3356941" y="4344866"/>
+                </a:lnTo>
+                <a:lnTo>
+                  <a:pt x="3356370" y="4352332"/>
+                </a:lnTo>
+                <a:lnTo>
+                  <a:pt x="3352876" y="4354407"/>
+                </a:lnTo>
+                <a:lnTo>
+                  <a:pt x="3352683" y="4444689"/>
+                </a:lnTo>
+                <a:cubicBezTo>
+                  <a:pt x="3355485" y="4452425"/>
+                  <a:pt x="3356736" y="4477980"/>
+                  <a:pt x="3352455" y="4483791"/>
+                </a:cubicBezTo>
+                <a:cubicBezTo>
+                  <a:pt x="3351784" y="4489320"/>
+                  <a:pt x="3353780" y="4495171"/>
+                  <a:pt x="3349030" y="4498683"/>
+                </a:cubicBezTo>
+                <a:cubicBezTo>
+                  <a:pt x="3346858" y="4510741"/>
+                  <a:pt x="3341860" y="4538358"/>
+                  <a:pt x="3339427" y="4556140"/>
+                </a:cubicBezTo>
+                <a:cubicBezTo>
+                  <a:pt x="3342836" y="4560659"/>
+                  <a:pt x="3341611" y="4566842"/>
+                  <a:pt x="3339521" y="4574959"/>
+                </a:cubicBezTo>
+                <a:lnTo>
+                  <a:pt x="3338246" y="4582576"/>
+                </a:lnTo>
+                <a:lnTo>
+                  <a:pt x="3348539" y="4605460"/>
+                </a:lnTo>
+                <a:lnTo>
+                  <a:pt x="3345760" y="4678575"/>
+                </a:lnTo>
+                <a:lnTo>
+                  <a:pt x="3356250" y="4713574"/>
+                </a:lnTo>
+                <a:cubicBezTo>
+                  <a:pt x="3358600" y="4727943"/>
+                  <a:pt x="3359577" y="4741820"/>
+                  <a:pt x="3361380" y="4755215"/>
+                </a:cubicBezTo>
+                <a:cubicBezTo>
+                  <a:pt x="3363928" y="4785596"/>
+                  <a:pt x="3347531" y="4766123"/>
+                  <a:pt x="3361636" y="4803525"/>
+                </a:cubicBezTo>
+                <a:cubicBezTo>
+                  <a:pt x="3356254" y="4807867"/>
+                  <a:pt x="3356117" y="4812705"/>
+                  <a:pt x="3358957" y="4820729"/>
+                </a:cubicBezTo>
+                <a:cubicBezTo>
+                  <a:pt x="3359783" y="4835507"/>
+                  <a:pt x="3345952" y="4834947"/>
+                  <a:pt x="3354635" y="4849546"/>
+                </a:cubicBezTo>
+                <a:cubicBezTo>
+                  <a:pt x="3350894" y="4848362"/>
+                  <a:pt x="3350351" y="4855411"/>
+                  <a:pt x="3349759" y="4861941"/>
+                </a:cubicBezTo>
+                <a:lnTo>
+                  <a:pt x="3347368" y="4866228"/>
+                </a:lnTo>
+                <a:lnTo>
+                  <a:pt x="3358408" y="4889535"/>
+                </a:lnTo>
+                <a:cubicBezTo>
+                  <a:pt x="3373705" y="4931282"/>
+                  <a:pt x="3382233" y="4982216"/>
+                  <a:pt x="3393319" y="5017998"/>
+                </a:cubicBezTo>
+                <a:cubicBezTo>
+                  <a:pt x="3368256" y="5040241"/>
+                  <a:pt x="3392200" y="5029364"/>
+                  <a:pt x="3389184" y="5055049"/>
+                </a:cubicBezTo>
+                <a:cubicBezTo>
+                  <a:pt x="3413510" y="5050695"/>
+                  <a:pt x="3377700" y="5085342"/>
+                  <a:pt x="3405892" y="5089973"/>
+                </a:cubicBezTo>
+                <a:cubicBezTo>
+                  <a:pt x="3404451" y="5094499"/>
+                  <a:pt x="3402165" y="5098741"/>
+                  <a:pt x="3399662" y="5102960"/>
+                </a:cubicBezTo>
+                <a:lnTo>
+                  <a:pt x="3398363" y="5105176"/>
+                </a:lnTo>
+                <a:lnTo>
+                  <a:pt x="3398026" y="5114590"/>
+                </a:lnTo>
+                <a:lnTo>
+                  <a:pt x="3391859" y="5116550"/>
+                </a:lnTo>
+                <a:lnTo>
+                  <a:pt x="3386999" y="5130226"/>
+                </a:lnTo>
+                <a:cubicBezTo>
+                  <a:pt x="3386119" y="5135455"/>
+                  <a:pt x="3386267" y="5141205"/>
+                  <a:pt x="3388073" y="5147747"/>
+                </a:cubicBezTo>
+                <a:cubicBezTo>
+                  <a:pt x="3400425" y="5164741"/>
+                  <a:pt x="3388688" y="5187675"/>
+                  <a:pt x="3391234" y="5209919"/>
+                </a:cubicBezTo>
+                <a:lnTo>
+                  <a:pt x="3395469" y="5220481"/>
+                </a:lnTo>
+                <a:lnTo>
+                  <a:pt x="3392518" y="5250830"/>
+                </a:lnTo>
+                <a:lnTo>
+                  <a:pt x="3393800" y="5252877"/>
+                </a:lnTo>
+                <a:cubicBezTo>
+                  <a:pt x="3393941" y="5258188"/>
+                  <a:pt x="3392357" y="5268832"/>
+                  <a:pt x="3393361" y="5282697"/>
+                </a:cubicBezTo>
+                <a:lnTo>
+                  <a:pt x="3399825" y="5336059"/>
+                </a:lnTo>
+                <a:lnTo>
+                  <a:pt x="3392824" y="5344884"/>
+                </a:lnTo>
+                <a:lnTo>
+                  <a:pt x="3389277" y="5345998"/>
+                </a:lnTo>
+                <a:lnTo>
+                  <a:pt x="3390946" y="5360636"/>
+                </a:lnTo>
+                <a:lnTo>
+                  <a:pt x="3386366" y="5371486"/>
+                </a:lnTo>
+                <a:lnTo>
+                  <a:pt x="3390662" y="5381496"/>
+                </a:lnTo>
+                <a:lnTo>
+                  <a:pt x="3388199" y="5395290"/>
+                </a:lnTo>
+                <a:cubicBezTo>
+                  <a:pt x="3386677" y="5400263"/>
+                  <a:pt x="3384810" y="5405812"/>
+                  <a:pt x="3383455" y="5412069"/>
+                </a:cubicBezTo>
+                <a:lnTo>
+                  <a:pt x="3376345" y="5426008"/>
+                </a:lnTo>
+                <a:lnTo>
+                  <a:pt x="3374012" y="5448470"/>
+                </a:lnTo>
+                <a:cubicBezTo>
+                  <a:pt x="3372358" y="5465848"/>
+                  <a:pt x="3370199" y="5482458"/>
+                  <a:pt x="3365299" y="5498771"/>
+                </a:cubicBezTo>
+                <a:cubicBezTo>
+                  <a:pt x="3368242" y="5512292"/>
+                  <a:pt x="3368289" y="5524931"/>
+                  <a:pt x="3358774" y="5536815"/>
+                </a:cubicBezTo>
+                <a:cubicBezTo>
+                  <a:pt x="3355554" y="5573082"/>
+                  <a:pt x="3364982" y="5582256"/>
+                  <a:pt x="3352897" y="5604851"/>
+                </a:cubicBezTo>
+                <a:cubicBezTo>
+                  <a:pt x="3357655" y="5611851"/>
+                  <a:pt x="3360065" y="5616619"/>
+                  <a:pt x="3360918" y="5620215"/>
+                </a:cubicBezTo>
+                <a:cubicBezTo>
+                  <a:pt x="3363482" y="5631010"/>
+                  <a:pt x="3352061" y="5631235"/>
+                  <a:pt x="3348145" y="5649365"/>
+                </a:cubicBezTo>
+                <a:cubicBezTo>
+                  <a:pt x="3342329" y="5668683"/>
+                  <a:pt x="3336842" y="5635583"/>
+                  <a:pt x="3334135" y="5654076"/>
+                </a:cubicBezTo>
+                <a:cubicBezTo>
+                  <a:pt x="3338089" y="5673079"/>
+                  <a:pt x="3320876" y="5674673"/>
+                  <a:pt x="3326011" y="5694285"/>
+                </a:cubicBezTo>
+                <a:cubicBezTo>
+                  <a:pt x="3339441" y="5687377"/>
+                  <a:pt x="3320185" y="5735320"/>
+                  <a:pt x="3331448" y="5735077"/>
+                </a:cubicBezTo>
+                <a:cubicBezTo>
+                  <a:pt x="3313758" y="5754960"/>
+                  <a:pt x="3333086" y="5760823"/>
+                  <a:pt x="3326180" y="5784860"/>
+                </a:cubicBezTo>
+                <a:cubicBezTo>
+                  <a:pt x="3319129" y="5796737"/>
+                  <a:pt x="3317432" y="5804806"/>
+                  <a:pt x="3323175" y="5814629"/>
+                </a:cubicBezTo>
+                <a:cubicBezTo>
+                  <a:pt x="3289103" y="5869565"/>
+                  <a:pt x="3319352" y="5845410"/>
+                  <a:pt x="3303983" y="5894405"/>
+                </a:cubicBezTo>
+                <a:lnTo>
+                  <a:pt x="3302615" y="5898375"/>
+                </a:lnTo>
+                <a:lnTo>
+                  <a:pt x="3305988" y="5914019"/>
+                </a:lnTo>
+                <a:cubicBezTo>
+                  <a:pt x="3306566" y="5914416"/>
+                  <a:pt x="3307142" y="5914813"/>
+                  <a:pt x="3307720" y="5915209"/>
+                </a:cubicBezTo>
+                <a:lnTo>
+                  <a:pt x="3288942" y="5962966"/>
+                </a:lnTo>
+                <a:lnTo>
+                  <a:pt x="3289995" y="5969791"/>
+                </a:lnTo>
+                <a:lnTo>
+                  <a:pt x="3273219" y="6000303"/>
+                </a:lnTo>
+                <a:lnTo>
+                  <a:pt x="3266971" y="6016394"/>
+                </a:lnTo>
+                <a:lnTo>
+                  <a:pt x="3258268" y="6034498"/>
+                </a:lnTo>
+                <a:lnTo>
+                  <a:pt x="3262376" y="6046147"/>
+                </a:lnTo>
+                <a:cubicBezTo>
+                  <a:pt x="3269023" y="6073717"/>
+                  <a:pt x="3250846" y="6118951"/>
+                  <a:pt x="3274161" y="6127097"/>
+                </a:cubicBezTo>
+                <a:cubicBezTo>
+                  <a:pt x="3261055" y="6140796"/>
+                  <a:pt x="3284255" y="6151240"/>
+                  <a:pt x="3287116" y="6165061"/>
+                </a:cubicBezTo>
+                <a:cubicBezTo>
+                  <a:pt x="3278972" y="6176795"/>
+                  <a:pt x="3286959" y="6181809"/>
+                  <a:pt x="3289289" y="6191816"/>
+                </a:cubicBezTo>
+                <a:cubicBezTo>
+                  <a:pt x="3284123" y="6196765"/>
+                  <a:pt x="3284941" y="6205311"/>
+                  <a:pt x="3291517" y="6207797"/>
+                </a:cubicBezTo>
+                <a:cubicBezTo>
+                  <a:pt x="3306003" y="6202672"/>
+                  <a:pt x="3300501" y="6232914"/>
+                  <a:pt x="3310808" y="6234442"/>
+                </a:cubicBezTo>
+                <a:cubicBezTo>
+                  <a:pt x="3314005" y="6251566"/>
+                  <a:pt x="3305763" y="6327405"/>
+                  <a:pt x="3322832" y="6339012"/>
+                </a:cubicBezTo>
+                <a:cubicBezTo>
+                  <a:pt x="3332735" y="6373401"/>
+                  <a:pt x="3309981" y="6425589"/>
+                  <a:pt x="3311360" y="6440393"/>
+                </a:cubicBezTo>
+                <a:cubicBezTo>
+                  <a:pt x="3282540" y="6457108"/>
+                  <a:pt x="3365374" y="6523495"/>
+                  <a:pt x="3370963" y="6586374"/>
+                </a:cubicBezTo>
+                <a:cubicBezTo>
+                  <a:pt x="3368621" y="6595055"/>
+                  <a:pt x="3368943" y="6599590"/>
+                  <a:pt x="3375863" y="6601412"/>
+                </a:cubicBezTo>
+                <a:cubicBezTo>
+                  <a:pt x="3380798" y="6617525"/>
+                  <a:pt x="3389212" y="6649404"/>
+                  <a:pt x="3400578" y="6683057"/>
+                </a:cubicBezTo>
+                <a:cubicBezTo>
+                  <a:pt x="3408645" y="6705148"/>
+                  <a:pt x="3410628" y="6805370"/>
+                  <a:pt x="3417831" y="6852700"/>
+                </a:cubicBezTo>
+                <a:lnTo>
+                  <a:pt x="3418926" y="6858000"/>
+                </a:lnTo>
+                <a:lnTo>
+                  <a:pt x="0" y="6858000"/>
+                </a:lnTo>
+                <a:close/>
+              </a:path>
+            </a:pathLst>
+          </a:custGeom>
+        </p:spPr>
+      </p:pic>
+    </p:spTree>
+    <p:extLst>
+      <p:ext uri="{BB962C8B-B14F-4D97-AF65-F5344CB8AC3E}">
+        <p14:creationId xmlns:p14="http://schemas.microsoft.com/office/powerpoint/2010/main" val="659029457"/>
+      </p:ext>
+    </p:extLst>
+  </p:cSld>
+  <p:clrMapOvr>
+    <a:masterClrMapping/>
+  </p:clrMapOvr>
+</p:sld>
+</file>
+
+<file path=ppt/slides/slide14.xml><?xml version="1.0" encoding="utf-8"?>
+<p:sld xmlns:a="http://schemas.openxmlformats.org/drawingml/2006/main" xmlns:r="http://schemas.openxmlformats.org/officeDocument/2006/relationships" xmlns:p="http://schemas.openxmlformats.org/presentationml/2006/main">
+  <p:cSld>
+    <p:bg>
+      <p:bgPr>
+        <a:solidFill>
+          <a:schemeClr val="bg1"/>
+        </a:solidFill>
+        <a:effectLst/>
+      </p:bgPr>
+    </p:bg>
+    <p:spTree>
+      <p:nvGrpSpPr>
+        <p:cNvPr id="1" name=""/>
+        <p:cNvGrpSpPr/>
+        <p:nvPr/>
+      </p:nvGrpSpPr>
+      <p:grpSpPr>
+        <a:xfrm>
+          <a:off x="0" y="0"/>
+          <a:ext cx="0" cy="0"/>
+          <a:chOff x="0" y="0"/>
+          <a:chExt cx="0" cy="0"/>
+        </a:xfrm>
+      </p:grpSpPr>
+      <p:sp useBgFill="1">
+        <p:nvSpPr>
+          <p:cNvPr id="11" name="Rectangle 10">
+            <a:extLst>
+              <a:ext uri="{FF2B5EF4-FFF2-40B4-BE49-F238E27FC236}">
+                <a16:creationId xmlns:a16="http://schemas.microsoft.com/office/drawing/2014/main" id="{DF05ACD0-FF4A-4F8F-B5C5-6A4EBD0D1B38}"/>
+              </a:ext>
+              <a:ext uri="{C183D7F6-B498-43B3-948B-1728B52AA6E4}">
+                <adec:decorative xmlns:adec="http://schemas.microsoft.com/office/drawing/2017/decorative" val="1"/>
+              </a:ext>
+            </a:extLst>
+          </p:cNvPr>
+          <p:cNvSpPr>
+            <a:spLocks noGrp="1" noRot="1" noChangeAspect="1" noMove="1" noResize="1" noEditPoints="1" noAdjustHandles="1" noChangeArrowheads="1" noChangeShapeType="1" noTextEdit="1"/>
+          </p:cNvSpPr>
+          <p:nvPr>
+            <p:extLst>
+              <p:ext uri="{386F3935-93C4-4BCD-93E2-E3B085C9AB24}">
+                <p16:designElem xmlns:p16="http://schemas.microsoft.com/office/powerpoint/2015/main" val="1"/>
+              </p:ext>
+            </p:extLst>
+          </p:nvPr>
+        </p:nvSpPr>
+        <p:spPr>
+          <a:xfrm>
+            <a:off x="0" y="0"/>
+            <a:ext cx="12192000" cy="6858000"/>
+          </a:xfrm>
+          <a:prstGeom prst="rect">
+            <a:avLst/>
+          </a:prstGeom>
+          <a:ln w="12700" cap="flat" cmpd="sng" algn="ctr">
+            <a:noFill/>
+            <a:prstDash val="solid"/>
+            <a:miter lim="800000"/>
+          </a:ln>
+          <a:effectLst/>
+          <a:extLst>
+            <a:ext uri="{91240B29-F687-4F45-9708-019B960494DF}">
+              <a14:hiddenLine xmlns:a14="http://schemas.microsoft.com/office/drawing/2010/main" w="12700" cap="flat" cmpd="sng" algn="ctr">
+                <a:solidFill>
+                  <a:schemeClr val="accent1">
+                    <a:shade val="50000"/>
+                  </a:schemeClr>
+                </a:solidFill>
+                <a:prstDash val="solid"/>
+                <a:miter lim="800000"/>
+              </a14:hiddenLine>
+            </a:ext>
+          </a:extLst>
+        </p:spPr>
+        <p:style>
+          <a:lnRef idx="2">
+            <a:schemeClr val="accent1">
+              <a:shade val="50000"/>
+            </a:schemeClr>
+          </a:lnRef>
+          <a:fillRef idx="1">
+            <a:schemeClr val="accent1"/>
+          </a:fillRef>
+          <a:effectRef idx="0">
+            <a:schemeClr val="accent1"/>
+          </a:effectRef>
+          <a:fontRef idx="minor">
+            <a:schemeClr val="lt1"/>
+          </a:fontRef>
+        </p:style>
+        <p:txBody>
+          <a:bodyPr rtlCol="0" anchor="ctr"/>
+          <a:lstStyle/>
+          <a:p>
+            <a:pPr algn="ctr"/>
+            <a:endParaRPr lang="en-US"/>
+          </a:p>
+        </p:txBody>
+      </p:sp>
+      <p:sp>
+        <p:nvSpPr>
+          <p:cNvPr id="13" name="Rectangle 12">
+            <a:extLst>
+              <a:ext uri="{FF2B5EF4-FFF2-40B4-BE49-F238E27FC236}">
+                <a16:creationId xmlns:a16="http://schemas.microsoft.com/office/drawing/2014/main" id="{4C9AFA28-B5ED-4346-9AF7-68A157F16C7E}"/>
+              </a:ext>
+              <a:ext uri="{C183D7F6-B498-43B3-948B-1728B52AA6E4}">
+                <adec:decorative xmlns:adec="http://schemas.microsoft.com/office/drawing/2017/decorative" val="1"/>
+              </a:ext>
+            </a:extLst>
+          </p:cNvPr>
+          <p:cNvSpPr>
+            <a:spLocks noGrp="1" noRot="1" noChangeAspect="1" noMove="1" noResize="1" noEditPoints="1" noAdjustHandles="1" noChangeArrowheads="1" noChangeShapeType="1" noTextEdit="1"/>
+          </p:cNvSpPr>
+          <p:nvPr>
+            <p:extLst>
+              <p:ext uri="{386F3935-93C4-4BCD-93E2-E3B085C9AB24}">
+                <p16:designElem xmlns:p16="http://schemas.microsoft.com/office/powerpoint/2015/main" val="1"/>
+              </p:ext>
+            </p:extLst>
+          </p:nvPr>
+        </p:nvSpPr>
+        <p:spPr>
+          <a:xfrm>
+            <a:off x="685800" y="685800"/>
+            <a:ext cx="10820400" cy="5486400"/>
+          </a:xfrm>
+          <a:prstGeom prst="rect">
+            <a:avLst/>
+          </a:prstGeom>
+          <a:solidFill>
+            <a:schemeClr val="accent2">
+              <a:lumMod val="20000"/>
+              <a:lumOff val="80000"/>
+            </a:schemeClr>
+          </a:solidFill>
+          <a:ln>
+            <a:noFill/>
+          </a:ln>
+        </p:spPr>
+        <p:style>
+          <a:lnRef idx="2">
+            <a:schemeClr val="accent1">
+              <a:shade val="50000"/>
+            </a:schemeClr>
+          </a:lnRef>
+          <a:fillRef idx="1">
+            <a:schemeClr val="accent1"/>
+          </a:fillRef>
+          <a:effectRef idx="0">
+            <a:schemeClr val="accent1"/>
+          </a:effectRef>
+          <a:fontRef idx="minor">
+            <a:schemeClr val="lt1"/>
+          </a:fontRef>
+        </p:style>
+        <p:txBody>
+          <a:bodyPr rtlCol="0" anchor="ctr"/>
+          <a:lstStyle/>
+          <a:p>
+            <a:pPr algn="ctr"/>
+            <a:endParaRPr lang="en-US">
+              <a:solidFill>
+                <a:schemeClr val="bg2"/>
+              </a:solidFill>
+            </a:endParaRPr>
+          </a:p>
+        </p:txBody>
+      </p:sp>
+      <p:sp>
+        <p:nvSpPr>
+          <p:cNvPr id="2" name="Titre 1">
+            <a:extLst>
+              <a:ext uri="{FF2B5EF4-FFF2-40B4-BE49-F238E27FC236}">
+                <a16:creationId xmlns:a16="http://schemas.microsoft.com/office/drawing/2014/main" id="{BB76B682-5577-4F31-4022-B3D3477D87E8}"/>
+              </a:ext>
+            </a:extLst>
+          </p:cNvPr>
+          <p:cNvSpPr>
+            <a:spLocks noGrp="1"/>
+          </p:cNvSpPr>
+          <p:nvPr>
+            <p:ph type="title"/>
+          </p:nvPr>
+        </p:nvSpPr>
+        <p:spPr>
+          <a:xfrm>
+            <a:off x="1472608" y="1380564"/>
+            <a:ext cx="4561369" cy="2346229"/>
+          </a:xfrm>
+        </p:spPr>
+        <p:txBody>
+          <a:bodyPr vert="horz" lIns="91440" tIns="45720" rIns="91440" bIns="45720" rtlCol="0" anchor="b">
+            <a:normAutofit/>
+          </a:bodyPr>
+          <a:lstStyle/>
+          <a:p>
+            <a:pPr algn="ctr">
+              <a:spcBef>
+                <a:spcPct val="0"/>
+              </a:spcBef>
+            </a:pPr>
+            <a:r>
+              <a:rPr lang="en-US" sz="3200" kern="1200">
+                <a:solidFill>
+                  <a:srgbClr val="595959"/>
+                </a:solidFill>
+                <a:latin typeface="+mj-lt"/>
+                <a:ea typeface="+mj-ea"/>
+                <a:cs typeface="+mj-cs"/>
+              </a:rPr>
+              <a:t>Veuillez patienter …</a:t>
+            </a:r>
+            <a:br>
+              <a:rPr lang="en-US" sz="3200" kern="1200">
+                <a:solidFill>
+                  <a:srgbClr val="595959"/>
+                </a:solidFill>
+                <a:latin typeface="+mj-lt"/>
+                <a:ea typeface="+mj-ea"/>
+                <a:cs typeface="+mj-cs"/>
+              </a:rPr>
+            </a:br>
+            <a:br>
+              <a:rPr lang="en-US" sz="3200" kern="1200">
+                <a:solidFill>
+                  <a:srgbClr val="595959"/>
+                </a:solidFill>
+                <a:latin typeface="+mj-lt"/>
+                <a:ea typeface="+mj-ea"/>
+                <a:cs typeface="+mj-cs"/>
+              </a:rPr>
+            </a:br>
+            <a:r>
+              <a:rPr lang="en-US" sz="3200" kern="1200">
+                <a:solidFill>
+                  <a:srgbClr val="595959"/>
+                </a:solidFill>
+                <a:latin typeface="+mj-lt"/>
+                <a:ea typeface="+mj-ea"/>
+                <a:cs typeface="+mj-cs"/>
+              </a:rPr>
+              <a:t>Pause café en cours</a:t>
+            </a:r>
+          </a:p>
+        </p:txBody>
+      </p:sp>
+      <p:pic>
+        <p:nvPicPr>
+          <p:cNvPr id="6" name="Graphique 5" descr="Café avec un remplissage uni">
+            <a:extLst>
+              <a:ext uri="{FF2B5EF4-FFF2-40B4-BE49-F238E27FC236}">
+                <a16:creationId xmlns:a16="http://schemas.microsoft.com/office/drawing/2014/main" id="{568D9D90-84E7-7450-9EF1-BEA3C83099B1}"/>
+              </a:ext>
+            </a:extLst>
+          </p:cNvPr>
+          <p:cNvPicPr>
+            <a:picLocks noChangeAspect="1"/>
+          </p:cNvPicPr>
+          <p:nvPr/>
+        </p:nvPicPr>
+        <p:blipFill>
+          <a:blip r:embed="rId2">
+            <a:extLst>
+              <a:ext uri="{96DAC541-7B7A-43D3-8B79-37D633B846F1}">
+                <asvg:svgBlip xmlns:asvg="http://schemas.microsoft.com/office/drawing/2016/SVG/main" r:embed="rId3"/>
+              </a:ext>
+            </a:extLst>
+          </a:blip>
+          <a:stretch>
+            <a:fillRect/>
+          </a:stretch>
+        </p:blipFill>
+        <p:spPr>
+          <a:xfrm>
+            <a:off x="6810935" y="1419785"/>
+            <a:ext cx="4018430" cy="4018430"/>
+          </a:xfrm>
+          <a:prstGeom prst="rect">
+            <a:avLst/>
+          </a:prstGeom>
+        </p:spPr>
+      </p:pic>
+    </p:spTree>
+    <p:extLst>
+      <p:ext uri="{BB962C8B-B14F-4D97-AF65-F5344CB8AC3E}">
+        <p14:creationId xmlns:p14="http://schemas.microsoft.com/office/powerpoint/2010/main" val="798120857"/>
+      </p:ext>
+    </p:extLst>
+  </p:cSld>
+  <p:clrMapOvr>
+    <a:masterClrMapping/>
+  </p:clrMapOvr>
+</p:sld>
+</file>
+
+<file path=ppt/slides/slide15.xml><?xml version="1.0" encoding="utf-8"?>
+<p:sld xmlns:a="http://schemas.openxmlformats.org/drawingml/2006/main" xmlns:r="http://schemas.openxmlformats.org/officeDocument/2006/relationships" xmlns:p="http://schemas.openxmlformats.org/presentationml/2006/main">
+  <p:cSld>
+    <p:spTree>
+      <p:nvGrpSpPr>
+        <p:cNvPr id="1" name=""/>
+        <p:cNvGrpSpPr/>
+        <p:nvPr/>
+      </p:nvGrpSpPr>
+      <p:grpSpPr>
+        <a:xfrm>
+          <a:off x="0" y="0"/>
+          <a:ext cx="0" cy="0"/>
+          <a:chOff x="0" y="0"/>
+          <a:chExt cx="0" cy="0"/>
+        </a:xfrm>
+      </p:grpSpPr>
+      <p:sp>
+        <p:nvSpPr>
+          <p:cNvPr id="2" name="Titre 1">
+            <a:extLst>
+              <a:ext uri="{FF2B5EF4-FFF2-40B4-BE49-F238E27FC236}">
+                <a16:creationId xmlns:a16="http://schemas.microsoft.com/office/drawing/2014/main" id="{DEC33717-04DF-BA4A-5C3D-388736955D43}"/>
+              </a:ext>
+            </a:extLst>
+          </p:cNvPr>
+          <p:cNvSpPr>
+            <a:spLocks noGrp="1"/>
+          </p:cNvSpPr>
+          <p:nvPr>
+            <p:ph type="title"/>
+          </p:nvPr>
+        </p:nvSpPr>
+        <p:spPr>
+          <a:xfrm>
+            <a:off x="4063153" y="2766218"/>
+            <a:ext cx="4065693" cy="1325563"/>
+          </a:xfrm>
+        </p:spPr>
+        <p:txBody>
+          <a:bodyPr>
+            <a:normAutofit/>
+          </a:bodyPr>
+          <a:lstStyle/>
+          <a:p>
+            <a:r>
+              <a:rPr lang="fr-FR" sz="8800" dirty="0">
+                <a:latin typeface="Aptos Black" panose="020B0004020202020204" pitchFamily="34" charset="0"/>
+              </a:rPr>
+              <a:t>Bref …</a:t>
+            </a:r>
+          </a:p>
+        </p:txBody>
+      </p:sp>
+    </p:spTree>
+    <p:extLst>
+      <p:ext uri="{BB962C8B-B14F-4D97-AF65-F5344CB8AC3E}">
+        <p14:creationId xmlns:p14="http://schemas.microsoft.com/office/powerpoint/2010/main" val="3398929560"/>
+      </p:ext>
+    </p:extLst>
+  </p:cSld>
+  <p:clrMapOvr>
+    <a:masterClrMapping/>
+  </p:clrMapOvr>
+</p:sld>
+</file>
+
+<file path=ppt/slides/slide16.xml><?xml version="1.0" encoding="utf-8"?>
+<p:sld xmlns:a="http://schemas.openxmlformats.org/drawingml/2006/main" xmlns:r="http://schemas.openxmlformats.org/officeDocument/2006/relationships" xmlns:p="http://schemas.openxmlformats.org/presentationml/2006/main">
+  <p:cSld>
+    <p:spTree>
+      <p:nvGrpSpPr>
+        <p:cNvPr id="1" name="">
+          <a:extLst>
+            <a:ext uri="{FF2B5EF4-FFF2-40B4-BE49-F238E27FC236}">
+              <a16:creationId xmlns:a16="http://schemas.microsoft.com/office/drawing/2014/main" id="{B878961F-5999-3AE7-E209-96E05D5F7A46}"/>
+            </a:ext>
+          </a:extLst>
+        </p:cNvPr>
+        <p:cNvGrpSpPr/>
+        <p:nvPr/>
+      </p:nvGrpSpPr>
+      <p:grpSpPr>
+        <a:xfrm>
+          <a:off x="0" y="0"/>
+          <a:ext cx="0" cy="0"/>
+          <a:chOff x="0" y="0"/>
+          <a:chExt cx="0" cy="0"/>
+        </a:xfrm>
+      </p:grpSpPr>
+      <p:sp>
+        <p:nvSpPr>
+          <p:cNvPr id="2" name="Titre 1">
+            <a:extLst>
+              <a:ext uri="{FF2B5EF4-FFF2-40B4-BE49-F238E27FC236}">
+                <a16:creationId xmlns:a16="http://schemas.microsoft.com/office/drawing/2014/main" id="{F56F4B9E-FCFE-60E9-6748-D1EA9F01AAA9}"/>
+              </a:ext>
+            </a:extLst>
+          </p:cNvPr>
+          <p:cNvSpPr>
+            <a:spLocks noGrp="1"/>
+          </p:cNvSpPr>
+          <p:nvPr>
+            <p:ph type="title"/>
+          </p:nvPr>
+        </p:nvSpPr>
+        <p:spPr>
+          <a:xfrm>
+            <a:off x="2501053" y="2766218"/>
+            <a:ext cx="7303347" cy="1325563"/>
+          </a:xfrm>
+        </p:spPr>
+        <p:txBody>
+          <a:bodyPr>
+            <a:normAutofit fontScale="90000"/>
+          </a:bodyPr>
+          <a:lstStyle/>
+          <a:p>
+            <a:r>
+              <a:rPr lang="fr-FR" sz="8800" dirty="0">
+                <a:latin typeface="Aptos Black" panose="020B0004020202020204" pitchFamily="34" charset="0"/>
+              </a:rPr>
+              <a:t>Remerciement</a:t>
+            </a:r>
+          </a:p>
+        </p:txBody>
+      </p:sp>
+      <p:pic>
+        <p:nvPicPr>
+          <p:cNvPr id="1028" name="Picture 4" descr="Codium">
+            <a:extLst>
+              <a:ext uri="{FF2B5EF4-FFF2-40B4-BE49-F238E27FC236}">
+                <a16:creationId xmlns:a16="http://schemas.microsoft.com/office/drawing/2014/main" id="{75AB9269-829E-F0A6-9826-7DA578E43449}"/>
+              </a:ext>
+            </a:extLst>
+          </p:cNvPr>
+          <p:cNvPicPr>
+            <a:picLocks noChangeAspect="1" noChangeArrowheads="1"/>
+          </p:cNvPicPr>
+          <p:nvPr/>
+        </p:nvPicPr>
+        <p:blipFill>
+          <a:blip r:embed="rId2">
+            <a:extLst>
+              <a:ext uri="{28A0092B-C50C-407E-A947-70E740481C1C}">
+                <a14:useLocalDpi xmlns:a14="http://schemas.microsoft.com/office/drawing/2010/main" val="0"/>
+              </a:ext>
+            </a:extLst>
+          </a:blip>
+          <a:srcRect/>
+          <a:stretch>
+            <a:fillRect/>
+          </a:stretch>
+        </p:blipFill>
+        <p:spPr bwMode="auto">
+          <a:xfrm>
+            <a:off x="657706" y="974056"/>
+            <a:ext cx="4422267" cy="1085427"/>
+          </a:xfrm>
+          <a:prstGeom prst="rect">
+            <a:avLst/>
+          </a:prstGeom>
+          <a:noFill/>
+          <a:extLst>
+            <a:ext uri="{909E8E84-426E-40DD-AFC4-6F175D3DCCD1}">
+              <a14:hiddenFill xmlns:a14="http://schemas.microsoft.com/office/drawing/2010/main">
+                <a:solidFill>
+                  <a:srgbClr val="FFFFFF"/>
+                </a:solidFill>
+              </a14:hiddenFill>
+            </a:ext>
+          </a:extLst>
+        </p:spPr>
+      </p:pic>
+      <p:pic>
+        <p:nvPicPr>
+          <p:cNvPr id="4" name="Graphique 3" descr="Visage faisant un clin d’œil à remplissage solide avec un remplissage uni">
+            <a:extLst>
+              <a:ext uri="{FF2B5EF4-FFF2-40B4-BE49-F238E27FC236}">
+                <a16:creationId xmlns:a16="http://schemas.microsoft.com/office/drawing/2014/main" id="{3031E5E9-705A-94EF-7A98-D667D148FC26}"/>
+              </a:ext>
+            </a:extLst>
+          </p:cNvPr>
+          <p:cNvPicPr>
+            <a:picLocks noChangeAspect="1"/>
+          </p:cNvPicPr>
+          <p:nvPr/>
+        </p:nvPicPr>
+        <p:blipFill>
+          <a:blip r:embed="rId3">
+            <a:extLst>
+              <a:ext uri="{96DAC541-7B7A-43D3-8B79-37D633B846F1}">
+                <asvg:svgBlip xmlns:asvg="http://schemas.microsoft.com/office/drawing/2016/SVG/main" r:embed="rId4"/>
+              </a:ext>
+            </a:extLst>
+          </a:blip>
+          <a:stretch>
+            <a:fillRect/>
+          </a:stretch>
+        </p:blipFill>
+        <p:spPr>
+          <a:xfrm>
+            <a:off x="9919545" y="4990253"/>
+            <a:ext cx="1385147" cy="1385147"/>
+          </a:xfrm>
+          <a:prstGeom prst="rect">
+            <a:avLst/>
+          </a:prstGeom>
+        </p:spPr>
+      </p:pic>
+    </p:spTree>
+    <p:extLst>
+      <p:ext uri="{BB962C8B-B14F-4D97-AF65-F5344CB8AC3E}">
+        <p14:creationId xmlns:p14="http://schemas.microsoft.com/office/powerpoint/2010/main" val="2555647377"/>
+      </p:ext>
+    </p:extLst>
+  </p:cSld>
+  <p:clrMapOvr>
+    <a:masterClrMapping/>
+  </p:clrMapOvr>
+</p:sld>
+</file>
+
+<file path=ppt/slides/slide17.xml><?xml version="1.0" encoding="utf-8"?>
+<p:sld xmlns:a="http://schemas.openxmlformats.org/drawingml/2006/main" xmlns:r="http://schemas.openxmlformats.org/officeDocument/2006/relationships" xmlns:p="http://schemas.openxmlformats.org/presentationml/2006/main">
+  <p:cSld>
+    <p:spTree>
+      <p:nvGrpSpPr>
+        <p:cNvPr id="1" name="">
+          <a:extLst>
+            <a:ext uri="{FF2B5EF4-FFF2-40B4-BE49-F238E27FC236}">
+              <a16:creationId xmlns:a16="http://schemas.microsoft.com/office/drawing/2014/main" id="{B9D53791-6519-71AC-92E5-DCF202596083}"/>
+            </a:ext>
+          </a:extLst>
+        </p:cNvPr>
+        <p:cNvGrpSpPr/>
+        <p:nvPr/>
+      </p:nvGrpSpPr>
+      <p:grpSpPr>
+        <a:xfrm>
+          <a:off x="0" y="0"/>
+          <a:ext cx="0" cy="0"/>
+          <a:chOff x="0" y="0"/>
+          <a:chExt cx="0" cy="0"/>
+        </a:xfrm>
+      </p:grpSpPr>
+      <p:sp>
+        <p:nvSpPr>
+          <p:cNvPr id="2" name="Titre 1">
+            <a:extLst>
+              <a:ext uri="{FF2B5EF4-FFF2-40B4-BE49-F238E27FC236}">
+                <a16:creationId xmlns:a16="http://schemas.microsoft.com/office/drawing/2014/main" id="{0DF0A3DF-2216-094D-44DB-53B6C034491C}"/>
+              </a:ext>
+            </a:extLst>
+          </p:cNvPr>
+          <p:cNvSpPr>
+            <a:spLocks noGrp="1"/>
+          </p:cNvSpPr>
+          <p:nvPr>
+            <p:ph type="title"/>
+          </p:nvPr>
+        </p:nvSpPr>
+        <p:spPr>
+          <a:xfrm>
+            <a:off x="696806" y="707124"/>
+            <a:ext cx="6205221" cy="1325563"/>
+          </a:xfrm>
+        </p:spPr>
+        <p:txBody>
+          <a:bodyPr>
+            <a:normAutofit/>
+          </a:bodyPr>
+          <a:lstStyle/>
+          <a:p>
+            <a:r>
+              <a:rPr lang="fr-FR" sz="4000" dirty="0">
+                <a:latin typeface="Aptos Black" panose="020B0004020202020204" pitchFamily="34" charset="0"/>
+              </a:rPr>
+              <a:t>Merci de votre attention</a:t>
+            </a:r>
+          </a:p>
+        </p:txBody>
+      </p:sp>
+      <p:pic>
+        <p:nvPicPr>
+          <p:cNvPr id="4" name="Graphique 3" descr="Signe pouce en haut avec un remplissage uni">
+            <a:extLst>
+              <a:ext uri="{FF2B5EF4-FFF2-40B4-BE49-F238E27FC236}">
+                <a16:creationId xmlns:a16="http://schemas.microsoft.com/office/drawing/2014/main" id="{D2ABCF07-7615-3888-E2D1-2F38F9E856E0}"/>
+              </a:ext>
+            </a:extLst>
+          </p:cNvPr>
+          <p:cNvPicPr>
+            <a:picLocks noChangeAspect="1"/>
+          </p:cNvPicPr>
+          <p:nvPr/>
+        </p:nvPicPr>
+        <p:blipFill>
+          <a:blip r:embed="rId2">
+            <a:extLst>
+              <a:ext uri="{96DAC541-7B7A-43D3-8B79-37D633B846F1}">
+                <asvg:svgBlip xmlns:asvg="http://schemas.microsoft.com/office/drawing/2016/SVG/main" r:embed="rId3"/>
+              </a:ext>
+            </a:extLst>
+          </a:blip>
+          <a:stretch>
+            <a:fillRect/>
+          </a:stretch>
+        </p:blipFill>
+        <p:spPr>
+          <a:xfrm>
+            <a:off x="7111577" y="817457"/>
+            <a:ext cx="914400" cy="914400"/>
+          </a:xfrm>
+          <a:prstGeom prst="rect">
+            <a:avLst/>
+          </a:prstGeom>
+        </p:spPr>
+      </p:pic>
+      <p:pic>
+        <p:nvPicPr>
+          <p:cNvPr id="6" name="Graphique 5" descr="Café avec un remplissage uni">
+            <a:extLst>
+              <a:ext uri="{FF2B5EF4-FFF2-40B4-BE49-F238E27FC236}">
+                <a16:creationId xmlns:a16="http://schemas.microsoft.com/office/drawing/2014/main" id="{D6E081BD-BF8D-6DF6-E4F6-077B0D3CF30A}"/>
+              </a:ext>
+            </a:extLst>
+          </p:cNvPr>
+          <p:cNvPicPr>
+            <a:picLocks noChangeAspect="1"/>
+          </p:cNvPicPr>
+          <p:nvPr/>
+        </p:nvPicPr>
+        <p:blipFill>
+          <a:blip r:embed="rId4">
+            <a:extLst>
+              <a:ext uri="{96DAC541-7B7A-43D3-8B79-37D633B846F1}">
+                <asvg:svgBlip xmlns:asvg="http://schemas.microsoft.com/office/drawing/2016/SVG/main" r:embed="rId5"/>
+              </a:ext>
+            </a:extLst>
+          </a:blip>
+          <a:stretch>
+            <a:fillRect/>
+          </a:stretch>
+        </p:blipFill>
+        <p:spPr>
+          <a:xfrm>
+            <a:off x="940223" y="4199467"/>
+            <a:ext cx="1614754" cy="1614754"/>
+          </a:xfrm>
+          <a:prstGeom prst="rect">
+            <a:avLst/>
+          </a:prstGeom>
+        </p:spPr>
+      </p:pic>
+      <p:pic>
+        <p:nvPicPr>
+          <p:cNvPr id="8" name="Graphique 7" descr="Grains de café avec un remplissage uni">
+            <a:extLst>
+              <a:ext uri="{FF2B5EF4-FFF2-40B4-BE49-F238E27FC236}">
+                <a16:creationId xmlns:a16="http://schemas.microsoft.com/office/drawing/2014/main" id="{EC505D27-4873-7BFA-2EC0-DED4954235D4}"/>
+              </a:ext>
+            </a:extLst>
+          </p:cNvPr>
+          <p:cNvPicPr>
+            <a:picLocks noChangeAspect="1"/>
+          </p:cNvPicPr>
+          <p:nvPr/>
+        </p:nvPicPr>
+        <p:blipFill>
+          <a:blip r:embed="rId6">
+            <a:extLst>
+              <a:ext uri="{96DAC541-7B7A-43D3-8B79-37D633B846F1}">
+                <asvg:svgBlip xmlns:asvg="http://schemas.microsoft.com/office/drawing/2016/SVG/main" r:embed="rId7"/>
+              </a:ext>
+            </a:extLst>
+          </a:blip>
+          <a:stretch>
+            <a:fillRect/>
+          </a:stretch>
+        </p:blipFill>
+        <p:spPr>
+          <a:xfrm>
+            <a:off x="2641600" y="4199467"/>
+            <a:ext cx="1614754" cy="1614754"/>
+          </a:xfrm>
+          <a:prstGeom prst="rect">
+            <a:avLst/>
+          </a:prstGeom>
+        </p:spPr>
+      </p:pic>
+      <p:pic>
+        <p:nvPicPr>
+          <p:cNvPr id="10" name="Graphique 9" descr="Tasse de latte avec un remplissage uni">
+            <a:extLst>
+              <a:ext uri="{FF2B5EF4-FFF2-40B4-BE49-F238E27FC236}">
+                <a16:creationId xmlns:a16="http://schemas.microsoft.com/office/drawing/2014/main" id="{CE4983D8-9EFF-DB2A-F6EF-C2F7F82372C8}"/>
+              </a:ext>
+            </a:extLst>
+          </p:cNvPr>
+          <p:cNvPicPr>
+            <a:picLocks noChangeAspect="1"/>
+          </p:cNvPicPr>
+          <p:nvPr/>
+        </p:nvPicPr>
+        <p:blipFill>
+          <a:blip r:embed="rId8">
+            <a:extLst>
+              <a:ext uri="{96DAC541-7B7A-43D3-8B79-37D633B846F1}">
+                <asvg:svgBlip xmlns:asvg="http://schemas.microsoft.com/office/drawing/2016/SVG/main" r:embed="rId9"/>
+              </a:ext>
+            </a:extLst>
+          </a:blip>
+          <a:stretch>
+            <a:fillRect/>
+          </a:stretch>
+        </p:blipFill>
+        <p:spPr>
+          <a:xfrm>
+            <a:off x="4541519" y="4199467"/>
+            <a:ext cx="1614754" cy="1614754"/>
+          </a:xfrm>
+          <a:prstGeom prst="rect">
+            <a:avLst/>
+          </a:prstGeom>
+        </p:spPr>
+      </p:pic>
+      <p:pic>
+        <p:nvPicPr>
+          <p:cNvPr id="12" name="Graphique 11" descr="Bol avec un remplissage uni">
+            <a:extLst>
+              <a:ext uri="{FF2B5EF4-FFF2-40B4-BE49-F238E27FC236}">
+                <a16:creationId xmlns:a16="http://schemas.microsoft.com/office/drawing/2014/main" id="{103895B3-08DB-DDC2-B493-146D02E0EC77}"/>
+              </a:ext>
+            </a:extLst>
+          </p:cNvPr>
+          <p:cNvPicPr>
+            <a:picLocks noChangeAspect="1"/>
+          </p:cNvPicPr>
+          <p:nvPr/>
+        </p:nvPicPr>
+        <p:blipFill>
+          <a:blip r:embed="rId10">
+            <a:extLst>
+              <a:ext uri="{96DAC541-7B7A-43D3-8B79-37D633B846F1}">
+                <asvg:svgBlip xmlns:asvg="http://schemas.microsoft.com/office/drawing/2016/SVG/main" r:embed="rId11"/>
+              </a:ext>
+            </a:extLst>
+          </a:blip>
+          <a:stretch>
+            <a:fillRect/>
+          </a:stretch>
+        </p:blipFill>
+        <p:spPr>
+          <a:xfrm>
+            <a:off x="6304200" y="4199467"/>
+            <a:ext cx="1614753" cy="1614753"/>
+          </a:xfrm>
+          <a:prstGeom prst="rect">
+            <a:avLst/>
+          </a:prstGeom>
+        </p:spPr>
+      </p:pic>
+    </p:spTree>
+    <p:extLst>
+      <p:ext uri="{BB962C8B-B14F-4D97-AF65-F5344CB8AC3E}">
+        <p14:creationId xmlns:p14="http://schemas.microsoft.com/office/powerpoint/2010/main" val="2134145801"/>
+      </p:ext>
+    </p:extLst>
+  </p:cSld>
+  <p:clrMapOvr>
+    <a:masterClrMapping/>
+  </p:clrMapOvr>
 </p:sld>
 </file>
 
 <file path=ppt/slides/slide2.xml><?xml version="1.0" encoding="utf-8"?>
-<p:sld xmlns:a="http://schemas.openxmlformats.org/drawingml/2006/main" xmlns:r="http://schemas.openxmlformats.org/officeDocument/2006/relationships" xmlns:p="http://schemas.openxmlformats.org/presentationml/2006/main" xmlns:m="http://schemas.openxmlformats.org/officeDocument/2006/math" xmlns:w="http://schemas.openxmlformats.org/wordprocessingml/2006/main" xmlns:mc="http://schemas.openxmlformats.org/markup-compatibility/2006" showMasterPhAnim="0" showMasterSp="1" show="1">
-  <p:cSld name="">
+<p:sld xmlns:a="http://schemas.openxmlformats.org/drawingml/2006/main" xmlns:r="http://schemas.openxmlformats.org/officeDocument/2006/relationships" xmlns:p="http://schemas.openxmlformats.org/presentationml/2006/main" showMasterPhAnim="0">
+  <p:cSld>
     <p:spTree>
       <p:nvGrpSpPr>
         <p:cNvPr id="1" name=""/>
@@ -4955,7 +8483,6 @@
               <a:rPr lang="en-GB"/>
               <a:t>Project and system description</a:t>
             </a:r>
-            <a:endParaRPr lang="en-GB"/>
           </a:p>
         </p:txBody>
       </p:sp>
@@ -4970,7 +8497,7 @@
           </p:nvPr>
         </p:nvSpPr>
         <p:spPr bwMode="auto">
-          <a:xfrm flipH="0" flipV="0">
+          <a:xfrm>
             <a:off x="4560133" y="1825624"/>
             <a:ext cx="6793665" cy="4351338"/>
           </a:xfrm>
@@ -5006,7 +8533,7 @@
             </a:pPr>
             <a:fld id="{18554F39-F816-CC70-5843-C0DA66E0FFFA}" type="slidenum">
               <a:rPr lang="fr-FR"/>
-              <a:t/>
+              <a:t>2</a:t>
             </a:fld>
             <a:endParaRPr/>
           </a:p>
@@ -5031,16 +8558,14 @@
               <a:defRPr/>
             </a:pPr>
             <a:r>
-              <a:rPr/>
               <a:t>04/02/2026</a:t>
             </a:r>
-            <a:endParaRPr/>
           </a:p>
         </p:txBody>
       </p:sp>
       <p:pic>
         <p:nvPicPr>
-          <p:cNvPr id="2014333340" name=""/>
+          <p:cNvPr id="2014333340" name="Image 2014333339"/>
           <p:cNvPicPr>
             <a:picLocks noChangeAspect="1"/>
           </p:cNvPicPr>
@@ -5048,11 +8573,11 @@
         </p:nvPicPr>
         <p:blipFill rotWithShape="1">
           <a:blip r:embed="rId3"/>
-          <a:srcRect l="0" t="0" r="29998" b="0"/>
+          <a:srcRect r="29998"/>
           <a:stretch/>
         </p:blipFill>
         <p:spPr bwMode="auto">
-          <a:xfrm flipH="0" flipV="0">
+          <a:xfrm>
             <a:off x="1025298" y="1825624"/>
             <a:ext cx="2879271" cy="4113138"/>
           </a:xfrm>
@@ -5066,20 +8591,12 @@
   <p:clrMapOvr>
     <a:masterClrMapping/>
   </p:clrMapOvr>
-  <mc:AlternateContent xmlns:mc="http://schemas.openxmlformats.org/markup-compatibility/2006">
-    <mc:Choice xmlns:p159="http://schemas.microsoft.com/office/powerpoint/2015/09/main" xmlns:p14="http://schemas.microsoft.com/office/powerpoint/2010/main" Requires="p159">
-      <p:transition p14:dur="2000" advClick="1"/>
-    </mc:Choice>
-    <mc:Fallback>
-      <p:transition advClick="1"/>
-    </mc:Fallback>
-  </mc:AlternateContent>
 </p:sld>
 </file>
 
 <file path=ppt/slides/slide3.xml><?xml version="1.0" encoding="utf-8"?>
-<p:sld xmlns:a="http://schemas.openxmlformats.org/drawingml/2006/main" xmlns:r="http://schemas.openxmlformats.org/officeDocument/2006/relationships" xmlns:p="http://schemas.openxmlformats.org/presentationml/2006/main" xmlns:m="http://schemas.openxmlformats.org/officeDocument/2006/math" xmlns:w="http://schemas.openxmlformats.org/wordprocessingml/2006/main" xmlns:mc="http://schemas.openxmlformats.org/markup-compatibility/2006" showMasterPhAnim="0" showMasterSp="1" show="1">
-  <p:cSld name="">
+<p:sld xmlns:a="http://schemas.openxmlformats.org/drawingml/2006/main" xmlns:r="http://schemas.openxmlformats.org/officeDocument/2006/relationships" xmlns:p="http://schemas.openxmlformats.org/presentationml/2006/main" showMasterPhAnim="0">
+  <p:cSld>
     <p:spTree>
       <p:nvGrpSpPr>
         <p:cNvPr id="1" name=""/>
@@ -5113,10 +8630,8 @@
               <a:defRPr/>
             </a:pPr>
             <a:r>
-              <a:rPr/>
               <a:t>Choice of communication Technology</a:t>
             </a:r>
-            <a:endParaRPr/>
           </a:p>
         </p:txBody>
       </p:sp>
@@ -5162,7 +8677,7 @@
             </a:pPr>
             <a:fld id="{9F8BCACA-0982-66A4-4E44-6A58C6D6DC4C}" type="slidenum">
               <a:rPr lang="fr-FR"/>
-              <a:t/>
+              <a:t>3</a:t>
             </a:fld>
             <a:endParaRPr/>
           </a:p>
@@ -5187,10 +8702,8 @@
               <a:defRPr/>
             </a:pPr>
             <a:r>
-              <a:rPr/>
               <a:t>04/02/2026</a:t>
             </a:r>
-            <a:endParaRPr/>
           </a:p>
         </p:txBody>
       </p:sp>
@@ -5199,20 +8712,12 @@
   <p:clrMapOvr>
     <a:masterClrMapping/>
   </p:clrMapOvr>
-  <mc:AlternateContent xmlns:mc="http://schemas.openxmlformats.org/markup-compatibility/2006">
-    <mc:Choice xmlns:p159="http://schemas.microsoft.com/office/powerpoint/2015/09/main" xmlns:p14="http://schemas.microsoft.com/office/powerpoint/2010/main" Requires="p159">
-      <p:transition p14:dur="2000" advClick="1"/>
-    </mc:Choice>
-    <mc:Fallback>
-      <p:transition advClick="1"/>
-    </mc:Fallback>
-  </mc:AlternateContent>
 </p:sld>
 </file>
 
 <file path=ppt/slides/slide4.xml><?xml version="1.0" encoding="utf-8"?>
-<p:sld xmlns:a="http://schemas.openxmlformats.org/drawingml/2006/main" xmlns:r="http://schemas.openxmlformats.org/officeDocument/2006/relationships" xmlns:p="http://schemas.openxmlformats.org/presentationml/2006/main" xmlns:m="http://schemas.openxmlformats.org/officeDocument/2006/math" xmlns:w="http://schemas.openxmlformats.org/wordprocessingml/2006/main" xmlns:mc="http://schemas.openxmlformats.org/markup-compatibility/2006" showMasterPhAnim="0" showMasterSp="1" show="1">
-  <p:cSld name="">
+<p:sld xmlns:a="http://schemas.openxmlformats.org/drawingml/2006/main" xmlns:r="http://schemas.openxmlformats.org/officeDocument/2006/relationships" xmlns:p="http://schemas.openxmlformats.org/presentationml/2006/main" showMasterPhAnim="0">
+  <p:cSld>
     <p:spTree>
       <p:nvGrpSpPr>
         <p:cNvPr id="1" name=""/>
@@ -5271,7 +8776,7 @@
           </p:nvPr>
         </p:nvSpPr>
         <p:spPr bwMode="auto">
-          <a:xfrm flipH="0" flipV="0">
+          <a:xfrm>
             <a:off x="838198" y="1825624"/>
             <a:ext cx="5181599" cy="2800803"/>
           </a:xfrm>
@@ -5284,10 +8789,8 @@
               <a:defRPr/>
             </a:pPr>
             <a:r>
-              <a:rPr/>
               <a:t>IR</a:t>
             </a:r>
-            <a:endParaRPr/>
           </a:p>
         </p:txBody>
       </p:sp>
@@ -5302,7 +8805,7 @@
           </p:nvPr>
         </p:nvSpPr>
         <p:spPr bwMode="auto">
-          <a:xfrm flipH="0" flipV="0">
+          <a:xfrm>
             <a:off x="6172200" y="1825624"/>
             <a:ext cx="5181599" cy="2800803"/>
           </a:xfrm>
@@ -5315,10 +8818,8 @@
               <a:defRPr/>
             </a:pPr>
             <a:r>
-              <a:rPr/>
               <a:t>Lase</a:t>
             </a:r>
-            <a:endParaRPr/>
           </a:p>
         </p:txBody>
       </p:sp>
@@ -5342,7 +8843,7 @@
             </a:pPr>
             <a:fld id="{45E5FCCA-4187-B5C6-F005-FDC694FE9EBA}" type="slidenum">
               <a:rPr lang="fr-FR"/>
-              <a:t/>
+              <a:t>4</a:t>
             </a:fld>
             <a:endParaRPr/>
           </a:p>
@@ -5367,10 +8868,8 @@
               <a:defRPr/>
             </a:pPr>
             <a:r>
-              <a:rPr/>
               <a:t>04/02/2026</a:t>
             </a:r>
-            <a:endParaRPr/>
           </a:p>
         </p:txBody>
       </p:sp>
@@ -5379,20 +8878,12 @@
   <p:clrMapOvr>
     <a:masterClrMapping/>
   </p:clrMapOvr>
-  <mc:AlternateContent xmlns:mc="http://schemas.openxmlformats.org/markup-compatibility/2006">
-    <mc:Choice xmlns:p159="http://schemas.microsoft.com/office/powerpoint/2015/09/main" xmlns:p14="http://schemas.microsoft.com/office/powerpoint/2010/main" Requires="p159">
-      <p:transition p14:dur="2000" advClick="1"/>
-    </mc:Choice>
-    <mc:Fallback>
-      <p:transition advClick="1"/>
-    </mc:Fallback>
-  </mc:AlternateContent>
 </p:sld>
 </file>
 
 <file path=ppt/slides/slide5.xml><?xml version="1.0" encoding="utf-8"?>
-<p:sld xmlns:a="http://schemas.openxmlformats.org/drawingml/2006/main" xmlns:r="http://schemas.openxmlformats.org/officeDocument/2006/relationships" xmlns:p="http://schemas.openxmlformats.org/presentationml/2006/main" xmlns:m="http://schemas.openxmlformats.org/officeDocument/2006/math" xmlns:w="http://schemas.openxmlformats.org/wordprocessingml/2006/main" xmlns:mc="http://schemas.openxmlformats.org/markup-compatibility/2006" showMasterPhAnim="0" showMasterSp="1" show="1">
-  <p:cSld name="">
+<p:sld xmlns:a="http://schemas.openxmlformats.org/drawingml/2006/main" xmlns:r="http://schemas.openxmlformats.org/officeDocument/2006/relationships" xmlns:p="http://schemas.openxmlformats.org/presentationml/2006/main" showMasterPhAnim="0">
+  <p:cSld>
     <p:spTree>
       <p:nvGrpSpPr>
         <p:cNvPr id="1" name=""/>
@@ -5426,10 +8917,8 @@
               <a:defRPr/>
             </a:pPr>
             <a:r>
-              <a:rPr/>
               <a:t>RGB LEDs</a:t>
             </a:r>
-            <a:endParaRPr/>
           </a:p>
         </p:txBody>
       </p:sp>
@@ -5475,7 +8964,7 @@
             </a:pPr>
             <a:fld id="{F041B07B-4BE3-83D6-CBBE-6B3D0E28D179}" type="slidenum">
               <a:rPr lang="fr-FR"/>
-              <a:t/>
+              <a:t>5</a:t>
             </a:fld>
             <a:endParaRPr/>
           </a:p>
@@ -5500,10 +8989,8 @@
               <a:defRPr/>
             </a:pPr>
             <a:r>
-              <a:rPr/>
               <a:t>04/02/2026</a:t>
             </a:r>
-            <a:endParaRPr/>
           </a:p>
         </p:txBody>
       </p:sp>
@@ -5512,20 +8999,12 @@
   <p:clrMapOvr>
     <a:masterClrMapping/>
   </p:clrMapOvr>
-  <mc:AlternateContent xmlns:mc="http://schemas.openxmlformats.org/markup-compatibility/2006">
-    <mc:Choice xmlns:p159="http://schemas.microsoft.com/office/powerpoint/2015/09/main" xmlns:p14="http://schemas.microsoft.com/office/powerpoint/2010/main" Requires="p159">
-      <p:transition p14:dur="2000" advClick="1"/>
-    </mc:Choice>
-    <mc:Fallback>
-      <p:transition advClick="1"/>
-    </mc:Fallback>
-  </mc:AlternateContent>
 </p:sld>
 </file>
 
 <file path=ppt/slides/slide6.xml><?xml version="1.0" encoding="utf-8"?>
-<p:sld xmlns:a="http://schemas.openxmlformats.org/drawingml/2006/main" xmlns:r="http://schemas.openxmlformats.org/officeDocument/2006/relationships" xmlns:p="http://schemas.openxmlformats.org/presentationml/2006/main" xmlns:m="http://schemas.openxmlformats.org/officeDocument/2006/math" xmlns:w="http://schemas.openxmlformats.org/wordprocessingml/2006/main" xmlns:mc="http://schemas.openxmlformats.org/markup-compatibility/2006" showMasterPhAnim="0" showMasterSp="1" show="1">
-  <p:cSld name="">
+<p:sld xmlns:a="http://schemas.openxmlformats.org/drawingml/2006/main" xmlns:r="http://schemas.openxmlformats.org/officeDocument/2006/relationships" xmlns:p="http://schemas.openxmlformats.org/presentationml/2006/main" showMasterPhAnim="0">
+  <p:cSld>
     <p:spTree>
       <p:nvGrpSpPr>
         <p:cNvPr id="1" name=""/>
@@ -5559,10 +9038,8 @@
               <a:defRPr/>
             </a:pPr>
             <a:r>
-              <a:rPr/>
               <a:t>Server stored data</a:t>
             </a:r>
-            <a:endParaRPr/>
           </a:p>
         </p:txBody>
       </p:sp>
@@ -5608,7 +9085,7 @@
             </a:pPr>
             <a:fld id="{9DF27AFD-43EE-4899-356B-57C3E2D3357B}" type="slidenum">
               <a:rPr lang="fr-FR"/>
-              <a:t/>
+              <a:t>6</a:t>
             </a:fld>
             <a:endParaRPr/>
           </a:p>
@@ -5633,10 +9110,8 @@
               <a:defRPr/>
             </a:pPr>
             <a:r>
-              <a:rPr/>
               <a:t>04/02/2026</a:t>
             </a:r>
-            <a:endParaRPr/>
           </a:p>
         </p:txBody>
       </p:sp>
@@ -5645,20 +9120,12 @@
   <p:clrMapOvr>
     <a:masterClrMapping/>
   </p:clrMapOvr>
-  <mc:AlternateContent xmlns:mc="http://schemas.openxmlformats.org/markup-compatibility/2006">
-    <mc:Choice xmlns:p159="http://schemas.microsoft.com/office/powerpoint/2015/09/main" xmlns:p14="http://schemas.microsoft.com/office/powerpoint/2010/main" Requires="p159">
-      <p:transition p14:dur="2000" advClick="1"/>
-    </mc:Choice>
-    <mc:Fallback>
-      <p:transition advClick="1"/>
-    </mc:Fallback>
-  </mc:AlternateContent>
 </p:sld>
 </file>
 
 <file path=ppt/slides/slide7.xml><?xml version="1.0" encoding="utf-8"?>
-<p:sld xmlns:a="http://schemas.openxmlformats.org/drawingml/2006/main" xmlns:r="http://schemas.openxmlformats.org/officeDocument/2006/relationships" xmlns:p="http://schemas.openxmlformats.org/presentationml/2006/main" xmlns:m="http://schemas.openxmlformats.org/officeDocument/2006/math" xmlns:w="http://schemas.openxmlformats.org/wordprocessingml/2006/main" xmlns:mc="http://schemas.openxmlformats.org/markup-compatibility/2006" showMasterPhAnim="0" showMasterSp="1" show="1">
-  <p:cSld name="">
+<p:sld xmlns:a="http://schemas.openxmlformats.org/drawingml/2006/main" xmlns:r="http://schemas.openxmlformats.org/officeDocument/2006/relationships" xmlns:p="http://schemas.openxmlformats.org/presentationml/2006/main" showMasterPhAnim="0">
+  <p:cSld>
     <p:spTree>
       <p:nvGrpSpPr>
         <p:cNvPr id="1" name=""/>
@@ -5692,10 +9159,8 @@
               <a:defRPr/>
             </a:pPr>
             <a:r>
-              <a:rPr/>
               <a:t>Video of functionnality</a:t>
             </a:r>
-            <a:endParaRPr/>
           </a:p>
         </p:txBody>
       </p:sp>
@@ -5729,20 +9194,16 @@
               <a:t>feasibility</a:t>
             </a:r>
             <a:r>
-              <a:rPr/>
               <a:t> of projet</a:t>
             </a:r>
-            <a:endParaRPr/>
-          </a:p>
-          <a:p>
-            <a:pPr>
-              <a:defRPr/>
-            </a:pPr>
-            <a:r>
-              <a:rPr/>
+          </a:p>
+          <a:p>
+            <a:pPr>
+              <a:defRPr/>
+            </a:pPr>
+            <a:r>
               <a:t>(Describing what is happening on the screen)</a:t>
             </a:r>
-            <a:endParaRPr/>
           </a:p>
           <a:p>
             <a:pPr>
@@ -5772,7 +9233,7 @@
             </a:pPr>
             <a:fld id="{D208D9F0-C16A-429C-FBEB-5E3ADF800BBD}" type="slidenum">
               <a:rPr lang="fr-FR"/>
-              <a:t/>
+              <a:t>7</a:t>
             </a:fld>
             <a:endParaRPr/>
           </a:p>
@@ -5797,10 +9258,8 @@
               <a:defRPr/>
             </a:pPr>
             <a:r>
-              <a:rPr/>
               <a:t>04/02/2026</a:t>
             </a:r>
-            <a:endParaRPr/>
           </a:p>
         </p:txBody>
       </p:sp>
@@ -5809,20 +9268,12 @@
   <p:clrMapOvr>
     <a:masterClrMapping/>
   </p:clrMapOvr>
-  <mc:AlternateContent xmlns:mc="http://schemas.openxmlformats.org/markup-compatibility/2006">
-    <mc:Choice xmlns:p159="http://schemas.microsoft.com/office/powerpoint/2015/09/main" xmlns:p14="http://schemas.microsoft.com/office/powerpoint/2010/main" Requires="p159">
-      <p:transition p14:dur="2000" advClick="1"/>
-    </mc:Choice>
-    <mc:Fallback>
-      <p:transition advClick="1"/>
-    </mc:Fallback>
-  </mc:AlternateContent>
 </p:sld>
 </file>
 
 <file path=ppt/slides/slide8.xml><?xml version="1.0" encoding="utf-8"?>
-<p:sld xmlns:a="http://schemas.openxmlformats.org/drawingml/2006/main" xmlns:r="http://schemas.openxmlformats.org/officeDocument/2006/relationships" xmlns:p="http://schemas.openxmlformats.org/presentationml/2006/main" xmlns:m="http://schemas.openxmlformats.org/officeDocument/2006/math" xmlns:w="http://schemas.openxmlformats.org/wordprocessingml/2006/main" xmlns:mc="http://schemas.openxmlformats.org/markup-compatibility/2006" showMasterPhAnim="0" showMasterSp="1" show="1">
-  <p:cSld name="">
+<p:sld xmlns:a="http://schemas.openxmlformats.org/drawingml/2006/main" xmlns:r="http://schemas.openxmlformats.org/officeDocument/2006/relationships" xmlns:p="http://schemas.openxmlformats.org/presentationml/2006/main" showMasterPhAnim="0">
+  <p:cSld>
     <p:spTree>
       <p:nvGrpSpPr>
         <p:cNvPr id="1" name=""/>
@@ -5882,10 +9333,8 @@
               <a:defRPr/>
             </a:pPr>
             <a:r>
-              <a:rPr/>
               <a:t>04/02/2026</a:t>
             </a:r>
-            <a:endParaRPr/>
           </a:p>
         </p:txBody>
       </p:sp>
@@ -5909,7 +9358,7 @@
             </a:pPr>
             <a:fld id="{4159E1E4-1DDC-AAFE-4B0F-AF3554B29A48}" type="slidenum">
               <a:rPr lang="fr-FR"/>
-              <a:t/>
+              <a:t>8</a:t>
             </a:fld>
             <a:endParaRPr lang="fr-FR"/>
           </a:p>
@@ -5920,20 +9369,12 @@
   <p:clrMapOvr>
     <a:masterClrMapping/>
   </p:clrMapOvr>
-  <mc:AlternateContent xmlns:mc="http://schemas.openxmlformats.org/markup-compatibility/2006">
-    <mc:Choice xmlns:p159="http://schemas.microsoft.com/office/powerpoint/2015/09/main" xmlns:p14="http://schemas.microsoft.com/office/powerpoint/2010/main" Requires="p159">
-      <p:transition p14:dur="2000" advClick="1"/>
-    </mc:Choice>
-    <mc:Fallback>
-      <p:transition advClick="1"/>
-    </mc:Fallback>
-  </mc:AlternateContent>
 </p:sld>
 </file>
 
 <file path=ppt/slides/slide9.xml><?xml version="1.0" encoding="utf-8"?>
-<p:sld xmlns:a="http://schemas.openxmlformats.org/drawingml/2006/main" xmlns:r="http://schemas.openxmlformats.org/officeDocument/2006/relationships" xmlns:p="http://schemas.openxmlformats.org/presentationml/2006/main" xmlns:m="http://schemas.openxmlformats.org/officeDocument/2006/math" xmlns:w="http://schemas.openxmlformats.org/wordprocessingml/2006/main" xmlns:mc="http://schemas.openxmlformats.org/markup-compatibility/2006" showMasterPhAnim="0" showMasterSp="1" show="1">
-  <p:cSld name="">
+<p:sld xmlns:a="http://schemas.openxmlformats.org/drawingml/2006/main" xmlns:r="http://schemas.openxmlformats.org/officeDocument/2006/relationships" xmlns:p="http://schemas.openxmlformats.org/presentationml/2006/main" showMasterPhAnim="0">
+  <p:cSld>
     <p:spTree>
       <p:nvGrpSpPr>
         <p:cNvPr id="1" name=""/>
@@ -5993,10 +9434,8 @@
               <a:defRPr/>
             </a:pPr>
             <a:r>
-              <a:rPr/>
               <a:t>04/02/2026</a:t>
             </a:r>
-            <a:endParaRPr/>
           </a:p>
         </p:txBody>
       </p:sp>
@@ -6020,7 +9459,7 @@
             </a:pPr>
             <a:fld id="{1A3A6BC6-A3CF-1FCD-B8B0-A4EF1A24EABF}" type="slidenum">
               <a:rPr lang="fr-FR"/>
-              <a:t/>
+              <a:t>9</a:t>
             </a:fld>
             <a:endParaRPr lang="fr-FR"/>
           </a:p>
@@ -6031,19 +9470,11 @@
   <p:clrMapOvr>
     <a:masterClrMapping/>
   </p:clrMapOvr>
-  <mc:AlternateContent xmlns:mc="http://schemas.openxmlformats.org/markup-compatibility/2006">
-    <mc:Choice xmlns:p159="http://schemas.microsoft.com/office/powerpoint/2015/09/main" xmlns:p14="http://schemas.microsoft.com/office/powerpoint/2010/main" Requires="p159">
-      <p:transition p14:dur="2000" advClick="1"/>
-    </mc:Choice>
-    <mc:Fallback>
-      <p:transition advClick="1"/>
-    </mc:Fallback>
-  </mc:AlternateContent>
 </p:sld>
 </file>
 
 <file path=ppt/theme/theme1.xml><?xml version="1.0" encoding="utf-8"?>
-<a:theme xmlns:a="http://schemas.openxmlformats.org/drawingml/2006/main" xmlns:r="http://schemas.openxmlformats.org/officeDocument/2006/relationships" xmlns:p="http://schemas.openxmlformats.org/presentationml/2006/main" name="Office Theme">
+<a:theme xmlns:a="http://schemas.openxmlformats.org/drawingml/2006/main" name="Office Theme">
   <a:themeElements>
     <a:clrScheme name="New Office">
       <a:dk1>
@@ -6234,11 +9665,12 @@
     </a:fmtScheme>
   </a:themeElements>
   <a:objectDefaults/>
+  <a:extraClrSchemeLst/>
 </a:theme>
 </file>
 
 <file path=ppt/theme/theme2.xml><?xml version="1.0" encoding="utf-8"?>
-<a:theme xmlns:a="http://schemas.openxmlformats.org/drawingml/2006/main" xmlns:r="http://schemas.openxmlformats.org/officeDocument/2006/relationships" xmlns:p="http://schemas.openxmlformats.org/presentationml/2006/main" name="Office Theme">
+<a:theme xmlns:a="http://schemas.openxmlformats.org/drawingml/2006/main" name="Office Theme">
   <a:themeElements>
     <a:clrScheme name="Office">
       <a:dk1>
@@ -6429,5 +9861,6 @@
     </a:fmtScheme>
   </a:themeElements>
   <a:objectDefaults/>
+  <a:extraClrSchemeLst/>
 </a:theme>
 </file>
--- a/CR/Presentation_PFE.pptx
+++ b/CR/Presentation_PFE.pptx
@@ -5,7 +5,7 @@
     <p:sldMasterId id="2147483648" r:id="rId1"/>
   </p:sldMasterIdLst>
   <p:notesMasterIdLst>
-    <p:notesMasterId r:id="rId15"/>
+    <p:notesMasterId r:id="rId16"/>
   </p:notesMasterIdLst>
   <p:sldIdLst>
     <p:sldId id="256" r:id="rId4"/>
@@ -19,6 +19,7 @@
     <p:sldId id="264" r:id="rId12"/>
     <p:sldId id="265" r:id="rId13"/>
     <p:sldId id="266" r:id="rId14"/>
+    <p:sldId id="267" r:id="rId15"/>
   </p:sldIdLst>
   <p:sldSz cx="12192000" cy="6858000"/>
   <p:notesSz cx="6858000" cy="9144000"/>
@@ -144,7 +145,7 @@
       </p:grpSpPr>
       <p:sp>
         <p:nvSpPr>
-          <p:cNvPr id="2015663531" name="Espace réservé d'en-tête 1"/>
+          <p:cNvPr id="2128463302" name="Espace réservé d'en-tête 1"/>
           <p:cNvSpPr>
             <a:spLocks noGrp="1"/>
           </p:cNvSpPr>
@@ -178,7 +179,7 @@
       </p:sp>
       <p:sp>
         <p:nvSpPr>
-          <p:cNvPr id="798792798" name="Espace réservé pour la date 2"/>
+          <p:cNvPr id="1238152498" name="Espace réservé pour la date 2"/>
           <p:cNvSpPr>
             <a:spLocks noGrp="1"/>
           </p:cNvSpPr>
@@ -216,7 +217,7 @@
       </p:sp>
       <p:sp>
         <p:nvSpPr>
-          <p:cNvPr id="875543250" name="Espace réservé pour l'image de la diapositive 3"/>
+          <p:cNvPr id="1588624565" name="Espace réservé pour l'image de la diapositive 3"/>
           <p:cNvSpPr>
             <a:spLocks noChangeAspect="1" noGrp="1" noRot="1"/>
           </p:cNvSpPr>
@@ -252,7 +253,7 @@
       </p:sp>
       <p:sp>
         <p:nvSpPr>
-          <p:cNvPr id="1197618634" name="Remarques Espace réservé 4"/>
+          <p:cNvPr id="1878345429" name="Remarques Espace réservé 4"/>
           <p:cNvSpPr>
             <a:spLocks noGrp="1"/>
           </p:cNvSpPr>
@@ -326,7 +327,7 @@
       </p:sp>
       <p:sp>
         <p:nvSpPr>
-          <p:cNvPr id="737484644" name="Espace réservé du pied de page 5"/>
+          <p:cNvPr id="753105181" name="Espace réservé du pied de page 5"/>
           <p:cNvSpPr>
             <a:spLocks noGrp="1"/>
           </p:cNvSpPr>
@@ -360,7 +361,7 @@
       </p:sp>
       <p:sp>
         <p:nvSpPr>
-          <p:cNvPr id="576544343" name="Espace réservé du numéro de diapositive 6"/>
+          <p:cNvPr id="1262973189" name="Espace réservé du numéro de diapositive 6"/>
           <p:cNvSpPr>
             <a:spLocks noGrp="1"/>
           </p:cNvSpPr>
@@ -514,7 +515,7 @@
       </p:grpSpPr>
       <p:sp>
         <p:nvSpPr>
-          <p:cNvPr id="385896177" name="Espace réservé pour l'image de la diapositive 1"/>
+          <p:cNvPr id="1652278106" name="Espace réservé pour l'image de la diapositive 1"/>
           <p:cNvSpPr>
             <a:spLocks noChangeAspect="1" noGrp="1" noRot="1"/>
           </p:cNvSpPr>
@@ -531,7 +532,7 @@
       </p:sp>
       <p:sp>
         <p:nvSpPr>
-          <p:cNvPr id="1463446305" name="Remarques Espace réservé 2"/>
+          <p:cNvPr id="840015111" name="Remarques Espace réservé 2"/>
           <p:cNvSpPr>
             <a:spLocks noGrp="1"/>
           </p:cNvSpPr>
@@ -556,7 +557,7 @@
       </p:sp>
       <p:sp>
         <p:nvSpPr>
-          <p:cNvPr id="2063530859" name="Espace réservé pour le numéro de diapositive 3"/>
+          <p:cNvPr id="624867096" name="Espace réservé pour le numéro de diapositive 3"/>
           <p:cNvSpPr>
             <a:spLocks noGrp="1"/>
           </p:cNvSpPr>
@@ -607,7 +608,7 @@
       </p:grpSpPr>
       <p:sp>
         <p:nvSpPr>
-          <p:cNvPr id="2" name="Slide Image Placeholder 1"/>
+          <p:cNvPr id="1682178005" name="Slide Image Placeholder 1"/>
           <p:cNvSpPr>
             <a:spLocks noChangeAspect="1" noGrp="1" noRot="1"/>
           </p:cNvSpPr>
@@ -619,7 +620,7 @@
       </p:sp>
       <p:sp>
         <p:nvSpPr>
-          <p:cNvPr id="3" name="Notes Placeholder 2"/>
+          <p:cNvPr id="125420946" name="Notes Placeholder 2"/>
           <p:cNvSpPr>
             <a:spLocks noGrp="1"/>
           </p:cNvSpPr>
@@ -641,7 +642,7 @@
       </p:sp>
       <p:sp>
         <p:nvSpPr>
-          <p:cNvPr id="4" name="Slide Number Placeholder 3"/>
+          <p:cNvPr id="355278959" name="Slide Number Placeholder 3"/>
           <p:cNvSpPr>
             <a:spLocks noGrp="1"/>
           </p:cNvSpPr>
@@ -657,7 +658,7 @@
             <a:pPr>
               <a:defRPr/>
             </a:pPr>
-            <a:fld id="{66022927-5078-EE08-45A7-AD96B8C99A3E}" type="slidenum">
+            <a:fld id="{33A99C6E-1B03-FE2B-1F63-CEFDE5734355}" type="slidenum">
               <a:rPr/>
               <a:t/>
             </a:fld>
@@ -692,7 +693,7 @@
       </p:grpSpPr>
       <p:sp>
         <p:nvSpPr>
-          <p:cNvPr id="2" name="Slide Image Placeholder 1"/>
+          <p:cNvPr id="53974595" name="Slide Image Placeholder 1"/>
           <p:cNvSpPr>
             <a:spLocks noChangeAspect="1" noGrp="1" noRot="1"/>
           </p:cNvSpPr>
@@ -704,7 +705,7 @@
       </p:sp>
       <p:sp>
         <p:nvSpPr>
-          <p:cNvPr id="3" name="Notes Placeholder 2"/>
+          <p:cNvPr id="1022126503" name="Notes Placeholder 2"/>
           <p:cNvSpPr>
             <a:spLocks noGrp="1"/>
           </p:cNvSpPr>
@@ -726,7 +727,92 @@
       </p:sp>
       <p:sp>
         <p:nvSpPr>
-          <p:cNvPr id="4" name="Slide Number Placeholder 3"/>
+          <p:cNvPr id="329397233" name="Slide Number Placeholder 3"/>
+          <p:cNvSpPr>
+            <a:spLocks noGrp="1"/>
+          </p:cNvSpPr>
+          <p:nvPr>
+            <p:ph type="sldNum" sz="quarter" idx="10"/>
+          </p:nvPr>
+        </p:nvSpPr>
+        <p:spPr bwMode="auto"/>
+        <p:txBody>
+          <a:bodyPr/>
+          <a:lstStyle/>
+          <a:p>
+            <a:pPr>
+              <a:defRPr/>
+            </a:pPr>
+            <a:fld id="{66022927-5078-EE08-45A7-AD96B8C99A3E}" type="slidenum">
+              <a:rPr/>
+              <a:t/>
+            </a:fld>
+            <a:endParaRPr/>
+          </a:p>
+        </p:txBody>
+      </p:sp>
+    </p:spTree>
+  </p:cSld>
+  <p:clrMapOvr>
+    <a:masterClrMapping/>
+  </p:clrMapOvr>
+</p:notes>
+</file>
+
+<file path=ppt/notesSlides/notesSlide12.xml><?xml version="1.0" encoding="utf-8"?>
+<p:notes xmlns:a="http://schemas.openxmlformats.org/drawingml/2006/main" xmlns:r="http://schemas.openxmlformats.org/officeDocument/2006/relationships" xmlns:p="http://schemas.openxmlformats.org/presentationml/2006/main" xmlns:m="http://schemas.openxmlformats.org/officeDocument/2006/math" xmlns:w="http://schemas.openxmlformats.org/wordprocessingml/2006/main">
+  <p:cSld name="">
+    <p:spTree>
+      <p:nvGrpSpPr>
+        <p:cNvPr id="1" name=""/>
+        <p:cNvGrpSpPr/>
+        <p:nvPr/>
+      </p:nvGrpSpPr>
+      <p:grpSpPr bwMode="auto">
+        <a:xfrm>
+          <a:off x="0" y="0"/>
+          <a:ext cx="0" cy="0"/>
+          <a:chOff x="0" y="0"/>
+          <a:chExt cx="0" cy="0"/>
+        </a:xfrm>
+      </p:grpSpPr>
+      <p:sp>
+        <p:nvSpPr>
+          <p:cNvPr id="889606506" name="Slide Image Placeholder 1"/>
+          <p:cNvSpPr>
+            <a:spLocks noChangeAspect="1" noGrp="1" noRot="1"/>
+          </p:cNvSpPr>
+          <p:nvPr>
+            <p:ph type="sldImg"/>
+          </p:nvPr>
+        </p:nvSpPr>
+        <p:spPr bwMode="auto"/>
+      </p:sp>
+      <p:sp>
+        <p:nvSpPr>
+          <p:cNvPr id="486591266" name="Notes Placeholder 2"/>
+          <p:cNvSpPr>
+            <a:spLocks noGrp="1"/>
+          </p:cNvSpPr>
+          <p:nvPr>
+            <p:ph type="body" idx="1"/>
+          </p:nvPr>
+        </p:nvSpPr>
+        <p:spPr bwMode="auto"/>
+        <p:txBody>
+          <a:bodyPr/>
+          <a:lstStyle/>
+          <a:p>
+            <a:pPr>
+              <a:defRPr/>
+            </a:pPr>
+            <a:endParaRPr/>
+          </a:p>
+        </p:txBody>
+      </p:sp>
+      <p:sp>
+        <p:nvSpPr>
+          <p:cNvPr id="639475785" name="Slide Number Placeholder 3"/>
           <p:cNvSpPr>
             <a:spLocks noGrp="1"/>
           </p:cNvSpPr>
@@ -777,7 +863,7 @@
       </p:grpSpPr>
       <p:sp>
         <p:nvSpPr>
-          <p:cNvPr id="2093437415" name="Slide Image Placeholder 1"/>
+          <p:cNvPr id="1869631353" name="Slide Image Placeholder 1"/>
           <p:cNvSpPr>
             <a:spLocks noChangeAspect="1" noGrp="1" noRot="1"/>
           </p:cNvSpPr>
@@ -789,7 +875,7 @@
       </p:sp>
       <p:sp>
         <p:nvSpPr>
-          <p:cNvPr id="1322608365" name="Notes Placeholder 2"/>
+          <p:cNvPr id="1954121547" name="Notes Placeholder 2"/>
           <p:cNvSpPr>
             <a:spLocks noGrp="1"/>
           </p:cNvSpPr>
@@ -811,7 +897,7 @@
       </p:sp>
       <p:sp>
         <p:nvSpPr>
-          <p:cNvPr id="1409061653" name="Slide Number Placeholder 3"/>
+          <p:cNvPr id="41677471" name="Slide Number Placeholder 3"/>
           <p:cNvSpPr>
             <a:spLocks noGrp="1"/>
           </p:cNvSpPr>
@@ -862,7 +948,7 @@
       </p:grpSpPr>
       <p:sp>
         <p:nvSpPr>
-          <p:cNvPr id="1106592995" name="Slide Image Placeholder 1"/>
+          <p:cNvPr id="2041983673" name="Slide Image Placeholder 1"/>
           <p:cNvSpPr>
             <a:spLocks noChangeAspect="1" noGrp="1" noRot="1"/>
           </p:cNvSpPr>
@@ -874,7 +960,7 @@
       </p:sp>
       <p:sp>
         <p:nvSpPr>
-          <p:cNvPr id="199673378" name="Notes Placeholder 2"/>
+          <p:cNvPr id="593331175" name="Notes Placeholder 2"/>
           <p:cNvSpPr>
             <a:spLocks noGrp="1"/>
           </p:cNvSpPr>
@@ -896,7 +982,7 @@
       </p:sp>
       <p:sp>
         <p:nvSpPr>
-          <p:cNvPr id="419936914" name="Slide Number Placeholder 3"/>
+          <p:cNvPr id="574993108" name="Slide Number Placeholder 3"/>
           <p:cNvSpPr>
             <a:spLocks noGrp="1"/>
           </p:cNvSpPr>
@@ -947,7 +1033,7 @@
       </p:grpSpPr>
       <p:sp>
         <p:nvSpPr>
-          <p:cNvPr id="1758305178" name="Slide Image Placeholder 1"/>
+          <p:cNvPr id="1755137978" name="Slide Image Placeholder 1"/>
           <p:cNvSpPr>
             <a:spLocks noChangeAspect="1" noGrp="1" noRot="1"/>
           </p:cNvSpPr>
@@ -959,7 +1045,7 @@
       </p:sp>
       <p:sp>
         <p:nvSpPr>
-          <p:cNvPr id="71787967" name="Notes Placeholder 2"/>
+          <p:cNvPr id="1258010222" name="Notes Placeholder 2"/>
           <p:cNvSpPr>
             <a:spLocks noGrp="1"/>
           </p:cNvSpPr>
@@ -981,7 +1067,7 @@
       </p:sp>
       <p:sp>
         <p:nvSpPr>
-          <p:cNvPr id="94379727" name="Slide Number Placeholder 3"/>
+          <p:cNvPr id="768425974" name="Slide Number Placeholder 3"/>
           <p:cNvSpPr>
             <a:spLocks noGrp="1"/>
           </p:cNvSpPr>
@@ -1032,7 +1118,7 @@
       </p:grpSpPr>
       <p:sp>
         <p:nvSpPr>
-          <p:cNvPr id="187116676" name="Slide Image Placeholder 1"/>
+          <p:cNvPr id="2" name="Slide Image Placeholder 1"/>
           <p:cNvSpPr>
             <a:spLocks noChangeAspect="1" noGrp="1" noRot="1"/>
           </p:cNvSpPr>
@@ -1044,7 +1130,7 @@
       </p:sp>
       <p:sp>
         <p:nvSpPr>
-          <p:cNvPr id="77199687" name="Notes Placeholder 2"/>
+          <p:cNvPr id="3" name="Notes Placeholder 2"/>
           <p:cNvSpPr>
             <a:spLocks noGrp="1"/>
           </p:cNvSpPr>
@@ -1066,7 +1152,7 @@
       </p:sp>
       <p:sp>
         <p:nvSpPr>
-          <p:cNvPr id="1990894254" name="Slide Number Placeholder 3"/>
+          <p:cNvPr id="4" name="Slide Number Placeholder 3"/>
           <p:cNvSpPr>
             <a:spLocks noGrp="1"/>
           </p:cNvSpPr>
@@ -1082,7 +1168,7 @@
             <a:pPr>
               <a:defRPr/>
             </a:pPr>
-            <a:fld id="{4CDBE6F6-7276-366D-C2A1-41D736A08596}" type="slidenum">
+            <a:fld id="{90636C0C-A141-4F24-F2E8-5BCA1492A67B}" type="slidenum">
               <a:rPr/>
               <a:t/>
             </a:fld>
@@ -1117,7 +1203,7 @@
       </p:grpSpPr>
       <p:sp>
         <p:nvSpPr>
-          <p:cNvPr id="211657766" name="Slide Image Placeholder 1"/>
+          <p:cNvPr id="60195035" name="Slide Image Placeholder 1"/>
           <p:cNvSpPr>
             <a:spLocks noChangeAspect="1" noGrp="1" noRot="1"/>
           </p:cNvSpPr>
@@ -1129,7 +1215,7 @@
       </p:sp>
       <p:sp>
         <p:nvSpPr>
-          <p:cNvPr id="706899795" name="Notes Placeholder 2"/>
+          <p:cNvPr id="978453481" name="Notes Placeholder 2"/>
           <p:cNvSpPr>
             <a:spLocks noGrp="1"/>
           </p:cNvSpPr>
@@ -1151,7 +1237,7 @@
       </p:sp>
       <p:sp>
         <p:nvSpPr>
-          <p:cNvPr id="947578544" name="Slide Number Placeholder 3"/>
+          <p:cNvPr id="136152076" name="Slide Number Placeholder 3"/>
           <p:cNvSpPr>
             <a:spLocks noGrp="1"/>
           </p:cNvSpPr>
@@ -1202,7 +1288,7 @@
       </p:grpSpPr>
       <p:sp>
         <p:nvSpPr>
-          <p:cNvPr id="242396792" name="Slide Image Placeholder 1"/>
+          <p:cNvPr id="36067969" name="Slide Image Placeholder 1"/>
           <p:cNvSpPr>
             <a:spLocks noChangeAspect="1" noGrp="1" noRot="1"/>
           </p:cNvSpPr>
@@ -1214,7 +1300,7 @@
       </p:sp>
       <p:sp>
         <p:nvSpPr>
-          <p:cNvPr id="1770390964" name="Notes Placeholder 2"/>
+          <p:cNvPr id="1597563962" name="Notes Placeholder 2"/>
           <p:cNvSpPr>
             <a:spLocks noGrp="1"/>
           </p:cNvSpPr>
@@ -1232,11 +1318,27 @@
             </a:pPr>
             <a:endParaRPr/>
           </a:p>
-        </p:txBody>
-      </p:sp>
-      <p:sp>
-        <p:nvSpPr>
-          <p:cNvPr id="1913738802" name="Slide Number Placeholder 3"/>
+          <a:p>
+            <a:pPr>
+              <a:defRPr/>
+            </a:pPr>
+            <a:endParaRPr/>
+          </a:p>
+          <a:p>
+            <a:pPr>
+              <a:defRPr/>
+            </a:pPr>
+            <a:r>
+              <a:rPr lang="fr-FR"/>
+              <a:t>.</a:t>
+            </a:r>
+            <a:endParaRPr/>
+          </a:p>
+        </p:txBody>
+      </p:sp>
+      <p:sp>
+        <p:nvSpPr>
+          <p:cNvPr id="468591994" name="Slide Number Placeholder 3"/>
           <p:cNvSpPr>
             <a:spLocks noGrp="1"/>
           </p:cNvSpPr>
@@ -1252,7 +1354,7 @@
             <a:pPr>
               <a:defRPr/>
             </a:pPr>
-            <a:fld id="{9A4266D5-73A1-54C4-04CE-D4B3E2B50860}" type="slidenum">
+            <a:fld id="{4CDBE6F6-7276-366D-C2A1-41D736A08596}" type="slidenum">
               <a:rPr/>
               <a:t/>
             </a:fld>
@@ -1287,7 +1389,7 @@
       </p:grpSpPr>
       <p:sp>
         <p:nvSpPr>
-          <p:cNvPr id="2" name="Slide Image Placeholder 1"/>
+          <p:cNvPr id="686757556" name="Slide Image Placeholder 1"/>
           <p:cNvSpPr>
             <a:spLocks noChangeAspect="1" noGrp="1" noRot="1"/>
           </p:cNvSpPr>
@@ -1299,7 +1401,7 @@
       </p:sp>
       <p:sp>
         <p:nvSpPr>
-          <p:cNvPr id="3" name="Notes Placeholder 2"/>
+          <p:cNvPr id="268628443" name="Notes Placeholder 2"/>
           <p:cNvSpPr>
             <a:spLocks noGrp="1"/>
           </p:cNvSpPr>
@@ -1321,7 +1423,7 @@
       </p:sp>
       <p:sp>
         <p:nvSpPr>
-          <p:cNvPr id="4" name="Slide Number Placeholder 3"/>
+          <p:cNvPr id="1715416610" name="Slide Number Placeholder 3"/>
           <p:cNvSpPr>
             <a:spLocks noGrp="1"/>
           </p:cNvSpPr>
@@ -1337,7 +1439,7 @@
             <a:pPr>
               <a:defRPr/>
             </a:pPr>
-            <a:fld id="{C7364DD0-CA69-29AB-DE81-FDF42785DA1D}" type="slidenum">
+            <a:fld id="{9A4266D5-73A1-54C4-04CE-D4B3E2B50860}" type="slidenum">
               <a:rPr/>
               <a:t/>
             </a:fld>
@@ -1372,7 +1474,7 @@
       </p:grpSpPr>
       <p:sp>
         <p:nvSpPr>
-          <p:cNvPr id="2" name="Slide Image Placeholder 1"/>
+          <p:cNvPr id="1656147949" name="Slide Image Placeholder 1"/>
           <p:cNvSpPr>
             <a:spLocks noChangeAspect="1" noGrp="1" noRot="1"/>
           </p:cNvSpPr>
@@ -1384,7 +1486,7 @@
       </p:sp>
       <p:sp>
         <p:nvSpPr>
-          <p:cNvPr id="3" name="Notes Placeholder 2"/>
+          <p:cNvPr id="166990969" name="Notes Placeholder 2"/>
           <p:cNvSpPr>
             <a:spLocks noGrp="1"/>
           </p:cNvSpPr>
@@ -1406,7 +1508,7 @@
       </p:sp>
       <p:sp>
         <p:nvSpPr>
-          <p:cNvPr id="4" name="Slide Number Placeholder 3"/>
+          <p:cNvPr id="380093423" name="Slide Number Placeholder 3"/>
           <p:cNvSpPr>
             <a:spLocks noGrp="1"/>
           </p:cNvSpPr>
@@ -1422,7 +1524,7 @@
             <a:pPr>
               <a:defRPr/>
             </a:pPr>
-            <a:fld id="{33A99C6E-1B03-FE2B-1F63-CEFDE5734355}" type="slidenum">
+            <a:fld id="{C7364DD0-CA69-29AB-DE81-FDF42785DA1D}" type="slidenum">
               <a:rPr/>
               <a:t/>
             </a:fld>
@@ -1457,7 +1559,7 @@
       </p:grpSpPr>
       <p:sp>
         <p:nvSpPr>
-          <p:cNvPr id="1662048293" name="Titre 1"/>
+          <p:cNvPr id="1683512492" name="Titre 1"/>
           <p:cNvSpPr>
             <a:spLocks noGrp="1"/>
           </p:cNvSpPr>
@@ -1492,7 +1594,7 @@
       </p:sp>
       <p:sp>
         <p:nvSpPr>
-          <p:cNvPr id="1240399984" name="Sous-titre 2"/>
+          <p:cNvPr id="1216109522" name="Sous-titre 2"/>
           <p:cNvSpPr>
             <a:spLocks noGrp="1"/>
           </p:cNvSpPr>
@@ -1560,7 +1662,7 @@
       </p:sp>
       <p:sp>
         <p:nvSpPr>
-          <p:cNvPr id="1490822102" name="Espace réservé de la date 3"/>
+          <p:cNvPr id="99306960" name="Espace réservé de la date 3"/>
           <p:cNvSpPr>
             <a:spLocks noGrp="1"/>
           </p:cNvSpPr>
@@ -1586,7 +1688,7 @@
       </p:sp>
       <p:sp>
         <p:nvSpPr>
-          <p:cNvPr id="705500784" name="Espace réservé du pied de page 4"/>
+          <p:cNvPr id="1290294816" name="Espace réservé du pied de page 4"/>
           <p:cNvSpPr>
             <a:spLocks noGrp="1"/>
           </p:cNvSpPr>
@@ -1608,7 +1710,7 @@
       </p:sp>
       <p:sp>
         <p:nvSpPr>
-          <p:cNvPr id="1554814798" name="Espace réservé du numéro de diapositive 5"/>
+          <p:cNvPr id="1721691789" name="Espace réservé du numéro de diapositive 5"/>
           <p:cNvSpPr>
             <a:spLocks noGrp="1"/>
           </p:cNvSpPr>
@@ -1659,7 +1761,7 @@
       </p:grpSpPr>
       <p:sp>
         <p:nvSpPr>
-          <p:cNvPr id="1303618059" name="Titre 1"/>
+          <p:cNvPr id="1960993687" name="Titre 1"/>
           <p:cNvSpPr>
             <a:spLocks noGrp="1"/>
           </p:cNvSpPr>
@@ -1685,7 +1787,7 @@
       </p:sp>
       <p:sp>
         <p:nvSpPr>
-          <p:cNvPr id="1892458327" name="Espace réservé du texte vertical 2"/>
+          <p:cNvPr id="1433729812" name="Espace réservé du texte vertical 2"/>
           <p:cNvSpPr>
             <a:spLocks noGrp="1"/>
           </p:cNvSpPr>
@@ -1751,7 +1853,7 @@
       </p:sp>
       <p:sp>
         <p:nvSpPr>
-          <p:cNvPr id="327774536" name="Espace réservé de la date 3"/>
+          <p:cNvPr id="1899957937" name="Espace réservé de la date 3"/>
           <p:cNvSpPr>
             <a:spLocks noGrp="1"/>
           </p:cNvSpPr>
@@ -1777,7 +1879,7 @@
       </p:sp>
       <p:sp>
         <p:nvSpPr>
-          <p:cNvPr id="1122112209" name="Espace réservé du pied de page 4"/>
+          <p:cNvPr id="342442691" name="Espace réservé du pied de page 4"/>
           <p:cNvSpPr>
             <a:spLocks noGrp="1"/>
           </p:cNvSpPr>
@@ -1799,7 +1901,7 @@
       </p:sp>
       <p:sp>
         <p:nvSpPr>
-          <p:cNvPr id="2139899662" name="Espace réservé du numéro de diapositive 5"/>
+          <p:cNvPr id="1214608096" name="Espace réservé du numéro de diapositive 5"/>
           <p:cNvSpPr>
             <a:spLocks noGrp="1"/>
           </p:cNvSpPr>
@@ -1850,7 +1952,7 @@
       </p:grpSpPr>
       <p:sp>
         <p:nvSpPr>
-          <p:cNvPr id="939972882" name="Titre vertical 1"/>
+          <p:cNvPr id="231631216" name="Titre vertical 1"/>
           <p:cNvSpPr>
             <a:spLocks noGrp="1"/>
           </p:cNvSpPr>
@@ -1881,7 +1983,7 @@
       </p:sp>
       <p:sp>
         <p:nvSpPr>
-          <p:cNvPr id="1963219987" name="Espace réservé du texte vertical 2"/>
+          <p:cNvPr id="1173988550" name="Espace réservé du texte vertical 2"/>
           <p:cNvSpPr>
             <a:spLocks noGrp="1"/>
           </p:cNvSpPr>
@@ -1952,7 +2054,7 @@
       </p:sp>
       <p:sp>
         <p:nvSpPr>
-          <p:cNvPr id="380805657" name="Espace réservé de la date 3"/>
+          <p:cNvPr id="804566604" name="Espace réservé de la date 3"/>
           <p:cNvSpPr>
             <a:spLocks noGrp="1"/>
           </p:cNvSpPr>
@@ -1978,7 +2080,7 @@
       </p:sp>
       <p:sp>
         <p:nvSpPr>
-          <p:cNvPr id="116931734" name="Espace réservé du pied de page 4"/>
+          <p:cNvPr id="626555013" name="Espace réservé du pied de page 4"/>
           <p:cNvSpPr>
             <a:spLocks noGrp="1"/>
           </p:cNvSpPr>
@@ -2000,7 +2102,7 @@
       </p:sp>
       <p:sp>
         <p:nvSpPr>
-          <p:cNvPr id="1490729509" name="Espace réservé du numéro de diapositive 5"/>
+          <p:cNvPr id="93878471" name="Espace réservé du numéro de diapositive 5"/>
           <p:cNvSpPr>
             <a:spLocks noGrp="1"/>
           </p:cNvSpPr>
@@ -2051,7 +2153,7 @@
       </p:grpSpPr>
       <p:sp>
         <p:nvSpPr>
-          <p:cNvPr id="1202145746" name="Titre 1"/>
+          <p:cNvPr id="46343955" name="Titre 1"/>
           <p:cNvSpPr>
             <a:spLocks noGrp="1"/>
           </p:cNvSpPr>
@@ -2077,7 +2179,7 @@
       </p:sp>
       <p:sp>
         <p:nvSpPr>
-          <p:cNvPr id="1150628727" name="Espace réservé du contenu 2"/>
+          <p:cNvPr id="725973378" name="Espace réservé du contenu 2"/>
           <p:cNvSpPr>
             <a:spLocks noGrp="1"/>
           </p:cNvSpPr>
@@ -2143,7 +2245,7 @@
       </p:sp>
       <p:sp>
         <p:nvSpPr>
-          <p:cNvPr id="924422811" name="Espace réservé de la date 3"/>
+          <p:cNvPr id="841811924" name="Espace réservé de la date 3"/>
           <p:cNvSpPr>
             <a:spLocks noGrp="1"/>
           </p:cNvSpPr>
@@ -2169,7 +2271,7 @@
       </p:sp>
       <p:sp>
         <p:nvSpPr>
-          <p:cNvPr id="758706057" name="Espace réservé du pied de page 4"/>
+          <p:cNvPr id="1637772309" name="Espace réservé du pied de page 4"/>
           <p:cNvSpPr>
             <a:spLocks noGrp="1"/>
           </p:cNvSpPr>
@@ -2191,7 +2293,7 @@
       </p:sp>
       <p:sp>
         <p:nvSpPr>
-          <p:cNvPr id="99374381" name="Espace réservé du numéro de diapositive 5"/>
+          <p:cNvPr id="1516366583" name="Espace réservé du numéro de diapositive 5"/>
           <p:cNvSpPr>
             <a:spLocks noGrp="1"/>
           </p:cNvSpPr>
@@ -2242,7 +2344,7 @@
       </p:grpSpPr>
       <p:sp>
         <p:nvSpPr>
-          <p:cNvPr id="267965318" name="Titre 1"/>
+          <p:cNvPr id="1565630997" name="Titre 1"/>
           <p:cNvSpPr>
             <a:spLocks noGrp="1"/>
           </p:cNvSpPr>
@@ -2277,7 +2379,7 @@
       </p:sp>
       <p:sp>
         <p:nvSpPr>
-          <p:cNvPr id="1871778658" name="Espace réservé du texte 2"/>
+          <p:cNvPr id="1940697875" name="Espace réservé du texte 2"/>
           <p:cNvSpPr>
             <a:spLocks noGrp="1"/>
           </p:cNvSpPr>
@@ -2399,7 +2501,7 @@
       </p:sp>
       <p:sp>
         <p:nvSpPr>
-          <p:cNvPr id="145032999" name="Espace réservé de la date 3"/>
+          <p:cNvPr id="469544301" name="Espace réservé de la date 3"/>
           <p:cNvSpPr>
             <a:spLocks noGrp="1"/>
           </p:cNvSpPr>
@@ -2425,7 +2527,7 @@
       </p:sp>
       <p:sp>
         <p:nvSpPr>
-          <p:cNvPr id="1166769557" name="Espace réservé du pied de page 4"/>
+          <p:cNvPr id="1778562157" name="Espace réservé du pied de page 4"/>
           <p:cNvSpPr>
             <a:spLocks noGrp="1"/>
           </p:cNvSpPr>
@@ -2447,7 +2549,7 @@
       </p:sp>
       <p:sp>
         <p:nvSpPr>
-          <p:cNvPr id="2103933166" name="Espace réservé du numéro de diapositive 5"/>
+          <p:cNvPr id="1504657571" name="Espace réservé du numéro de diapositive 5"/>
           <p:cNvSpPr>
             <a:spLocks noGrp="1"/>
           </p:cNvSpPr>
@@ -2498,7 +2600,7 @@
       </p:grpSpPr>
       <p:sp>
         <p:nvSpPr>
-          <p:cNvPr id="2107239229" name="Titre 1"/>
+          <p:cNvPr id="1466105429" name="Titre 1"/>
           <p:cNvSpPr>
             <a:spLocks noGrp="1"/>
           </p:cNvSpPr>
@@ -2524,7 +2626,7 @@
       </p:sp>
       <p:sp>
         <p:nvSpPr>
-          <p:cNvPr id="830757372" name="Espace réservé du contenu 2"/>
+          <p:cNvPr id="668102972" name="Espace réservé du contenu 2"/>
           <p:cNvSpPr>
             <a:spLocks noGrp="1"/>
           </p:cNvSpPr>
@@ -2595,7 +2697,7 @@
       </p:sp>
       <p:sp>
         <p:nvSpPr>
-          <p:cNvPr id="1563831490" name="Espace réservé du contenu 3"/>
+          <p:cNvPr id="1950478841" name="Espace réservé du contenu 3"/>
           <p:cNvSpPr>
             <a:spLocks noGrp="1"/>
           </p:cNvSpPr>
@@ -2666,7 +2768,7 @@
       </p:sp>
       <p:sp>
         <p:nvSpPr>
-          <p:cNvPr id="480071126" name="Espace réservé de la date 4"/>
+          <p:cNvPr id="1314838564" name="Espace réservé de la date 4"/>
           <p:cNvSpPr>
             <a:spLocks noGrp="1"/>
           </p:cNvSpPr>
@@ -2692,7 +2794,7 @@
       </p:sp>
       <p:sp>
         <p:nvSpPr>
-          <p:cNvPr id="1895661296" name="Espace réservé du pied de page 5"/>
+          <p:cNvPr id="683084425" name="Espace réservé du pied de page 5"/>
           <p:cNvSpPr>
             <a:spLocks noGrp="1"/>
           </p:cNvSpPr>
@@ -2714,7 +2816,7 @@
       </p:sp>
       <p:sp>
         <p:nvSpPr>
-          <p:cNvPr id="1055577025" name="Espace réservé du numéro de diapositive 6"/>
+          <p:cNvPr id="227372212" name="Espace réservé du numéro de diapositive 6"/>
           <p:cNvSpPr>
             <a:spLocks noGrp="1"/>
           </p:cNvSpPr>
@@ -2765,7 +2867,7 @@
       </p:grpSpPr>
       <p:sp>
         <p:nvSpPr>
-          <p:cNvPr id="1397155316" name="Titre 1"/>
+          <p:cNvPr id="1492702997" name="Titre 1"/>
           <p:cNvSpPr>
             <a:spLocks noGrp="1"/>
           </p:cNvSpPr>
@@ -2796,7 +2898,7 @@
       </p:sp>
       <p:sp>
         <p:nvSpPr>
-          <p:cNvPr id="1651647358" name="Espace réservé du texte 2"/>
+          <p:cNvPr id="1267249527" name="Espace réservé du texte 2"/>
           <p:cNvSpPr>
             <a:spLocks noGrp="1"/>
           </p:cNvSpPr>
@@ -2864,7 +2966,7 @@
       </p:sp>
       <p:sp>
         <p:nvSpPr>
-          <p:cNvPr id="1400436157" name="Espace réservé du contenu 3"/>
+          <p:cNvPr id="106020727" name="Espace réservé du contenu 3"/>
           <p:cNvSpPr>
             <a:spLocks noGrp="1"/>
           </p:cNvSpPr>
@@ -2935,7 +3037,7 @@
       </p:sp>
       <p:sp>
         <p:nvSpPr>
-          <p:cNvPr id="1995070145" name="Espace réservé du texte 4"/>
+          <p:cNvPr id="2071568336" name="Espace réservé du texte 4"/>
           <p:cNvSpPr>
             <a:spLocks noGrp="1"/>
           </p:cNvSpPr>
@@ -3003,7 +3105,7 @@
       </p:sp>
       <p:sp>
         <p:nvSpPr>
-          <p:cNvPr id="1561444073" name="Espace réservé du contenu 5"/>
+          <p:cNvPr id="635586545" name="Espace réservé du contenu 5"/>
           <p:cNvSpPr>
             <a:spLocks noGrp="1"/>
           </p:cNvSpPr>
@@ -3074,7 +3176,7 @@
       </p:sp>
       <p:sp>
         <p:nvSpPr>
-          <p:cNvPr id="97026910" name="Espace réservé de la date 6"/>
+          <p:cNvPr id="1026786876" name="Espace réservé de la date 6"/>
           <p:cNvSpPr>
             <a:spLocks noGrp="1"/>
           </p:cNvSpPr>
@@ -3100,7 +3202,7 @@
       </p:sp>
       <p:sp>
         <p:nvSpPr>
-          <p:cNvPr id="1144942243" name="Espace réservé du pied de page 7"/>
+          <p:cNvPr id="622294265" name="Espace réservé du pied de page 7"/>
           <p:cNvSpPr>
             <a:spLocks noGrp="1"/>
           </p:cNvSpPr>
@@ -3122,7 +3224,7 @@
       </p:sp>
       <p:sp>
         <p:nvSpPr>
-          <p:cNvPr id="1827100226" name="Espace réservé du numéro de diapositive 8"/>
+          <p:cNvPr id="388807381" name="Espace réservé du numéro de diapositive 8"/>
           <p:cNvSpPr>
             <a:spLocks noGrp="1"/>
           </p:cNvSpPr>
@@ -3173,7 +3275,7 @@
       </p:grpSpPr>
       <p:sp>
         <p:nvSpPr>
-          <p:cNvPr id="1062260299" name="Titre 1"/>
+          <p:cNvPr id="1757816934" name="Titre 1"/>
           <p:cNvSpPr>
             <a:spLocks noGrp="1"/>
           </p:cNvSpPr>
@@ -3199,7 +3301,7 @@
       </p:sp>
       <p:sp>
         <p:nvSpPr>
-          <p:cNvPr id="610753270" name="Espace réservé de la date 2"/>
+          <p:cNvPr id="861319340" name="Espace réservé de la date 2"/>
           <p:cNvSpPr>
             <a:spLocks noGrp="1"/>
           </p:cNvSpPr>
@@ -3225,7 +3327,7 @@
       </p:sp>
       <p:sp>
         <p:nvSpPr>
-          <p:cNvPr id="1410394645" name="Espace réservé du pied de page 3"/>
+          <p:cNvPr id="266374064" name="Espace réservé du pied de page 3"/>
           <p:cNvSpPr>
             <a:spLocks noGrp="1"/>
           </p:cNvSpPr>
@@ -3247,7 +3349,7 @@
       </p:sp>
       <p:sp>
         <p:nvSpPr>
-          <p:cNvPr id="398827524" name="Espace réservé du numéro de diapositive 4"/>
+          <p:cNvPr id="23023009" name="Espace réservé du numéro de diapositive 4"/>
           <p:cNvSpPr>
             <a:spLocks noGrp="1"/>
           </p:cNvSpPr>
@@ -3298,7 +3400,7 @@
       </p:grpSpPr>
       <p:sp>
         <p:nvSpPr>
-          <p:cNvPr id="1352240291" name="Espace réservé de la date 1"/>
+          <p:cNvPr id="1701295770" name="Espace réservé de la date 1"/>
           <p:cNvSpPr>
             <a:spLocks noGrp="1"/>
           </p:cNvSpPr>
@@ -3324,7 +3426,7 @@
       </p:sp>
       <p:sp>
         <p:nvSpPr>
-          <p:cNvPr id="836989763" name="Espace réservé du pied de page 2"/>
+          <p:cNvPr id="1616733575" name="Espace réservé du pied de page 2"/>
           <p:cNvSpPr>
             <a:spLocks noGrp="1"/>
           </p:cNvSpPr>
@@ -3346,7 +3448,7 @@
       </p:sp>
       <p:sp>
         <p:nvSpPr>
-          <p:cNvPr id="946750421" name="Espace réservé du numéro de diapositive 3"/>
+          <p:cNvPr id="536911997" name="Espace réservé du numéro de diapositive 3"/>
           <p:cNvSpPr>
             <a:spLocks noGrp="1"/>
           </p:cNvSpPr>
@@ -3397,7 +3499,7 @@
       </p:grpSpPr>
       <p:sp>
         <p:nvSpPr>
-          <p:cNvPr id="1724930880" name="Titre 1"/>
+          <p:cNvPr id="1793600383" name="Titre 1"/>
           <p:cNvSpPr>
             <a:spLocks noGrp="1"/>
           </p:cNvSpPr>
@@ -3432,7 +3534,7 @@
       </p:sp>
       <p:sp>
         <p:nvSpPr>
-          <p:cNvPr id="879073902" name="Espace réservé du contenu 2"/>
+          <p:cNvPr id="2126280210" name="Espace réservé du contenu 2"/>
           <p:cNvSpPr>
             <a:spLocks noGrp="1"/>
           </p:cNvSpPr>
@@ -3531,7 +3633,7 @@
       </p:sp>
       <p:sp>
         <p:nvSpPr>
-          <p:cNvPr id="1651204453" name="Espace réservé du texte 3"/>
+          <p:cNvPr id="2058330930" name="Espace réservé du texte 3"/>
           <p:cNvSpPr>
             <a:spLocks noGrp="1"/>
           </p:cNvSpPr>
@@ -3599,7 +3701,7 @@
       </p:sp>
       <p:sp>
         <p:nvSpPr>
-          <p:cNvPr id="454302228" name="Espace réservé de la date 4"/>
+          <p:cNvPr id="408373664" name="Espace réservé de la date 4"/>
           <p:cNvSpPr>
             <a:spLocks noGrp="1"/>
           </p:cNvSpPr>
@@ -3625,7 +3727,7 @@
       </p:sp>
       <p:sp>
         <p:nvSpPr>
-          <p:cNvPr id="2050689378" name="Espace réservé du pied de page 5"/>
+          <p:cNvPr id="2131235572" name="Espace réservé du pied de page 5"/>
           <p:cNvSpPr>
             <a:spLocks noGrp="1"/>
           </p:cNvSpPr>
@@ -3647,7 +3749,7 @@
       </p:sp>
       <p:sp>
         <p:nvSpPr>
-          <p:cNvPr id="791696313" name="Espace réservé du numéro de diapositive 6"/>
+          <p:cNvPr id="466771879" name="Espace réservé du numéro de diapositive 6"/>
           <p:cNvSpPr>
             <a:spLocks noGrp="1"/>
           </p:cNvSpPr>
@@ -3698,7 +3800,7 @@
       </p:grpSpPr>
       <p:sp>
         <p:nvSpPr>
-          <p:cNvPr id="422316497" name="Titre 1"/>
+          <p:cNvPr id="813432443" name="Titre 1"/>
           <p:cNvSpPr>
             <a:spLocks noGrp="1"/>
           </p:cNvSpPr>
@@ -3733,7 +3835,7 @@
       </p:sp>
       <p:sp>
         <p:nvSpPr>
-          <p:cNvPr id="1931571289" name="Espace réservé pour une image 2"/>
+          <p:cNvPr id="1851571280" name="Espace réservé pour une image 2"/>
           <p:cNvSpPr>
             <a:spLocks noChangeAspect="1" noGrp="1"/>
           </p:cNvSpPr>
@@ -3801,7 +3903,7 @@
       </p:sp>
       <p:sp>
         <p:nvSpPr>
-          <p:cNvPr id="326188886" name="Espace réservé du texte 3"/>
+          <p:cNvPr id="623502358" name="Espace réservé du texte 3"/>
           <p:cNvSpPr>
             <a:spLocks noGrp="1"/>
           </p:cNvSpPr>
@@ -3869,7 +3971,7 @@
       </p:sp>
       <p:sp>
         <p:nvSpPr>
-          <p:cNvPr id="859907290" name="Espace réservé de la date 4"/>
+          <p:cNvPr id="310511157" name="Espace réservé de la date 4"/>
           <p:cNvSpPr>
             <a:spLocks noGrp="1"/>
           </p:cNvSpPr>
@@ -3895,7 +3997,7 @@
       </p:sp>
       <p:sp>
         <p:nvSpPr>
-          <p:cNvPr id="1933874769" name="Espace réservé du pied de page 5"/>
+          <p:cNvPr id="607177604" name="Espace réservé du pied de page 5"/>
           <p:cNvSpPr>
             <a:spLocks noGrp="1"/>
           </p:cNvSpPr>
@@ -3917,7 +4019,7 @@
       </p:sp>
       <p:sp>
         <p:nvSpPr>
-          <p:cNvPr id="218975890" name="Espace réservé du numéro de diapositive 6"/>
+          <p:cNvPr id="1716130647" name="Espace réservé du numéro de diapositive 6"/>
           <p:cNvSpPr>
             <a:spLocks noGrp="1"/>
           </p:cNvSpPr>
@@ -3973,7 +4075,7 @@
       </p:grpSpPr>
       <p:sp>
         <p:nvSpPr>
-          <p:cNvPr id="1310574221" name="Espace réservé du titre 1"/>
+          <p:cNvPr id="492235718" name="Espace réservé du titre 1"/>
           <p:cNvSpPr>
             <a:spLocks noGrp="1"/>
           </p:cNvSpPr>
@@ -4009,7 +4111,7 @@
       </p:sp>
       <p:sp>
         <p:nvSpPr>
-          <p:cNvPr id="1505348625" name="Espace réservé du texte 2"/>
+          <p:cNvPr id="534894626" name="Espace réservé du texte 2"/>
           <p:cNvSpPr>
             <a:spLocks noGrp="1"/>
           </p:cNvSpPr>
@@ -4085,7 +4187,7 @@
       </p:sp>
       <p:sp>
         <p:nvSpPr>
-          <p:cNvPr id="1617478620" name="Espace réservé de la date 3"/>
+          <p:cNvPr id="2071193027" name="Espace réservé de la date 3"/>
           <p:cNvSpPr>
             <a:spLocks noGrp="1"/>
           </p:cNvSpPr>
@@ -4129,7 +4231,7 @@
       </p:sp>
       <p:sp>
         <p:nvSpPr>
-          <p:cNvPr id="1067707036" name="Espace réservé du pied de page 4"/>
+          <p:cNvPr id="2121387355" name="Espace réservé du pied de page 4"/>
           <p:cNvSpPr>
             <a:spLocks noGrp="1"/>
           </p:cNvSpPr>
@@ -4169,7 +4271,7 @@
       </p:sp>
       <p:sp>
         <p:nvSpPr>
-          <p:cNvPr id="1333560205" name="Espace réservé du numéro de diapositive 5"/>
+          <p:cNvPr id="8272115" name="Espace réservé du numéro de diapositive 5"/>
           <p:cNvSpPr>
             <a:spLocks noGrp="1"/>
           </p:cNvSpPr>
@@ -4530,7 +4632,7 @@
       </p:grpSpPr>
       <p:sp>
         <p:nvSpPr>
-          <p:cNvPr id="599145806" name="Title 1"/>
+          <p:cNvPr id="1255776247" name="Title 1"/>
           <p:cNvSpPr>
             <a:spLocks noGrp="1"/>
           </p:cNvSpPr>
@@ -4561,7 +4663,7 @@
       </p:sp>
       <p:sp>
         <p:nvSpPr>
-          <p:cNvPr id="746195870" name="Subtitle 2"/>
+          <p:cNvPr id="316090562" name="Subtitle 2"/>
           <p:cNvSpPr>
             <a:spLocks noGrp="1"/>
           </p:cNvSpPr>
@@ -4592,7 +4694,7 @@
       </p:sp>
       <p:sp>
         <p:nvSpPr>
-          <p:cNvPr id="1971701423" name="Espace réservé du numéro de diapositive 5"/>
+          <p:cNvPr id="1221779499" name="Espace réservé du numéro de diapositive 5"/>
           <p:cNvSpPr>
             <a:spLocks noGrp="1"/>
           </p:cNvSpPr>
@@ -4618,7 +4720,7 @@
       </p:sp>
       <p:sp>
         <p:nvSpPr>
-          <p:cNvPr id="2135210665" name="Espace réservé de la date 3"/>
+          <p:cNvPr id="1058201927" name="Espace réservé de la date 3"/>
           <p:cNvSpPr>
             <a:spLocks noGrp="1"/>
           </p:cNvSpPr>
@@ -4644,7 +4746,7 @@
       </p:sp>
       <p:pic>
         <p:nvPicPr>
-          <p:cNvPr id="59867102" name=""/>
+          <p:cNvPr id="714298522" name=""/>
           <p:cNvPicPr>
             <a:picLocks noChangeAspect="1"/>
           </p:cNvPicPr>
@@ -4699,7 +4801,7 @@
       </p:grpSpPr>
       <p:sp>
         <p:nvSpPr>
-          <p:cNvPr id="1665362919" name="Titre 1"/>
+          <p:cNvPr id="1615217383" name="Titre 1"/>
           <p:cNvSpPr>
             <a:spLocks noGrp="1"/>
           </p:cNvSpPr>
@@ -4716,23 +4818,16 @@
               <a:defRPr/>
             </a:pPr>
             <a:r>
-              <a:rPr lang="fr-FR" sz="4400" b="0" i="0" u="none" strike="noStrike" cap="none" spc="0">
-                <a:solidFill>
-                  <a:schemeClr val="tx1"/>
-                </a:solidFill>
-                <a:latin typeface="+mj-lt"/>
-                <a:ea typeface="+mj-ea"/>
-                <a:cs typeface="+mj-cs"/>
-              </a:rPr>
-              <a:t>Exemple of code #2</a:t>
-            </a:r>
-            <a:endParaRPr/>
-          </a:p>
-        </p:txBody>
-      </p:sp>
-      <p:sp>
-        <p:nvSpPr>
-          <p:cNvPr id="1777033340" name="Espace réservé de la date 2"/>
+              <a:rPr lang="fr-FR"/>
+              <a:t>Exemple of code #1</a:t>
+            </a:r>
+            <a:endParaRPr/>
+          </a:p>
+        </p:txBody>
+      </p:sp>
+      <p:sp>
+        <p:nvSpPr>
+          <p:cNvPr id="1601686499" name="Espace réservé de la date 2"/>
           <p:cNvSpPr>
             <a:spLocks noGrp="1"/>
           </p:cNvSpPr>
@@ -4758,7 +4853,7 @@
       </p:sp>
       <p:sp>
         <p:nvSpPr>
-          <p:cNvPr id="1183545330" name="Espace réservé du numéro de diapositive 4"/>
+          <p:cNvPr id="711914420" name="Espace réservé du numéro de diapositive 4"/>
           <p:cNvSpPr>
             <a:spLocks noGrp="1"/>
           </p:cNvSpPr>
@@ -4774,7 +4869,7 @@
             <a:pPr>
               <a:defRPr/>
             </a:pPr>
-            <a:fld id="{43049145-3055-3470-E904-AF1360FED3B1}" type="slidenum">
+            <a:fld id="{1A3A6BC6-A3CF-1FCD-B8B0-A4EF1A24EABF}" type="slidenum">
               <a:rPr lang="fr-FR"/>
               <a:t/>
             </a:fld>
@@ -4817,7 +4912,125 @@
       </p:grpSpPr>
       <p:sp>
         <p:nvSpPr>
-          <p:cNvPr id="689577517" name="Titre 1"/>
+          <p:cNvPr id="259592955" name="Titre 1"/>
+          <p:cNvSpPr>
+            <a:spLocks noGrp="1"/>
+          </p:cNvSpPr>
+          <p:nvPr>
+            <p:ph type="title"/>
+          </p:nvPr>
+        </p:nvSpPr>
+        <p:spPr bwMode="auto"/>
+        <p:txBody>
+          <a:bodyPr/>
+          <a:lstStyle/>
+          <a:p>
+            <a:pPr>
+              <a:defRPr/>
+            </a:pPr>
+            <a:r>
+              <a:rPr lang="fr-FR" sz="4400" b="0" i="0" u="none" strike="noStrike" cap="none" spc="0">
+                <a:solidFill>
+                  <a:schemeClr val="tx1"/>
+                </a:solidFill>
+                <a:latin typeface="+mj-lt"/>
+                <a:ea typeface="+mj-ea"/>
+                <a:cs typeface="+mj-cs"/>
+              </a:rPr>
+              <a:t>Exemple of code #2</a:t>
+            </a:r>
+            <a:endParaRPr/>
+          </a:p>
+        </p:txBody>
+      </p:sp>
+      <p:sp>
+        <p:nvSpPr>
+          <p:cNvPr id="466573792" name="Espace réservé de la date 2"/>
+          <p:cNvSpPr>
+            <a:spLocks noGrp="1"/>
+          </p:cNvSpPr>
+          <p:nvPr>
+            <p:ph type="dt" sz="half" idx="10"/>
+          </p:nvPr>
+        </p:nvSpPr>
+        <p:spPr bwMode="auto"/>
+        <p:txBody>
+          <a:bodyPr/>
+          <a:lstStyle/>
+          <a:p>
+            <a:pPr>
+              <a:defRPr/>
+            </a:pPr>
+            <a:r>
+              <a:rPr/>
+              <a:t>04/02/2026</a:t>
+            </a:r>
+            <a:endParaRPr/>
+          </a:p>
+        </p:txBody>
+      </p:sp>
+      <p:sp>
+        <p:nvSpPr>
+          <p:cNvPr id="921629484" name="Espace réservé du numéro de diapositive 4"/>
+          <p:cNvSpPr>
+            <a:spLocks noGrp="1"/>
+          </p:cNvSpPr>
+          <p:nvPr>
+            <p:ph type="sldNum" sz="quarter" idx="12"/>
+          </p:nvPr>
+        </p:nvSpPr>
+        <p:spPr bwMode="auto"/>
+        <p:txBody>
+          <a:bodyPr/>
+          <a:lstStyle/>
+          <a:p>
+            <a:pPr>
+              <a:defRPr/>
+            </a:pPr>
+            <a:fld id="{43049145-3055-3470-E904-AF1360FED3B1}" type="slidenum">
+              <a:rPr lang="fr-FR"/>
+              <a:t/>
+            </a:fld>
+            <a:endParaRPr lang="fr-FR"/>
+          </a:p>
+        </p:txBody>
+      </p:sp>
+    </p:spTree>
+  </p:cSld>
+  <p:clrMapOvr>
+    <a:masterClrMapping/>
+  </p:clrMapOvr>
+  <mc:AlternateContent xmlns:mc="http://schemas.openxmlformats.org/markup-compatibility/2006">
+    <mc:Choice xmlns:p159="http://schemas.microsoft.com/office/powerpoint/2015/09/main" xmlns:p14="http://schemas.microsoft.com/office/powerpoint/2010/main" Requires="p159">
+      <p:transition p14:dur="2000" advClick="1"/>
+    </mc:Choice>
+    <mc:Fallback>
+      <p:transition advClick="1"/>
+    </mc:Fallback>
+  </mc:AlternateContent>
+</p:sld>
+</file>
+
+<file path=ppt/slides/slide12.xml><?xml version="1.0" encoding="utf-8"?>
+<p:sld xmlns:a="http://schemas.openxmlformats.org/drawingml/2006/main" xmlns:r="http://schemas.openxmlformats.org/officeDocument/2006/relationships" xmlns:p="http://schemas.openxmlformats.org/presentationml/2006/main" xmlns:m="http://schemas.openxmlformats.org/officeDocument/2006/math" xmlns:w="http://schemas.openxmlformats.org/wordprocessingml/2006/main" xmlns:mc="http://schemas.openxmlformats.org/markup-compatibility/2006" showMasterPhAnim="0" showMasterSp="1" show="1">
+  <p:cSld name="">
+    <p:spTree>
+      <p:nvGrpSpPr>
+        <p:cNvPr id="1" name=""/>
+        <p:cNvGrpSpPr/>
+        <p:nvPr/>
+      </p:nvGrpSpPr>
+      <p:grpSpPr bwMode="auto">
+        <a:xfrm>
+          <a:off x="0" y="0"/>
+          <a:ext cx="0" cy="0"/>
+          <a:chOff x="0" y="0"/>
+          <a:chExt cx="0" cy="0"/>
+        </a:xfrm>
+      </p:grpSpPr>
+      <p:sp>
+        <p:nvSpPr>
+          <p:cNvPr id="954684596" name="Titre 1"/>
           <p:cNvSpPr>
             <a:spLocks noGrp="1"/>
           </p:cNvSpPr>
@@ -4850,7 +5063,7 @@
       </p:sp>
       <p:sp>
         <p:nvSpPr>
-          <p:cNvPr id="1059539457" name="Espace réservé de la date 2"/>
+          <p:cNvPr id="186283850" name="Espace réservé de la date 2"/>
           <p:cNvSpPr>
             <a:spLocks noGrp="1"/>
           </p:cNvSpPr>
@@ -4876,7 +5089,7 @@
       </p:sp>
       <p:sp>
         <p:nvSpPr>
-          <p:cNvPr id="1197395050" name="Espace réservé du numéro de diapositive 4"/>
+          <p:cNvPr id="942209459" name="Espace réservé du numéro de diapositive 4"/>
           <p:cNvSpPr>
             <a:spLocks noGrp="1"/>
           </p:cNvSpPr>
@@ -4935,7 +5148,7 @@
       </p:grpSpPr>
       <p:sp>
         <p:nvSpPr>
-          <p:cNvPr id="1207714675" name="Titre 1"/>
+          <p:cNvPr id="1793020423" name="Titre 1"/>
           <p:cNvSpPr>
             <a:spLocks noGrp="1"/>
           </p:cNvSpPr>
@@ -4961,7 +5174,7 @@
       </p:sp>
       <p:sp>
         <p:nvSpPr>
-          <p:cNvPr id="284123368" name="Espace réservé du contenu 2"/>
+          <p:cNvPr id="216973212" name="Espace réservé du contenu 2"/>
           <p:cNvSpPr>
             <a:spLocks noGrp="1"/>
           </p:cNvSpPr>
@@ -4988,7 +5201,7 @@
       </p:sp>
       <p:sp>
         <p:nvSpPr>
-          <p:cNvPr id="1375591627" name="Espace réservé du numéro de diapositive 5"/>
+          <p:cNvPr id="760035101" name="Espace réservé du numéro de diapositive 5"/>
           <p:cNvSpPr>
             <a:spLocks noGrp="1"/>
           </p:cNvSpPr>
@@ -5014,7 +5227,7 @@
       </p:sp>
       <p:sp>
         <p:nvSpPr>
-          <p:cNvPr id="965643081" name="Espace réservé de la date 3"/>
+          <p:cNvPr id="1471778160" name="Espace réservé de la date 3"/>
           <p:cNvSpPr>
             <a:spLocks noGrp="1"/>
           </p:cNvSpPr>
@@ -5040,7 +5253,7 @@
       </p:sp>
       <p:pic>
         <p:nvPicPr>
-          <p:cNvPr id="2014333340" name=""/>
+          <p:cNvPr id="642048866" name=""/>
           <p:cNvPicPr>
             <a:picLocks noChangeAspect="1"/>
           </p:cNvPicPr>
@@ -5096,7 +5309,7 @@
       </p:grpSpPr>
       <p:sp>
         <p:nvSpPr>
-          <p:cNvPr id="1305413442" name="Titre 1"/>
+          <p:cNvPr id="1959778119" name="Titre 1"/>
           <p:cNvSpPr>
             <a:spLocks noGrp="1"/>
           </p:cNvSpPr>
@@ -5122,7 +5335,7 @@
       </p:sp>
       <p:sp>
         <p:nvSpPr>
-          <p:cNvPr id="1473875778" name="Espace réservé du contenu 2"/>
+          <p:cNvPr id="918994536" name="Espace réservé du contenu 2"/>
           <p:cNvSpPr>
             <a:spLocks noGrp="1"/>
           </p:cNvSpPr>
@@ -5144,7 +5357,7 @@
       </p:sp>
       <p:sp>
         <p:nvSpPr>
-          <p:cNvPr id="2000260553" name="Espace réservé du numéro de diapositive 5"/>
+          <p:cNvPr id="257514003" name="Espace réservé du numéro de diapositive 5"/>
           <p:cNvSpPr>
             <a:spLocks noGrp="1"/>
           </p:cNvSpPr>
@@ -5170,7 +5383,7 @@
       </p:sp>
       <p:sp>
         <p:nvSpPr>
-          <p:cNvPr id="1224031798" name="Espace réservé de la date 3"/>
+          <p:cNvPr id="1948872305" name="Espace réservé de la date 3"/>
           <p:cNvSpPr>
             <a:spLocks noGrp="1"/>
           </p:cNvSpPr>
@@ -5229,7 +5442,7 @@
       </p:grpSpPr>
       <p:sp>
         <p:nvSpPr>
-          <p:cNvPr id="1793647362" name="Titre 1"/>
+          <p:cNvPr id="1942104705" name="Titre 1"/>
           <p:cNvSpPr>
             <a:spLocks noGrp="1"/>
           </p:cNvSpPr>
@@ -5262,7 +5475,7 @@
       </p:sp>
       <p:sp>
         <p:nvSpPr>
-          <p:cNvPr id="212014779" name="Espace réservé du contenu 2"/>
+          <p:cNvPr id="1386034613" name="Espace réservé du contenu 2"/>
           <p:cNvSpPr>
             <a:spLocks noGrp="1"/>
           </p:cNvSpPr>
@@ -5293,7 +5506,7 @@
       </p:sp>
       <p:sp>
         <p:nvSpPr>
-          <p:cNvPr id="650899715" name="Espace réservé du contenu 3"/>
+          <p:cNvPr id="1501225165" name="Espace réservé du contenu 3"/>
           <p:cNvSpPr>
             <a:spLocks noGrp="1"/>
           </p:cNvSpPr>
@@ -5318,13 +5531,17 @@
               <a:rPr/>
               <a:t>Lase</a:t>
             </a:r>
-            <a:endParaRPr/>
-          </a:p>
-        </p:txBody>
-      </p:sp>
-      <p:sp>
-        <p:nvSpPr>
-          <p:cNvPr id="656491572" name="Espace réservé du numéro de diapositive 6"/>
+            <a:r>
+              <a:rPr lang="fr-FR"/>
+              <a:t>r</a:t>
+            </a:r>
+            <a:endParaRPr/>
+          </a:p>
+        </p:txBody>
+      </p:sp>
+      <p:sp>
+        <p:nvSpPr>
+          <p:cNvPr id="1358067683" name="Espace réservé du numéro de diapositive 6"/>
           <p:cNvSpPr>
             <a:spLocks noGrp="1"/>
           </p:cNvSpPr>
@@ -5350,7 +5567,7 @@
       </p:sp>
       <p:sp>
         <p:nvSpPr>
-          <p:cNvPr id="978480078" name="Espace réservé de la date 4"/>
+          <p:cNvPr id="1001391507" name="Espace réservé de la date 4"/>
           <p:cNvSpPr>
             <a:spLocks noGrp="1"/>
           </p:cNvSpPr>
@@ -5409,7 +5626,7 @@
       </p:grpSpPr>
       <p:sp>
         <p:nvSpPr>
-          <p:cNvPr id="893369582" name="Titre 1"/>
+          <p:cNvPr id="1051094226" name="Titre 1"/>
           <p:cNvSpPr>
             <a:spLocks noGrp="1"/>
           </p:cNvSpPr>
@@ -5419,6 +5636,95 @@
         </p:nvSpPr>
         <p:spPr bwMode="auto"/>
         <p:txBody>
+          <a:bodyPr vertOverflow="overflow" horzOverflow="overflow" vert="horz" wrap="square" lIns="91440" tIns="45720" rIns="91440" bIns="45720" numCol="1" spcCol="0" rtlCol="0" fromWordArt="0" anchor="ctr" anchorCtr="0" forceAA="0" upright="0" compatLnSpc="0">
+            <a:normAutofit/>
+          </a:bodyPr>
+          <a:lstStyle/>
+          <a:p>
+            <a:pPr>
+              <a:defRPr/>
+            </a:pPr>
+            <a:r>
+              <a:rPr lang="fr-FR" sz="4400" b="0" i="0" u="none" strike="noStrike" cap="none" spc="0">
+                <a:solidFill>
+                  <a:schemeClr val="tx1"/>
+                </a:solidFill>
+                <a:latin typeface="Arial"/>
+                <a:ea typeface="Arial"/>
+                <a:cs typeface="Arial"/>
+              </a:rPr>
+              <a:t>Devellopement of communication Technology</a:t>
+            </a:r>
+            <a:endParaRPr sz="4400"/>
+          </a:p>
+        </p:txBody>
+      </p:sp>
+      <p:sp>
+        <p:nvSpPr>
+          <p:cNvPr id="1446329366" name="Espace réservé du contenu 2"/>
+          <p:cNvSpPr>
+            <a:spLocks noGrp="1"/>
+          </p:cNvSpPr>
+          <p:nvPr>
+            <p:ph sz="half" idx="1"/>
+          </p:nvPr>
+        </p:nvSpPr>
+        <p:spPr bwMode="auto">
+          <a:xfrm>
+            <a:off x="838199" y="1825624"/>
+            <a:ext cx="5181599" cy="4351338"/>
+          </a:xfrm>
+        </p:spPr>
+        <p:txBody>
+          <a:bodyPr/>
+          <a:lstStyle/>
+          <a:p>
+            <a:pPr>
+              <a:defRPr/>
+            </a:pPr>
+            <a:endParaRPr/>
+          </a:p>
+        </p:txBody>
+      </p:sp>
+      <p:sp>
+        <p:nvSpPr>
+          <p:cNvPr id="1296936065" name="Espace réservé du contenu 3"/>
+          <p:cNvSpPr>
+            <a:spLocks noGrp="1"/>
+          </p:cNvSpPr>
+          <p:nvPr>
+            <p:ph sz="half" idx="2"/>
+          </p:nvPr>
+        </p:nvSpPr>
+        <p:spPr bwMode="auto">
+          <a:xfrm>
+            <a:off x="6172200" y="1825624"/>
+            <a:ext cx="5181599" cy="4351338"/>
+          </a:xfrm>
+        </p:spPr>
+        <p:txBody>
+          <a:bodyPr/>
+          <a:lstStyle/>
+          <a:p>
+            <a:pPr>
+              <a:defRPr/>
+            </a:pPr>
+            <a:endParaRPr/>
+          </a:p>
+        </p:txBody>
+      </p:sp>
+      <p:sp>
+        <p:nvSpPr>
+          <p:cNvPr id="13352997" name="Espace réservé de la date 4"/>
+          <p:cNvSpPr>
+            <a:spLocks noGrp="1"/>
+          </p:cNvSpPr>
+          <p:nvPr>
+            <p:ph type="dt" sz="half" idx="10"/>
+          </p:nvPr>
+        </p:nvSpPr>
+        <p:spPr bwMode="auto"/>
+        <p:txBody>
           <a:bodyPr/>
           <a:lstStyle/>
           <a:p>
@@ -5427,37 +5733,15 @@
             </a:pPr>
             <a:r>
               <a:rPr/>
-              <a:t>RGB LEDs</a:t>
-            </a:r>
-            <a:endParaRPr/>
-          </a:p>
-        </p:txBody>
-      </p:sp>
-      <p:sp>
-        <p:nvSpPr>
-          <p:cNvPr id="1436195282" name="Espace réservé du contenu 2"/>
-          <p:cNvSpPr>
-            <a:spLocks noGrp="1"/>
-          </p:cNvSpPr>
-          <p:nvPr>
-            <p:ph idx="1"/>
-          </p:nvPr>
-        </p:nvSpPr>
-        <p:spPr bwMode="auto"/>
-        <p:txBody>
-          <a:bodyPr/>
-          <a:lstStyle/>
-          <a:p>
-            <a:pPr>
-              <a:defRPr/>
-            </a:pPr>
-            <a:endParaRPr/>
-          </a:p>
-        </p:txBody>
-      </p:sp>
-      <p:sp>
-        <p:nvSpPr>
-          <p:cNvPr id="227207917" name="Espace réservé du numéro de diapositive 5"/>
+              <a:t>04/02/2026</a:t>
+            </a:r>
+            <a:endParaRPr/>
+          </a:p>
+        </p:txBody>
+      </p:sp>
+      <p:sp>
+        <p:nvSpPr>
+          <p:cNvPr id="1119506242" name="Espace réservé du numéro de diapositive 6"/>
           <p:cNvSpPr>
             <a:spLocks noGrp="1"/>
           </p:cNvSpPr>
@@ -5473,37 +5757,11 @@
             <a:pPr>
               <a:defRPr/>
             </a:pPr>
-            <a:fld id="{F041B07B-4BE3-83D6-CBBE-6B3D0E28D179}" type="slidenum">
+            <a:fld id="{CBC5759C-0467-9260-2780-50138569D42C}" type="slidenum">
               <a:rPr lang="fr-FR"/>
               <a:t/>
             </a:fld>
-            <a:endParaRPr/>
-          </a:p>
-        </p:txBody>
-      </p:sp>
-      <p:sp>
-        <p:nvSpPr>
-          <p:cNvPr id="956192299" name="Espace réservé de la date 3"/>
-          <p:cNvSpPr>
-            <a:spLocks noGrp="1"/>
-          </p:cNvSpPr>
-          <p:nvPr>
-            <p:ph type="dt" sz="half" idx="10"/>
-          </p:nvPr>
-        </p:nvSpPr>
-        <p:spPr bwMode="auto"/>
-        <p:txBody>
-          <a:bodyPr/>
-          <a:lstStyle/>
-          <a:p>
-            <a:pPr>
-              <a:defRPr/>
-            </a:pPr>
-            <a:r>
-              <a:rPr/>
-              <a:t>04/02/2026</a:t>
-            </a:r>
-            <a:endParaRPr/>
+            <a:endParaRPr lang="fr-FR"/>
           </a:p>
         </p:txBody>
       </p:sp>
@@ -5542,7 +5800,7 @@
       </p:grpSpPr>
       <p:sp>
         <p:nvSpPr>
-          <p:cNvPr id="2033495573" name="Titre 1"/>
+          <p:cNvPr id="1678221039" name="Titre 1"/>
           <p:cNvSpPr>
             <a:spLocks noGrp="1"/>
           </p:cNvSpPr>
@@ -5568,7 +5826,7 @@
       </p:sp>
       <p:sp>
         <p:nvSpPr>
-          <p:cNvPr id="1219435151" name="Espace réservé du contenu 2"/>
+          <p:cNvPr id="1300701636" name="Espace réservé du contenu 2"/>
           <p:cNvSpPr>
             <a:spLocks noGrp="1"/>
           </p:cNvSpPr>
@@ -5590,7 +5848,7 @@
       </p:sp>
       <p:sp>
         <p:nvSpPr>
-          <p:cNvPr id="1285907199" name="Espace réservé du numéro de diapositive 5"/>
+          <p:cNvPr id="1551039914" name="Espace réservé du numéro de diapositive 5"/>
           <p:cNvSpPr>
             <a:spLocks noGrp="1"/>
           </p:cNvSpPr>
@@ -5616,7 +5874,7 @@
       </p:sp>
       <p:sp>
         <p:nvSpPr>
-          <p:cNvPr id="2065548379" name="Espace réservé de la date 3"/>
+          <p:cNvPr id="1985312033" name="Espace réservé de la date 3"/>
           <p:cNvSpPr>
             <a:spLocks noGrp="1"/>
           </p:cNvSpPr>
@@ -5675,7 +5933,7 @@
       </p:grpSpPr>
       <p:sp>
         <p:nvSpPr>
-          <p:cNvPr id="899933483" name="Titre 1"/>
+          <p:cNvPr id="745495665" name="Titre 1"/>
           <p:cNvSpPr>
             <a:spLocks noGrp="1"/>
           </p:cNvSpPr>
@@ -5693,15 +5951,15 @@
             </a:pPr>
             <a:r>
               <a:rPr/>
-              <a:t>Video of functionnality</a:t>
-            </a:r>
-            <a:endParaRPr/>
-          </a:p>
-        </p:txBody>
-      </p:sp>
-      <p:sp>
-        <p:nvSpPr>
-          <p:cNvPr id="101397041" name="Espace réservé du contenu 2"/>
+              <a:t>RGB LEDs</a:t>
+            </a:r>
+            <a:endParaRPr/>
+          </a:p>
+        </p:txBody>
+      </p:sp>
+      <p:sp>
+        <p:nvSpPr>
+          <p:cNvPr id="1692309627" name="Espace réservé du contenu 2"/>
           <p:cNvSpPr>
             <a:spLocks noGrp="1"/>
           </p:cNvSpPr>
@@ -5717,44 +5975,13 @@
             <a:pPr>
               <a:defRPr/>
             </a:pPr>
-            <a:r>
-              <a:rPr lang="fr-FR" sz="2800" b="0" i="0" u="none" strike="noStrike" cap="none" spc="0">
-                <a:solidFill>
-                  <a:schemeClr val="tx1"/>
-                </a:solidFill>
-                <a:latin typeface="Arial"/>
-                <a:ea typeface="Arial"/>
-                <a:cs typeface="Arial"/>
-              </a:rPr>
-              <a:t>feasibility</a:t>
-            </a:r>
-            <a:r>
-              <a:rPr/>
-              <a:t> of projet</a:t>
-            </a:r>
-            <a:endParaRPr/>
-          </a:p>
-          <a:p>
-            <a:pPr>
-              <a:defRPr/>
-            </a:pPr>
-            <a:r>
-              <a:rPr/>
-              <a:t>(Describing what is happening on the screen)</a:t>
-            </a:r>
-            <a:endParaRPr/>
-          </a:p>
-          <a:p>
-            <a:pPr>
-              <a:defRPr/>
-            </a:pPr>
-            <a:endParaRPr/>
-          </a:p>
-        </p:txBody>
-      </p:sp>
-      <p:sp>
-        <p:nvSpPr>
-          <p:cNvPr id="1652110690" name="Espace réservé du numéro de diapositive 5"/>
+            <a:endParaRPr/>
+          </a:p>
+        </p:txBody>
+      </p:sp>
+      <p:sp>
+        <p:nvSpPr>
+          <p:cNvPr id="596859281" name="Espace réservé du numéro de diapositive 5"/>
           <p:cNvSpPr>
             <a:spLocks noGrp="1"/>
           </p:cNvSpPr>
@@ -5770,7 +5997,7 @@
             <a:pPr>
               <a:defRPr/>
             </a:pPr>
-            <a:fld id="{D208D9F0-C16A-429C-FBEB-5E3ADF800BBD}" type="slidenum">
+            <a:fld id="{F041B07B-4BE3-83D6-CBBE-6B3D0E28D179}" type="slidenum">
               <a:rPr lang="fr-FR"/>
               <a:t/>
             </a:fld>
@@ -5780,7 +6007,7 @@
       </p:sp>
       <p:sp>
         <p:nvSpPr>
-          <p:cNvPr id="689387526" name="Espace réservé de la date 3"/>
+          <p:cNvPr id="574603365" name="Espace réservé de la date 3"/>
           <p:cNvSpPr>
             <a:spLocks noGrp="1"/>
           </p:cNvSpPr>
@@ -5800,6 +6027,28 @@
               <a:rPr/>
               <a:t>04/02/2026</a:t>
             </a:r>
+            <a:endParaRPr/>
+          </a:p>
+        </p:txBody>
+      </p:sp>
+      <p:sp>
+        <p:nvSpPr>
+          <p:cNvPr id="1325078919" name="Espace réservé du pied de page 4"/>
+          <p:cNvSpPr>
+            <a:spLocks noGrp="1"/>
+          </p:cNvSpPr>
+          <p:nvPr>
+            <p:ph type="ftr" sz="quarter" idx="11"/>
+          </p:nvPr>
+        </p:nvSpPr>
+        <p:spPr bwMode="auto"/>
+        <p:txBody>
+          <a:bodyPr/>
+          <a:lstStyle/>
+          <a:p>
+            <a:pPr>
+              <a:defRPr/>
+            </a:pPr>
             <a:endParaRPr/>
           </a:p>
         </p:txBody>
@@ -5839,7 +6088,7 @@
       </p:grpSpPr>
       <p:sp>
         <p:nvSpPr>
-          <p:cNvPr id="594385368" name="Titre 1"/>
+          <p:cNvPr id="1740746572" name="Titre 1"/>
           <p:cNvSpPr>
             <a:spLocks noGrp="1"/>
           </p:cNvSpPr>
@@ -5856,16 +6105,95 @@
               <a:defRPr/>
             </a:pPr>
             <a:r>
-              <a:rPr lang="fr-FR"/>
-              <a:t>Thank you for your attention</a:t>
-            </a:r>
-            <a:endParaRPr/>
-          </a:p>
-        </p:txBody>
-      </p:sp>
-      <p:sp>
-        <p:nvSpPr>
-          <p:cNvPr id="2109573538" name="Espace réservé de la date 2"/>
+              <a:rPr/>
+              <a:t>Video of functionnality</a:t>
+            </a:r>
+            <a:endParaRPr/>
+          </a:p>
+        </p:txBody>
+      </p:sp>
+      <p:sp>
+        <p:nvSpPr>
+          <p:cNvPr id="1784715862" name="Espace réservé du contenu 2"/>
+          <p:cNvSpPr>
+            <a:spLocks noGrp="1"/>
+          </p:cNvSpPr>
+          <p:nvPr>
+            <p:ph idx="1"/>
+          </p:nvPr>
+        </p:nvSpPr>
+        <p:spPr bwMode="auto"/>
+        <p:txBody>
+          <a:bodyPr/>
+          <a:lstStyle/>
+          <a:p>
+            <a:pPr>
+              <a:defRPr/>
+            </a:pPr>
+            <a:r>
+              <a:rPr lang="fr-FR" sz="2800" b="0" i="0" u="none" strike="noStrike" cap="none" spc="0">
+                <a:solidFill>
+                  <a:schemeClr val="tx1"/>
+                </a:solidFill>
+                <a:latin typeface="Arial"/>
+                <a:ea typeface="Arial"/>
+                <a:cs typeface="Arial"/>
+              </a:rPr>
+              <a:t>feasibility</a:t>
+            </a:r>
+            <a:r>
+              <a:rPr/>
+              <a:t> of projet</a:t>
+            </a:r>
+            <a:endParaRPr/>
+          </a:p>
+          <a:p>
+            <a:pPr>
+              <a:defRPr/>
+            </a:pPr>
+            <a:r>
+              <a:rPr/>
+              <a:t>(Describing what is happening on the screen)</a:t>
+            </a:r>
+            <a:endParaRPr/>
+          </a:p>
+          <a:p>
+            <a:pPr>
+              <a:defRPr/>
+            </a:pPr>
+            <a:endParaRPr/>
+          </a:p>
+        </p:txBody>
+      </p:sp>
+      <p:sp>
+        <p:nvSpPr>
+          <p:cNvPr id="2139708925" name="Espace réservé du numéro de diapositive 5"/>
+          <p:cNvSpPr>
+            <a:spLocks noGrp="1"/>
+          </p:cNvSpPr>
+          <p:nvPr>
+            <p:ph type="sldNum" sz="quarter" idx="12"/>
+          </p:nvPr>
+        </p:nvSpPr>
+        <p:spPr bwMode="auto"/>
+        <p:txBody>
+          <a:bodyPr/>
+          <a:lstStyle/>
+          <a:p>
+            <a:pPr>
+              <a:defRPr/>
+            </a:pPr>
+            <a:fld id="{D208D9F0-C16A-429C-FBEB-5E3ADF800BBD}" type="slidenum">
+              <a:rPr lang="fr-FR"/>
+              <a:t/>
+            </a:fld>
+            <a:endParaRPr/>
+          </a:p>
+        </p:txBody>
+      </p:sp>
+      <p:sp>
+        <p:nvSpPr>
+          <p:cNvPr id="2017471056" name="Espace réservé de la date 3"/>
           <p:cNvSpPr>
             <a:spLocks noGrp="1"/>
           </p:cNvSpPr>
@@ -5886,32 +6214,6 @@
               <a:t>04/02/2026</a:t>
             </a:r>
             <a:endParaRPr/>
-          </a:p>
-        </p:txBody>
-      </p:sp>
-      <p:sp>
-        <p:nvSpPr>
-          <p:cNvPr id="2137186509" name="Espace réservé du numéro de diapositive 4"/>
-          <p:cNvSpPr>
-            <a:spLocks noGrp="1"/>
-          </p:cNvSpPr>
-          <p:nvPr>
-            <p:ph type="sldNum" sz="quarter" idx="12"/>
-          </p:nvPr>
-        </p:nvSpPr>
-        <p:spPr bwMode="auto"/>
-        <p:txBody>
-          <a:bodyPr/>
-          <a:lstStyle/>
-          <a:p>
-            <a:pPr>
-              <a:defRPr/>
-            </a:pPr>
-            <a:fld id="{4159E1E4-1DDC-AAFE-4B0F-AF3554B29A48}" type="slidenum">
-              <a:rPr lang="fr-FR"/>
-              <a:t/>
-            </a:fld>
-            <a:endParaRPr lang="fr-FR"/>
           </a:p>
         </p:txBody>
       </p:sp>
@@ -5950,7 +6252,7 @@
       </p:grpSpPr>
       <p:sp>
         <p:nvSpPr>
-          <p:cNvPr id="1332190713" name="Titre 1"/>
+          <p:cNvPr id="695079900" name="Titre 1"/>
           <p:cNvSpPr>
             <a:spLocks noGrp="1"/>
           </p:cNvSpPr>
@@ -5968,15 +6270,15 @@
             </a:pPr>
             <a:r>
               <a:rPr lang="fr-FR"/>
-              <a:t>Exemple of code #1</a:t>
-            </a:r>
-            <a:endParaRPr/>
-          </a:p>
-        </p:txBody>
-      </p:sp>
-      <p:sp>
-        <p:nvSpPr>
-          <p:cNvPr id="701206748" name="Espace réservé de la date 2"/>
+              <a:t>Thank you for your attention</a:t>
+            </a:r>
+            <a:endParaRPr/>
+          </a:p>
+        </p:txBody>
+      </p:sp>
+      <p:sp>
+        <p:nvSpPr>
+          <p:cNvPr id="98579082" name="Espace réservé de la date 2"/>
           <p:cNvSpPr>
             <a:spLocks noGrp="1"/>
           </p:cNvSpPr>
@@ -6002,7 +6304,7 @@
       </p:sp>
       <p:sp>
         <p:nvSpPr>
-          <p:cNvPr id="101568447" name="Espace réservé du numéro de diapositive 4"/>
+          <p:cNvPr id="2031335436" name="Espace réservé du numéro de diapositive 4"/>
           <p:cNvSpPr>
             <a:spLocks noGrp="1"/>
           </p:cNvSpPr>
@@ -6018,7 +6320,7 @@
             <a:pPr>
               <a:defRPr/>
             </a:pPr>
-            <a:fld id="{1A3A6BC6-A3CF-1FCD-B8B0-A4EF1A24EABF}" type="slidenum">
+            <a:fld id="{4159E1E4-1DDC-AAFE-4B0F-AF3554B29A48}" type="slidenum">
               <a:rPr lang="fr-FR"/>
               <a:t/>
             </a:fld>
